--- a/tutorial/T10/tut10.pptx
+++ b/tutorial/T10/tut10.pptx
@@ -5,18 +5,22 @@
     <p:sldMasterId id="2147483648" r:id="rId1"/>
   </p:sldMasterIdLst>
   <p:notesMasterIdLst>
-    <p:notesMasterId r:id="rId11"/>
+    <p:notesMasterId r:id="rId15"/>
   </p:notesMasterIdLst>
   <p:sldIdLst>
     <p:sldId id="256" r:id="rId2"/>
-    <p:sldId id="287" r:id="rId3"/>
-    <p:sldId id="288" r:id="rId4"/>
-    <p:sldId id="290" r:id="rId5"/>
-    <p:sldId id="274" r:id="rId6"/>
-    <p:sldId id="291" r:id="rId7"/>
-    <p:sldId id="292" r:id="rId8"/>
-    <p:sldId id="293" r:id="rId9"/>
-    <p:sldId id="272" r:id="rId10"/>
+    <p:sldId id="294" r:id="rId3"/>
+    <p:sldId id="295" r:id="rId4"/>
+    <p:sldId id="287" r:id="rId5"/>
+    <p:sldId id="288" r:id="rId6"/>
+    <p:sldId id="290" r:id="rId7"/>
+    <p:sldId id="274" r:id="rId8"/>
+    <p:sldId id="291" r:id="rId9"/>
+    <p:sldId id="292" r:id="rId10"/>
+    <p:sldId id="296" r:id="rId11"/>
+    <p:sldId id="297" r:id="rId12"/>
+    <p:sldId id="293" r:id="rId13"/>
+    <p:sldId id="272" r:id="rId14"/>
   </p:sldIdLst>
   <p:sldSz cx="12192000" cy="6858000"/>
   <p:notesSz cx="6858000" cy="9144000"/>
@@ -670,7 +674,7 @@
           <a:p>
             <a:fld id="{9265656F-E94E-4266-B808-01646AFF7213}" type="datetimeFigureOut">
               <a:rPr lang="en-US" smtClean="0"/>
-              <a:t>11/9/25</a:t>
+              <a:t>11/10/25</a:t>
             </a:fld>
             <a:endParaRPr lang="en-US"/>
           </a:p>
@@ -1087,7 +1091,7 @@
           <a:p>
             <a:fld id="{2425905D-C0C4-D040-B3F5-79CCA23FA4EB}" type="datetimeFigureOut">
               <a:rPr lang="en-US" smtClean="0"/>
-              <a:t>11/9/25</a:t>
+              <a:t>11/10/25</a:t>
             </a:fld>
             <a:endParaRPr lang="en-US"/>
           </a:p>
@@ -1287,7 +1291,7 @@
           <a:p>
             <a:fld id="{2425905D-C0C4-D040-B3F5-79CCA23FA4EB}" type="datetimeFigureOut">
               <a:rPr lang="en-US" smtClean="0"/>
-              <a:t>11/9/25</a:t>
+              <a:t>11/10/25</a:t>
             </a:fld>
             <a:endParaRPr lang="en-US"/>
           </a:p>
@@ -1497,7 +1501,7 @@
           <a:p>
             <a:fld id="{2425905D-C0C4-D040-B3F5-79CCA23FA4EB}" type="datetimeFigureOut">
               <a:rPr lang="en-US" smtClean="0"/>
-              <a:t>11/9/25</a:t>
+              <a:t>11/10/25</a:t>
             </a:fld>
             <a:endParaRPr lang="en-US"/>
           </a:p>
@@ -1697,7 +1701,7 @@
           <a:p>
             <a:fld id="{2425905D-C0C4-D040-B3F5-79CCA23FA4EB}" type="datetimeFigureOut">
               <a:rPr lang="en-US" smtClean="0"/>
-              <a:t>11/9/25</a:t>
+              <a:t>11/10/25</a:t>
             </a:fld>
             <a:endParaRPr lang="en-US"/>
           </a:p>
@@ -1973,7 +1977,7 @@
           <a:p>
             <a:fld id="{2425905D-C0C4-D040-B3F5-79CCA23FA4EB}" type="datetimeFigureOut">
               <a:rPr lang="en-US" smtClean="0"/>
-              <a:t>11/9/25</a:t>
+              <a:t>11/10/25</a:t>
             </a:fld>
             <a:endParaRPr lang="en-US"/>
           </a:p>
@@ -2241,7 +2245,7 @@
           <a:p>
             <a:fld id="{2425905D-C0C4-D040-B3F5-79CCA23FA4EB}" type="datetimeFigureOut">
               <a:rPr lang="en-US" smtClean="0"/>
-              <a:t>11/9/25</a:t>
+              <a:t>11/10/25</a:t>
             </a:fld>
             <a:endParaRPr lang="en-US"/>
           </a:p>
@@ -2656,7 +2660,7 @@
           <a:p>
             <a:fld id="{2425905D-C0C4-D040-B3F5-79CCA23FA4EB}" type="datetimeFigureOut">
               <a:rPr lang="en-US" smtClean="0"/>
-              <a:t>11/9/25</a:t>
+              <a:t>11/10/25</a:t>
             </a:fld>
             <a:endParaRPr lang="en-US"/>
           </a:p>
@@ -2798,7 +2802,7 @@
           <a:p>
             <a:fld id="{2425905D-C0C4-D040-B3F5-79CCA23FA4EB}" type="datetimeFigureOut">
               <a:rPr lang="en-US" smtClean="0"/>
-              <a:t>11/9/25</a:t>
+              <a:t>11/10/25</a:t>
             </a:fld>
             <a:endParaRPr lang="en-US"/>
           </a:p>
@@ -2911,7 +2915,7 @@
           <a:p>
             <a:fld id="{2425905D-C0C4-D040-B3F5-79CCA23FA4EB}" type="datetimeFigureOut">
               <a:rPr lang="en-US" smtClean="0"/>
-              <a:t>11/9/25</a:t>
+              <a:t>11/10/25</a:t>
             </a:fld>
             <a:endParaRPr lang="en-US"/>
           </a:p>
@@ -3224,7 +3228,7 @@
           <a:p>
             <a:fld id="{2425905D-C0C4-D040-B3F5-79CCA23FA4EB}" type="datetimeFigureOut">
               <a:rPr lang="en-US" smtClean="0"/>
-              <a:t>11/9/25</a:t>
+              <a:t>11/10/25</a:t>
             </a:fld>
             <a:endParaRPr lang="en-US"/>
           </a:p>
@@ -3513,7 +3517,7 @@
           <a:p>
             <a:fld id="{2425905D-C0C4-D040-B3F5-79CCA23FA4EB}" type="datetimeFigureOut">
               <a:rPr lang="en-US" smtClean="0"/>
-              <a:t>11/9/25</a:t>
+              <a:t>11/10/25</a:t>
             </a:fld>
             <a:endParaRPr lang="en-US"/>
           </a:p>
@@ -3756,7 +3760,7 @@
           <a:p>
             <a:fld id="{2425905D-C0C4-D040-B3F5-79CCA23FA4EB}" type="datetimeFigureOut">
               <a:rPr lang="en-US" smtClean="0"/>
-              <a:t>11/9/25</a:t>
+              <a:t>11/10/25</a:t>
             </a:fld>
             <a:endParaRPr lang="en-US"/>
           </a:p>
@@ -4329,7 +4333,1519 @@
 </p:sld>
 </file>
 
+<file path=ppt/slides/slide10.xml><?xml version="1.0" encoding="utf-8"?>
+<p:sld xmlns:a="http://schemas.openxmlformats.org/drawingml/2006/main" xmlns:r="http://schemas.openxmlformats.org/officeDocument/2006/relationships" xmlns:p="http://schemas.openxmlformats.org/presentationml/2006/main">
+  <p:cSld>
+    <p:spTree>
+      <p:nvGrpSpPr>
+        <p:cNvPr id="1" name=""/>
+        <p:cNvGrpSpPr/>
+        <p:nvPr/>
+      </p:nvGrpSpPr>
+      <p:grpSpPr>
+        <a:xfrm>
+          <a:off x="0" y="0"/>
+          <a:ext cx="0" cy="0"/>
+          <a:chOff x="0" y="0"/>
+          <a:chExt cx="0" cy="0"/>
+        </a:xfrm>
+      </p:grpSpPr>
+      <p:sp>
+        <p:nvSpPr>
+          <p:cNvPr id="6" name="Title 1">
+            <a:extLst>
+              <a:ext uri="{FF2B5EF4-FFF2-40B4-BE49-F238E27FC236}">
+                <a16:creationId xmlns:a16="http://schemas.microsoft.com/office/drawing/2014/main" id="{118CA799-E4E9-A1C8-5C60-A3F3D99D600E}"/>
+              </a:ext>
+            </a:extLst>
+          </p:cNvPr>
+          <p:cNvSpPr>
+            <a:spLocks noGrp="1"/>
+          </p:cNvSpPr>
+          <p:nvPr>
+            <p:ph type="title"/>
+          </p:nvPr>
+        </p:nvSpPr>
+        <p:spPr>
+          <a:xfrm>
+            <a:off x="838200" y="-4206"/>
+            <a:ext cx="10515600" cy="1325563"/>
+          </a:xfrm>
+        </p:spPr>
+        <p:txBody>
+          <a:bodyPr/>
+          <a:lstStyle/>
+          <a:p>
+            <a:r>
+              <a:rPr lang="en" altLang="zh-CN" b="1" dirty="0"/>
+              <a:t>Static Router</a:t>
+            </a:r>
+            <a:r>
+              <a:rPr lang="zh-CN" altLang="zh-CN" b="1" dirty="0"/>
+              <a:t>:</a:t>
+            </a:r>
+            <a:r>
+              <a:rPr lang="en-US" altLang="zh-CN" b="1" dirty="0"/>
+              <a:t> receiver</a:t>
+            </a:r>
+            <a:endParaRPr lang="en-US" b="1" dirty="0"/>
+          </a:p>
+        </p:txBody>
+      </p:sp>
+      <p:sp>
+        <p:nvSpPr>
+          <p:cNvPr id="2" name="Google Shape;83;p17">
+            <a:extLst>
+              <a:ext uri="{FF2B5EF4-FFF2-40B4-BE49-F238E27FC236}">
+                <a16:creationId xmlns:a16="http://schemas.microsoft.com/office/drawing/2014/main" id="{6BBEA3AE-E29F-6D3D-CADA-51EE73C22525}"/>
+              </a:ext>
+            </a:extLst>
+          </p:cNvPr>
+          <p:cNvSpPr txBox="1">
+            <a:spLocks/>
+          </p:cNvSpPr>
+          <p:nvPr/>
+        </p:nvSpPr>
+        <p:spPr>
+          <a:xfrm>
+            <a:off x="838199" y="1117456"/>
+            <a:ext cx="10990943" cy="2816981"/>
+          </a:xfrm>
+          <a:prstGeom prst="rect">
+            <a:avLst/>
+          </a:prstGeom>
+        </p:spPr>
+        <p:txBody>
+          <a:bodyPr spcFirstLastPara="1" vert="horz" wrap="square" lIns="91425" tIns="91425" rIns="91425" bIns="91425" rtlCol="0" anchor="t" anchorCtr="0">
+            <a:normAutofit fontScale="25000" lnSpcReduction="20000"/>
+          </a:bodyPr>
+          <a:lstStyle>
+            <a:lvl1pPr marL="228600" indent="-228600" algn="l" defTabSz="914400" rtl="0" eaLnBrk="1" latinLnBrk="0" hangingPunct="1">
+              <a:lnSpc>
+                <a:spcPct val="90000"/>
+              </a:lnSpc>
+              <a:spcBef>
+                <a:spcPts val="1000"/>
+              </a:spcBef>
+              <a:buFont typeface="Arial" panose="020B0604020202020204" pitchFamily="34" charset="0"/>
+              <a:buChar char="•"/>
+              <a:defRPr sz="2800" kern="1200">
+                <a:solidFill>
+                  <a:schemeClr val="tx1"/>
+                </a:solidFill>
+                <a:latin typeface="+mn-lt"/>
+                <a:ea typeface="+mn-ea"/>
+                <a:cs typeface="+mn-cs"/>
+              </a:defRPr>
+            </a:lvl1pPr>
+            <a:lvl2pPr marL="685800" indent="-228600" algn="l" defTabSz="914400" rtl="0" eaLnBrk="1" latinLnBrk="0" hangingPunct="1">
+              <a:lnSpc>
+                <a:spcPct val="90000"/>
+              </a:lnSpc>
+              <a:spcBef>
+                <a:spcPts val="500"/>
+              </a:spcBef>
+              <a:buFont typeface="Arial" panose="020B0604020202020204" pitchFamily="34" charset="0"/>
+              <a:buChar char="•"/>
+              <a:defRPr sz="2400" kern="1200">
+                <a:solidFill>
+                  <a:schemeClr val="tx1"/>
+                </a:solidFill>
+                <a:latin typeface="+mn-lt"/>
+                <a:ea typeface="+mn-ea"/>
+                <a:cs typeface="+mn-cs"/>
+              </a:defRPr>
+            </a:lvl2pPr>
+            <a:lvl3pPr marL="1143000" indent="-228600" algn="l" defTabSz="914400" rtl="0" eaLnBrk="1" latinLnBrk="0" hangingPunct="1">
+              <a:lnSpc>
+                <a:spcPct val="90000"/>
+              </a:lnSpc>
+              <a:spcBef>
+                <a:spcPts val="500"/>
+              </a:spcBef>
+              <a:buFont typeface="Arial" panose="020B0604020202020204" pitchFamily="34" charset="0"/>
+              <a:buChar char="•"/>
+              <a:defRPr sz="2000" kern="1200">
+                <a:solidFill>
+                  <a:schemeClr val="tx1"/>
+                </a:solidFill>
+                <a:latin typeface="+mn-lt"/>
+                <a:ea typeface="+mn-ea"/>
+                <a:cs typeface="+mn-cs"/>
+              </a:defRPr>
+            </a:lvl3pPr>
+            <a:lvl4pPr marL="1600200" indent="-228600" algn="l" defTabSz="914400" rtl="0" eaLnBrk="1" latinLnBrk="0" hangingPunct="1">
+              <a:lnSpc>
+                <a:spcPct val="90000"/>
+              </a:lnSpc>
+              <a:spcBef>
+                <a:spcPts val="500"/>
+              </a:spcBef>
+              <a:buFont typeface="Arial" panose="020B0604020202020204" pitchFamily="34" charset="0"/>
+              <a:buChar char="•"/>
+              <a:defRPr sz="1800" kern="1200">
+                <a:solidFill>
+                  <a:schemeClr val="tx1"/>
+                </a:solidFill>
+                <a:latin typeface="+mn-lt"/>
+                <a:ea typeface="+mn-ea"/>
+                <a:cs typeface="+mn-cs"/>
+              </a:defRPr>
+            </a:lvl4pPr>
+            <a:lvl5pPr marL="2057400" indent="-228600" algn="l" defTabSz="914400" rtl="0" eaLnBrk="1" latinLnBrk="0" hangingPunct="1">
+              <a:lnSpc>
+                <a:spcPct val="90000"/>
+              </a:lnSpc>
+              <a:spcBef>
+                <a:spcPts val="500"/>
+              </a:spcBef>
+              <a:buFont typeface="Arial" panose="020B0604020202020204" pitchFamily="34" charset="0"/>
+              <a:buChar char="•"/>
+              <a:defRPr sz="1800" kern="1200">
+                <a:solidFill>
+                  <a:schemeClr val="tx1"/>
+                </a:solidFill>
+                <a:latin typeface="+mn-lt"/>
+                <a:ea typeface="+mn-ea"/>
+                <a:cs typeface="+mn-cs"/>
+              </a:defRPr>
+            </a:lvl5pPr>
+            <a:lvl6pPr marL="2514600" indent="-228600" algn="l" defTabSz="914400" rtl="0" eaLnBrk="1" latinLnBrk="0" hangingPunct="1">
+              <a:lnSpc>
+                <a:spcPct val="90000"/>
+              </a:lnSpc>
+              <a:spcBef>
+                <a:spcPts val="500"/>
+              </a:spcBef>
+              <a:buFont typeface="Arial" panose="020B0604020202020204" pitchFamily="34" charset="0"/>
+              <a:buChar char="•"/>
+              <a:defRPr sz="1800" kern="1200">
+                <a:solidFill>
+                  <a:schemeClr val="tx1"/>
+                </a:solidFill>
+                <a:latin typeface="+mn-lt"/>
+                <a:ea typeface="+mn-ea"/>
+                <a:cs typeface="+mn-cs"/>
+              </a:defRPr>
+            </a:lvl6pPr>
+            <a:lvl7pPr marL="2971800" indent="-228600" algn="l" defTabSz="914400" rtl="0" eaLnBrk="1" latinLnBrk="0" hangingPunct="1">
+              <a:lnSpc>
+                <a:spcPct val="90000"/>
+              </a:lnSpc>
+              <a:spcBef>
+                <a:spcPts val="500"/>
+              </a:spcBef>
+              <a:buFont typeface="Arial" panose="020B0604020202020204" pitchFamily="34" charset="0"/>
+              <a:buChar char="•"/>
+              <a:defRPr sz="1800" kern="1200">
+                <a:solidFill>
+                  <a:schemeClr val="tx1"/>
+                </a:solidFill>
+                <a:latin typeface="+mn-lt"/>
+                <a:ea typeface="+mn-ea"/>
+                <a:cs typeface="+mn-cs"/>
+              </a:defRPr>
+            </a:lvl7pPr>
+            <a:lvl8pPr marL="3429000" indent="-228600" algn="l" defTabSz="914400" rtl="0" eaLnBrk="1" latinLnBrk="0" hangingPunct="1">
+              <a:lnSpc>
+                <a:spcPct val="90000"/>
+              </a:lnSpc>
+              <a:spcBef>
+                <a:spcPts val="500"/>
+              </a:spcBef>
+              <a:buFont typeface="Arial" panose="020B0604020202020204" pitchFamily="34" charset="0"/>
+              <a:buChar char="•"/>
+              <a:defRPr sz="1800" kern="1200">
+                <a:solidFill>
+                  <a:schemeClr val="tx1"/>
+                </a:solidFill>
+                <a:latin typeface="+mn-lt"/>
+                <a:ea typeface="+mn-ea"/>
+                <a:cs typeface="+mn-cs"/>
+              </a:defRPr>
+            </a:lvl8pPr>
+            <a:lvl9pPr marL="3886200" indent="-228600" algn="l" defTabSz="914400" rtl="0" eaLnBrk="1" latinLnBrk="0" hangingPunct="1">
+              <a:lnSpc>
+                <a:spcPct val="90000"/>
+              </a:lnSpc>
+              <a:spcBef>
+                <a:spcPts val="500"/>
+              </a:spcBef>
+              <a:buFont typeface="Arial" panose="020B0604020202020204" pitchFamily="34" charset="0"/>
+              <a:buChar char="•"/>
+              <a:defRPr sz="1800" kern="1200">
+                <a:solidFill>
+                  <a:schemeClr val="tx1"/>
+                </a:solidFill>
+                <a:latin typeface="+mn-lt"/>
+                <a:ea typeface="+mn-ea"/>
+                <a:cs typeface="+mn-cs"/>
+              </a:defRPr>
+            </a:lvl9pPr>
+          </a:lstStyle>
+          <a:p>
+            <a:pPr marL="0" indent="0">
+              <a:spcBef>
+                <a:spcPts val="0"/>
+              </a:spcBef>
+              <a:buFont typeface="Arial" panose="020B0604020202020204" pitchFamily="34" charset="0"/>
+              <a:buNone/>
+            </a:pPr>
+            <a:r>
+              <a:rPr lang="en-US" altLang="zh-CN" sz="12800" b="1" dirty="0"/>
+              <a:t>Steps</a:t>
+            </a:r>
+            <a:endParaRPr lang="en-US" sz="12800" b="1" dirty="0"/>
+          </a:p>
+          <a:p>
+            <a:pPr marL="457200" indent="-342900">
+              <a:lnSpc>
+                <a:spcPct val="145000"/>
+              </a:lnSpc>
+              <a:spcBef>
+                <a:spcPts val="1200"/>
+              </a:spcBef>
+              <a:buSzPts val="1800"/>
+              <a:buFont typeface="Arial" panose="020B0604020202020204" pitchFamily="34" charset="0"/>
+              <a:buChar char="●"/>
+            </a:pPr>
+            <a:r>
+              <a:rPr lang="en-US" altLang="zh-CN" sz="9600" i="1" dirty="0"/>
+              <a:t>Check that the packet is valid (has a correct </a:t>
+            </a:r>
+            <a:r>
+              <a:rPr lang="en-US" altLang="zh-CN" sz="9600" b="1" i="1" dirty="0"/>
+              <a:t>checksum</a:t>
+            </a:r>
+            <a:r>
+              <a:rPr lang="en-US" altLang="zh-CN" sz="9600" i="1" dirty="0"/>
+              <a:t>).</a:t>
+            </a:r>
+          </a:p>
+          <a:p>
+            <a:pPr marL="457200" indent="-342900">
+              <a:lnSpc>
+                <a:spcPct val="145000"/>
+              </a:lnSpc>
+              <a:spcBef>
+                <a:spcPts val="1200"/>
+              </a:spcBef>
+              <a:buSzPts val="1800"/>
+              <a:buFont typeface="Arial" panose="020B0604020202020204" pitchFamily="34" charset="0"/>
+              <a:buChar char="●"/>
+            </a:pPr>
+            <a:r>
+              <a:rPr lang="en-US" altLang="zh-CN" sz="9600" b="1" i="1" dirty="0"/>
+              <a:t>Decrement the TTL</a:t>
+            </a:r>
+            <a:r>
+              <a:rPr lang="en-US" altLang="zh-CN" sz="9600" i="1" dirty="0"/>
+              <a:t> by 1, and recompute the packet checksum over the modified header.</a:t>
+            </a:r>
+          </a:p>
+          <a:p>
+            <a:pPr marL="457200" indent="-342900">
+              <a:lnSpc>
+                <a:spcPct val="145000"/>
+              </a:lnSpc>
+              <a:spcBef>
+                <a:spcPts val="1200"/>
+              </a:spcBef>
+              <a:buSzPts val="1800"/>
+              <a:buFont typeface="Arial" panose="020B0604020202020204" pitchFamily="34" charset="0"/>
+              <a:buChar char="●"/>
+            </a:pPr>
+            <a:r>
+              <a:rPr lang="en-US" altLang="zh-CN" sz="9600" i="1" dirty="0"/>
+              <a:t>Find out which entry in the routing table has the </a:t>
+            </a:r>
+            <a:r>
+              <a:rPr lang="en-US" altLang="zh-CN" sz="9600" b="1" i="1" dirty="0"/>
+              <a:t>longest prefix match </a:t>
+            </a:r>
+            <a:r>
+              <a:rPr lang="en-US" altLang="zh-CN" sz="9600" i="1" dirty="0"/>
+              <a:t>with the destination IP address.</a:t>
+            </a:r>
+          </a:p>
+          <a:p>
+            <a:pPr marL="457200" indent="-342900">
+              <a:lnSpc>
+                <a:spcPct val="145000"/>
+              </a:lnSpc>
+              <a:spcBef>
+                <a:spcPts val="1200"/>
+              </a:spcBef>
+              <a:buSzPts val="1800"/>
+              <a:buFont typeface="Arial" panose="020B0604020202020204" pitchFamily="34" charset="0"/>
+              <a:buChar char="●"/>
+            </a:pPr>
+            <a:r>
+              <a:rPr lang="en-US" altLang="zh-CN" sz="9600" i="1" dirty="0"/>
+              <a:t>Check the ARP cache for the </a:t>
+            </a:r>
+            <a:r>
+              <a:rPr lang="en-US" altLang="zh-CN" sz="9600" b="1" i="1" dirty="0"/>
+              <a:t>next-hop MAC address </a:t>
+            </a:r>
+            <a:r>
+              <a:rPr lang="en-US" altLang="zh-CN" sz="9600" i="1" dirty="0"/>
+              <a:t>corresponding to the next-hop IP. If it's there, send it. Otherwise, send an ARP request for the next-hop IP (if one hasn't been sent within the last second), and add the packet to the queue of packets waiting on this ARP request.</a:t>
+            </a:r>
+          </a:p>
+          <a:p>
+            <a:pPr marL="457200" indent="-342900">
+              <a:lnSpc>
+                <a:spcPct val="145000"/>
+              </a:lnSpc>
+              <a:spcBef>
+                <a:spcPts val="1200"/>
+              </a:spcBef>
+              <a:buSzPts val="1800"/>
+              <a:buFont typeface="Arial" panose="020B0604020202020204" pitchFamily="34" charset="0"/>
+              <a:buChar char="●"/>
+            </a:pPr>
+            <a:endParaRPr lang="en-US" altLang="zh-CN" sz="9600" i="1" dirty="0"/>
+          </a:p>
+          <a:p>
+            <a:pPr marL="457200" indent="-342900">
+              <a:lnSpc>
+                <a:spcPct val="145000"/>
+              </a:lnSpc>
+              <a:spcBef>
+                <a:spcPts val="1200"/>
+              </a:spcBef>
+              <a:buSzPts val="1800"/>
+              <a:buFont typeface="Arial" panose="020B0604020202020204" pitchFamily="34" charset="0"/>
+              <a:buChar char="●"/>
+            </a:pPr>
+            <a:endParaRPr lang="en-US" altLang="zh-CN" sz="9600" i="1" dirty="0"/>
+          </a:p>
+        </p:txBody>
+      </p:sp>
+    </p:spTree>
+    <p:extLst>
+      <p:ext uri="{BB962C8B-B14F-4D97-AF65-F5344CB8AC3E}">
+        <p14:creationId xmlns:p14="http://schemas.microsoft.com/office/powerpoint/2010/main" val="2988958961"/>
+      </p:ext>
+    </p:extLst>
+  </p:cSld>
+  <p:clrMapOvr>
+    <a:masterClrMapping/>
+  </p:clrMapOvr>
+</p:sld>
+</file>
+
+<file path=ppt/slides/slide11.xml><?xml version="1.0" encoding="utf-8"?>
+<p:sld xmlns:a="http://schemas.openxmlformats.org/drawingml/2006/main" xmlns:r="http://schemas.openxmlformats.org/officeDocument/2006/relationships" xmlns:p="http://schemas.openxmlformats.org/presentationml/2006/main">
+  <p:cSld>
+    <p:spTree>
+      <p:nvGrpSpPr>
+        <p:cNvPr id="1" name=""/>
+        <p:cNvGrpSpPr/>
+        <p:nvPr/>
+      </p:nvGrpSpPr>
+      <p:grpSpPr>
+        <a:xfrm>
+          <a:off x="0" y="0"/>
+          <a:ext cx="0" cy="0"/>
+          <a:chOff x="0" y="0"/>
+          <a:chExt cx="0" cy="0"/>
+        </a:xfrm>
+      </p:grpSpPr>
+      <p:sp>
+        <p:nvSpPr>
+          <p:cNvPr id="6" name="Title 1">
+            <a:extLst>
+              <a:ext uri="{FF2B5EF4-FFF2-40B4-BE49-F238E27FC236}">
+                <a16:creationId xmlns:a16="http://schemas.microsoft.com/office/drawing/2014/main" id="{118CA799-E4E9-A1C8-5C60-A3F3D99D600E}"/>
+              </a:ext>
+            </a:extLst>
+          </p:cNvPr>
+          <p:cNvSpPr>
+            <a:spLocks noGrp="1"/>
+          </p:cNvSpPr>
+          <p:nvPr>
+            <p:ph type="title"/>
+          </p:nvPr>
+        </p:nvSpPr>
+        <p:spPr>
+          <a:xfrm>
+            <a:off x="838200" y="-4206"/>
+            <a:ext cx="10515600" cy="1325563"/>
+          </a:xfrm>
+        </p:spPr>
+        <p:txBody>
+          <a:bodyPr/>
+          <a:lstStyle/>
+          <a:p>
+            <a:r>
+              <a:rPr lang="en" altLang="zh-CN" b="1" dirty="0"/>
+              <a:t>Static Router</a:t>
+            </a:r>
+            <a:r>
+              <a:rPr lang="zh-CN" altLang="zh-CN" b="1" dirty="0"/>
+              <a:t>:</a:t>
+            </a:r>
+            <a:r>
+              <a:rPr lang="en-US" altLang="zh-CN" b="1" dirty="0"/>
+              <a:t> receiver</a:t>
+            </a:r>
+            <a:endParaRPr lang="en-US" b="1" dirty="0"/>
+          </a:p>
+        </p:txBody>
+      </p:sp>
+      <p:sp>
+        <p:nvSpPr>
+          <p:cNvPr id="2" name="Google Shape;83;p17">
+            <a:extLst>
+              <a:ext uri="{FF2B5EF4-FFF2-40B4-BE49-F238E27FC236}">
+                <a16:creationId xmlns:a16="http://schemas.microsoft.com/office/drawing/2014/main" id="{6BBEA3AE-E29F-6D3D-CADA-51EE73C22525}"/>
+              </a:ext>
+            </a:extLst>
+          </p:cNvPr>
+          <p:cNvSpPr txBox="1">
+            <a:spLocks/>
+          </p:cNvSpPr>
+          <p:nvPr/>
+        </p:nvSpPr>
+        <p:spPr>
+          <a:xfrm>
+            <a:off x="838199" y="1117456"/>
+            <a:ext cx="10990943" cy="2816981"/>
+          </a:xfrm>
+          <a:prstGeom prst="rect">
+            <a:avLst/>
+          </a:prstGeom>
+        </p:spPr>
+        <p:txBody>
+          <a:bodyPr spcFirstLastPara="1" vert="horz" wrap="square" lIns="91425" tIns="91425" rIns="91425" bIns="91425" rtlCol="0" anchor="t" anchorCtr="0">
+            <a:normAutofit fontScale="25000" lnSpcReduction="20000"/>
+          </a:bodyPr>
+          <a:lstStyle>
+            <a:lvl1pPr marL="228600" indent="-228600" algn="l" defTabSz="914400" rtl="0" eaLnBrk="1" latinLnBrk="0" hangingPunct="1">
+              <a:lnSpc>
+                <a:spcPct val="90000"/>
+              </a:lnSpc>
+              <a:spcBef>
+                <a:spcPts val="1000"/>
+              </a:spcBef>
+              <a:buFont typeface="Arial" panose="020B0604020202020204" pitchFamily="34" charset="0"/>
+              <a:buChar char="•"/>
+              <a:defRPr sz="2800" kern="1200">
+                <a:solidFill>
+                  <a:schemeClr val="tx1"/>
+                </a:solidFill>
+                <a:latin typeface="+mn-lt"/>
+                <a:ea typeface="+mn-ea"/>
+                <a:cs typeface="+mn-cs"/>
+              </a:defRPr>
+            </a:lvl1pPr>
+            <a:lvl2pPr marL="685800" indent="-228600" algn="l" defTabSz="914400" rtl="0" eaLnBrk="1" latinLnBrk="0" hangingPunct="1">
+              <a:lnSpc>
+                <a:spcPct val="90000"/>
+              </a:lnSpc>
+              <a:spcBef>
+                <a:spcPts val="500"/>
+              </a:spcBef>
+              <a:buFont typeface="Arial" panose="020B0604020202020204" pitchFamily="34" charset="0"/>
+              <a:buChar char="•"/>
+              <a:defRPr sz="2400" kern="1200">
+                <a:solidFill>
+                  <a:schemeClr val="tx1"/>
+                </a:solidFill>
+                <a:latin typeface="+mn-lt"/>
+                <a:ea typeface="+mn-ea"/>
+                <a:cs typeface="+mn-cs"/>
+              </a:defRPr>
+            </a:lvl2pPr>
+            <a:lvl3pPr marL="1143000" indent="-228600" algn="l" defTabSz="914400" rtl="0" eaLnBrk="1" latinLnBrk="0" hangingPunct="1">
+              <a:lnSpc>
+                <a:spcPct val="90000"/>
+              </a:lnSpc>
+              <a:spcBef>
+                <a:spcPts val="500"/>
+              </a:spcBef>
+              <a:buFont typeface="Arial" panose="020B0604020202020204" pitchFamily="34" charset="0"/>
+              <a:buChar char="•"/>
+              <a:defRPr sz="2000" kern="1200">
+                <a:solidFill>
+                  <a:schemeClr val="tx1"/>
+                </a:solidFill>
+                <a:latin typeface="+mn-lt"/>
+                <a:ea typeface="+mn-ea"/>
+                <a:cs typeface="+mn-cs"/>
+              </a:defRPr>
+            </a:lvl3pPr>
+            <a:lvl4pPr marL="1600200" indent="-228600" algn="l" defTabSz="914400" rtl="0" eaLnBrk="1" latinLnBrk="0" hangingPunct="1">
+              <a:lnSpc>
+                <a:spcPct val="90000"/>
+              </a:lnSpc>
+              <a:spcBef>
+                <a:spcPts val="500"/>
+              </a:spcBef>
+              <a:buFont typeface="Arial" panose="020B0604020202020204" pitchFamily="34" charset="0"/>
+              <a:buChar char="•"/>
+              <a:defRPr sz="1800" kern="1200">
+                <a:solidFill>
+                  <a:schemeClr val="tx1"/>
+                </a:solidFill>
+                <a:latin typeface="+mn-lt"/>
+                <a:ea typeface="+mn-ea"/>
+                <a:cs typeface="+mn-cs"/>
+              </a:defRPr>
+            </a:lvl4pPr>
+            <a:lvl5pPr marL="2057400" indent="-228600" algn="l" defTabSz="914400" rtl="0" eaLnBrk="1" latinLnBrk="0" hangingPunct="1">
+              <a:lnSpc>
+                <a:spcPct val="90000"/>
+              </a:lnSpc>
+              <a:spcBef>
+                <a:spcPts val="500"/>
+              </a:spcBef>
+              <a:buFont typeface="Arial" panose="020B0604020202020204" pitchFamily="34" charset="0"/>
+              <a:buChar char="•"/>
+              <a:defRPr sz="1800" kern="1200">
+                <a:solidFill>
+                  <a:schemeClr val="tx1"/>
+                </a:solidFill>
+                <a:latin typeface="+mn-lt"/>
+                <a:ea typeface="+mn-ea"/>
+                <a:cs typeface="+mn-cs"/>
+              </a:defRPr>
+            </a:lvl5pPr>
+            <a:lvl6pPr marL="2514600" indent="-228600" algn="l" defTabSz="914400" rtl="0" eaLnBrk="1" latinLnBrk="0" hangingPunct="1">
+              <a:lnSpc>
+                <a:spcPct val="90000"/>
+              </a:lnSpc>
+              <a:spcBef>
+                <a:spcPts val="500"/>
+              </a:spcBef>
+              <a:buFont typeface="Arial" panose="020B0604020202020204" pitchFamily="34" charset="0"/>
+              <a:buChar char="•"/>
+              <a:defRPr sz="1800" kern="1200">
+                <a:solidFill>
+                  <a:schemeClr val="tx1"/>
+                </a:solidFill>
+                <a:latin typeface="+mn-lt"/>
+                <a:ea typeface="+mn-ea"/>
+                <a:cs typeface="+mn-cs"/>
+              </a:defRPr>
+            </a:lvl6pPr>
+            <a:lvl7pPr marL="2971800" indent="-228600" algn="l" defTabSz="914400" rtl="0" eaLnBrk="1" latinLnBrk="0" hangingPunct="1">
+              <a:lnSpc>
+                <a:spcPct val="90000"/>
+              </a:lnSpc>
+              <a:spcBef>
+                <a:spcPts val="500"/>
+              </a:spcBef>
+              <a:buFont typeface="Arial" panose="020B0604020202020204" pitchFamily="34" charset="0"/>
+              <a:buChar char="•"/>
+              <a:defRPr sz="1800" kern="1200">
+                <a:solidFill>
+                  <a:schemeClr val="tx1"/>
+                </a:solidFill>
+                <a:latin typeface="+mn-lt"/>
+                <a:ea typeface="+mn-ea"/>
+                <a:cs typeface="+mn-cs"/>
+              </a:defRPr>
+            </a:lvl7pPr>
+            <a:lvl8pPr marL="3429000" indent="-228600" algn="l" defTabSz="914400" rtl="0" eaLnBrk="1" latinLnBrk="0" hangingPunct="1">
+              <a:lnSpc>
+                <a:spcPct val="90000"/>
+              </a:lnSpc>
+              <a:spcBef>
+                <a:spcPts val="500"/>
+              </a:spcBef>
+              <a:buFont typeface="Arial" panose="020B0604020202020204" pitchFamily="34" charset="0"/>
+              <a:buChar char="•"/>
+              <a:defRPr sz="1800" kern="1200">
+                <a:solidFill>
+                  <a:schemeClr val="tx1"/>
+                </a:solidFill>
+                <a:latin typeface="+mn-lt"/>
+                <a:ea typeface="+mn-ea"/>
+                <a:cs typeface="+mn-cs"/>
+              </a:defRPr>
+            </a:lvl8pPr>
+            <a:lvl9pPr marL="3886200" indent="-228600" algn="l" defTabSz="914400" rtl="0" eaLnBrk="1" latinLnBrk="0" hangingPunct="1">
+              <a:lnSpc>
+                <a:spcPct val="90000"/>
+              </a:lnSpc>
+              <a:spcBef>
+                <a:spcPts val="500"/>
+              </a:spcBef>
+              <a:buFont typeface="Arial" panose="020B0604020202020204" pitchFamily="34" charset="0"/>
+              <a:buChar char="•"/>
+              <a:defRPr sz="1800" kern="1200">
+                <a:solidFill>
+                  <a:schemeClr val="tx1"/>
+                </a:solidFill>
+                <a:latin typeface="+mn-lt"/>
+                <a:ea typeface="+mn-ea"/>
+                <a:cs typeface="+mn-cs"/>
+              </a:defRPr>
+            </a:lvl9pPr>
+          </a:lstStyle>
+          <a:p>
+            <a:pPr marL="0" indent="0">
+              <a:spcBef>
+                <a:spcPts val="0"/>
+              </a:spcBef>
+              <a:buFont typeface="Arial" panose="020B0604020202020204" pitchFamily="34" charset="0"/>
+              <a:buNone/>
+            </a:pPr>
+            <a:r>
+              <a:rPr lang="en" altLang="zh-CN" sz="12800" b="1" dirty="0"/>
+              <a:t> Handling IPv4 forwarding</a:t>
+            </a:r>
+            <a:endParaRPr lang="en-US" sz="12800" b="1" dirty="0"/>
+          </a:p>
+          <a:p>
+            <a:pPr marL="457200" indent="-342900">
+              <a:lnSpc>
+                <a:spcPct val="145000"/>
+              </a:lnSpc>
+              <a:spcBef>
+                <a:spcPts val="1200"/>
+              </a:spcBef>
+              <a:buSzPts val="1800"/>
+              <a:buFont typeface="Arial" panose="020B0604020202020204" pitchFamily="34" charset="0"/>
+              <a:buChar char="●"/>
+            </a:pPr>
+            <a:endParaRPr lang="en-US" altLang="zh-CN" sz="9600" b="1" i="1" dirty="0"/>
+          </a:p>
+          <a:p>
+            <a:pPr marL="457200" indent="-342900">
+              <a:lnSpc>
+                <a:spcPct val="145000"/>
+              </a:lnSpc>
+              <a:spcBef>
+                <a:spcPts val="1200"/>
+              </a:spcBef>
+              <a:buSzPts val="1800"/>
+              <a:buFont typeface="Arial" panose="020B0604020202020204" pitchFamily="34" charset="0"/>
+              <a:buChar char="●"/>
+            </a:pPr>
+            <a:r>
+              <a:rPr lang="en-US" altLang="zh-CN" sz="9600" i="1" dirty="0"/>
+              <a:t>Return: the egress interface (packet modified with MAC address), or NULL</a:t>
+            </a:r>
+          </a:p>
+          <a:p>
+            <a:pPr marL="457200" indent="-342900">
+              <a:lnSpc>
+                <a:spcPct val="145000"/>
+              </a:lnSpc>
+              <a:spcBef>
+                <a:spcPts val="1200"/>
+              </a:spcBef>
+              <a:buSzPts val="1800"/>
+              <a:buFont typeface="Arial" panose="020B0604020202020204" pitchFamily="34" charset="0"/>
+              <a:buChar char="●"/>
+            </a:pPr>
+            <a:r>
+              <a:rPr lang="en-US" altLang="zh-CN" sz="9600" i="1" dirty="0"/>
+              <a:t>Hint: you may adjust the entries inside </a:t>
+            </a:r>
+            <a:r>
+              <a:rPr lang="en-US" altLang="zh-CN" sz="9600" b="1" i="1" dirty="0" err="1"/>
+              <a:t>rtable</a:t>
+            </a:r>
+            <a:r>
+              <a:rPr lang="en-US" altLang="zh-CN" sz="9600" b="1" i="1" dirty="0"/>
+              <a:t> and </a:t>
+            </a:r>
+            <a:r>
+              <a:rPr lang="en-US" altLang="zh-CN" sz="9600" b="1" i="1" dirty="0" err="1"/>
+              <a:t>arp_cache</a:t>
+            </a:r>
+            <a:r>
+              <a:rPr lang="en-US" altLang="zh-CN" sz="9600" b="1" i="1" dirty="0"/>
+              <a:t> </a:t>
+            </a:r>
+            <a:r>
+              <a:rPr lang="en-US" altLang="zh-CN" sz="9600" i="1" dirty="0"/>
+              <a:t>to suit your configurations.</a:t>
+            </a:r>
+          </a:p>
+          <a:p>
+            <a:pPr marL="457200" indent="-342900">
+              <a:lnSpc>
+                <a:spcPct val="145000"/>
+              </a:lnSpc>
+              <a:spcBef>
+                <a:spcPts val="1200"/>
+              </a:spcBef>
+              <a:buSzPts val="1800"/>
+              <a:buFont typeface="Arial" panose="020B0604020202020204" pitchFamily="34" charset="0"/>
+              <a:buChar char="●"/>
+            </a:pPr>
+            <a:endParaRPr lang="en-US" altLang="zh-CN" sz="9600" i="1" dirty="0"/>
+          </a:p>
+          <a:p>
+            <a:pPr marL="457200" indent="-342900">
+              <a:lnSpc>
+                <a:spcPct val="145000"/>
+              </a:lnSpc>
+              <a:spcBef>
+                <a:spcPts val="1200"/>
+              </a:spcBef>
+              <a:buSzPts val="1800"/>
+              <a:buFont typeface="Arial" panose="020B0604020202020204" pitchFamily="34" charset="0"/>
+              <a:buChar char="●"/>
+            </a:pPr>
+            <a:endParaRPr lang="en-US" altLang="zh-CN" sz="9600" i="1" dirty="0"/>
+          </a:p>
+        </p:txBody>
+      </p:sp>
+      <p:pic>
+        <p:nvPicPr>
+          <p:cNvPr id="3" name="图片 2">
+            <a:extLst>
+              <a:ext uri="{FF2B5EF4-FFF2-40B4-BE49-F238E27FC236}">
+                <a16:creationId xmlns:a16="http://schemas.microsoft.com/office/drawing/2014/main" id="{2A986952-0CCD-4467-FD4F-B630C0CFCAFF}"/>
+              </a:ext>
+            </a:extLst>
+          </p:cNvPr>
+          <p:cNvPicPr>
+            <a:picLocks noChangeAspect="1"/>
+          </p:cNvPicPr>
+          <p:nvPr/>
+        </p:nvPicPr>
+        <p:blipFill>
+          <a:blip r:embed="rId2"/>
+          <a:stretch>
+            <a:fillRect/>
+          </a:stretch>
+        </p:blipFill>
+        <p:spPr>
+          <a:xfrm>
+            <a:off x="671470" y="1940301"/>
+            <a:ext cx="11324399" cy="502718"/>
+          </a:xfrm>
+          <a:prstGeom prst="rect">
+            <a:avLst/>
+          </a:prstGeom>
+        </p:spPr>
+      </p:pic>
+    </p:spTree>
+    <p:extLst>
+      <p:ext uri="{BB962C8B-B14F-4D97-AF65-F5344CB8AC3E}">
+        <p14:creationId xmlns:p14="http://schemas.microsoft.com/office/powerpoint/2010/main" val="298019858"/>
+      </p:ext>
+    </p:extLst>
+  </p:cSld>
+  <p:clrMapOvr>
+    <a:masterClrMapping/>
+  </p:clrMapOvr>
+</p:sld>
+</file>
+
+<file path=ppt/slides/slide12.xml><?xml version="1.0" encoding="utf-8"?>
+<p:sld xmlns:a="http://schemas.openxmlformats.org/drawingml/2006/main" xmlns:r="http://schemas.openxmlformats.org/officeDocument/2006/relationships" xmlns:p="http://schemas.openxmlformats.org/presentationml/2006/main">
+  <p:cSld>
+    <p:spTree>
+      <p:nvGrpSpPr>
+        <p:cNvPr id="1" name=""/>
+        <p:cNvGrpSpPr/>
+        <p:nvPr/>
+      </p:nvGrpSpPr>
+      <p:grpSpPr>
+        <a:xfrm>
+          <a:off x="0" y="0"/>
+          <a:ext cx="0" cy="0"/>
+          <a:chOff x="0" y="0"/>
+          <a:chExt cx="0" cy="0"/>
+        </a:xfrm>
+      </p:grpSpPr>
+      <p:sp>
+        <p:nvSpPr>
+          <p:cNvPr id="2" name="标题 1">
+            <a:extLst>
+              <a:ext uri="{FF2B5EF4-FFF2-40B4-BE49-F238E27FC236}">
+                <a16:creationId xmlns:a16="http://schemas.microsoft.com/office/drawing/2014/main" id="{8D7A4BFD-FF2E-4FE5-8458-67338C96BAF4}"/>
+              </a:ext>
+            </a:extLst>
+          </p:cNvPr>
+          <p:cNvSpPr>
+            <a:spLocks noGrp="1"/>
+          </p:cNvSpPr>
+          <p:nvPr>
+            <p:ph type="title"/>
+          </p:nvPr>
+        </p:nvSpPr>
+        <p:spPr>
+          <a:xfrm>
+            <a:off x="838200" y="3688711"/>
+            <a:ext cx="10515600" cy="646331"/>
+          </a:xfrm>
+        </p:spPr>
+        <p:txBody>
+          <a:bodyPr>
+            <a:normAutofit/>
+          </a:bodyPr>
+          <a:lstStyle/>
+          <a:p>
+            <a:pPr algn="ctr"/>
+            <a:r>
+              <a:rPr lang="en-US" sz="3200" dirty="0">
+                <a:latin typeface="+mn-lt"/>
+              </a:rPr>
+              <a:t>Assignment 3 Q &amp; A</a:t>
+            </a:r>
+          </a:p>
+        </p:txBody>
+      </p:sp>
+      <p:sp>
+        <p:nvSpPr>
+          <p:cNvPr id="3" name="Title 1">
+            <a:extLst>
+              <a:ext uri="{FF2B5EF4-FFF2-40B4-BE49-F238E27FC236}">
+                <a16:creationId xmlns:a16="http://schemas.microsoft.com/office/drawing/2014/main" id="{41C77E84-359B-B990-B568-A3302507241B}"/>
+              </a:ext>
+            </a:extLst>
+          </p:cNvPr>
+          <p:cNvSpPr txBox="1">
+            <a:spLocks/>
+          </p:cNvSpPr>
+          <p:nvPr/>
+        </p:nvSpPr>
+        <p:spPr>
+          <a:xfrm>
+            <a:off x="838200" y="1138744"/>
+            <a:ext cx="10515600" cy="1325563"/>
+          </a:xfrm>
+          <a:prstGeom prst="rect">
+            <a:avLst/>
+          </a:prstGeom>
+        </p:spPr>
+        <p:txBody>
+          <a:bodyPr vert="horz" lIns="91440" tIns="45720" rIns="91440" bIns="45720" rtlCol="0" anchor="ctr">
+            <a:normAutofit/>
+          </a:bodyPr>
+          <a:lstStyle>
+            <a:lvl1pPr algn="l" defTabSz="914400" rtl="0" eaLnBrk="1" latinLnBrk="0" hangingPunct="1">
+              <a:lnSpc>
+                <a:spcPct val="90000"/>
+              </a:lnSpc>
+              <a:spcBef>
+                <a:spcPct val="0"/>
+              </a:spcBef>
+              <a:buNone/>
+              <a:defRPr sz="4400" kern="1200">
+                <a:solidFill>
+                  <a:schemeClr val="tx1"/>
+                </a:solidFill>
+                <a:latin typeface="+mj-lt"/>
+                <a:ea typeface="+mj-ea"/>
+                <a:cs typeface="+mj-cs"/>
+              </a:defRPr>
+            </a:lvl1pPr>
+          </a:lstStyle>
+          <a:p>
+            <a:r>
+              <a:rPr lang="en-US" b="1" dirty="0"/>
+              <a:t>Please</a:t>
+            </a:r>
+            <a:r>
+              <a:rPr lang="zh-CN" altLang="en-US" b="1" dirty="0"/>
+              <a:t> </a:t>
+            </a:r>
+            <a:r>
+              <a:rPr lang="en-US" altLang="zh-CN" b="1" dirty="0"/>
+              <a:t>refer</a:t>
+            </a:r>
+            <a:r>
+              <a:rPr lang="zh-CN" altLang="en-US" b="1" dirty="0"/>
+              <a:t> </a:t>
+            </a:r>
+            <a:r>
+              <a:rPr lang="en-US" altLang="zh-CN" b="1" dirty="0"/>
+              <a:t>to the </a:t>
+            </a:r>
+            <a:r>
+              <a:rPr lang="en-US" altLang="zh-CN" b="1" dirty="0" err="1"/>
+              <a:t>Github</a:t>
+            </a:r>
+            <a:r>
+              <a:rPr lang="en-US" altLang="zh-CN" b="1" dirty="0"/>
+              <a:t> Webpage for more detailed implementation hints.</a:t>
+            </a:r>
+            <a:endParaRPr lang="en-US" b="1" dirty="0"/>
+          </a:p>
+        </p:txBody>
+      </p:sp>
+      <p:sp>
+        <p:nvSpPr>
+          <p:cNvPr id="4" name="文本框 3">
+            <a:extLst>
+              <a:ext uri="{FF2B5EF4-FFF2-40B4-BE49-F238E27FC236}">
+                <a16:creationId xmlns:a16="http://schemas.microsoft.com/office/drawing/2014/main" id="{C81EC202-5887-D163-A62A-3C0264C98434}"/>
+              </a:ext>
+            </a:extLst>
+          </p:cNvPr>
+          <p:cNvSpPr txBox="1"/>
+          <p:nvPr/>
+        </p:nvSpPr>
+        <p:spPr>
+          <a:xfrm>
+            <a:off x="838200" y="2753343"/>
+            <a:ext cx="10086986" cy="646331"/>
+          </a:xfrm>
+          <a:prstGeom prst="rect">
+            <a:avLst/>
+          </a:prstGeom>
+          <a:noFill/>
+        </p:spPr>
+        <p:txBody>
+          <a:bodyPr wrap="square" rtlCol="0">
+            <a:spAutoFit/>
+          </a:bodyPr>
+          <a:lstStyle/>
+          <a:p>
+            <a:r>
+              <a:rPr kumimoji="1" lang="en-US" altLang="zh-CN" dirty="0"/>
+              <a:t>Note: the </a:t>
+            </a:r>
+            <a:r>
+              <a:rPr kumimoji="1" lang="en-US" altLang="zh-CN" i="1" dirty="0"/>
+              <a:t>base part </a:t>
+            </a:r>
+            <a:r>
+              <a:rPr kumimoji="1" lang="en-US" altLang="zh-CN" dirty="0"/>
+              <a:t>of WTP is not the typical Go-Back-N method (we do not ACK for every received packet), please follow the information in </a:t>
+            </a:r>
+            <a:r>
+              <a:rPr kumimoji="1" lang="en-US" altLang="zh-CN" dirty="0" err="1"/>
+              <a:t>Github</a:t>
+            </a:r>
+            <a:r>
+              <a:rPr kumimoji="1" lang="en-US" altLang="zh-CN" dirty="0"/>
+              <a:t> Webpage and this tutorial strictly for implementation.</a:t>
+            </a:r>
+            <a:endParaRPr kumimoji="1" lang="zh-CN" altLang="en-US" dirty="0"/>
+          </a:p>
+        </p:txBody>
+      </p:sp>
+      <p:sp>
+        <p:nvSpPr>
+          <p:cNvPr id="5" name="标题 1">
+            <a:extLst>
+              <a:ext uri="{FF2B5EF4-FFF2-40B4-BE49-F238E27FC236}">
+                <a16:creationId xmlns:a16="http://schemas.microsoft.com/office/drawing/2014/main" id="{E8F71926-39FF-3A84-7BE0-15AD94B7F033}"/>
+              </a:ext>
+            </a:extLst>
+          </p:cNvPr>
+          <p:cNvSpPr txBox="1">
+            <a:spLocks/>
+          </p:cNvSpPr>
+          <p:nvPr/>
+        </p:nvSpPr>
+        <p:spPr>
+          <a:xfrm>
+            <a:off x="623893" y="4782879"/>
+            <a:ext cx="10515600" cy="646331"/>
+          </a:xfrm>
+          <a:prstGeom prst="rect">
+            <a:avLst/>
+          </a:prstGeom>
+        </p:spPr>
+        <p:txBody>
+          <a:bodyPr vert="horz" lIns="91440" tIns="45720" rIns="91440" bIns="45720" rtlCol="0" anchor="ctr">
+            <a:normAutofit/>
+          </a:bodyPr>
+          <a:lstStyle>
+            <a:lvl1pPr algn="l" defTabSz="914400" rtl="0" eaLnBrk="1" latinLnBrk="0" hangingPunct="1">
+              <a:lnSpc>
+                <a:spcPct val="90000"/>
+              </a:lnSpc>
+              <a:spcBef>
+                <a:spcPct val="0"/>
+              </a:spcBef>
+              <a:buNone/>
+              <a:defRPr sz="4400" kern="1200">
+                <a:solidFill>
+                  <a:schemeClr val="tx1"/>
+                </a:solidFill>
+                <a:latin typeface="+mj-lt"/>
+                <a:ea typeface="+mj-ea"/>
+                <a:cs typeface="+mj-cs"/>
+              </a:defRPr>
+            </a:lvl1pPr>
+          </a:lstStyle>
+          <a:p>
+            <a:pPr algn="ctr"/>
+            <a:endParaRPr lang="en-US" sz="3200" dirty="0">
+              <a:latin typeface="+mn-lt"/>
+            </a:endParaRPr>
+          </a:p>
+        </p:txBody>
+      </p:sp>
+    </p:spTree>
+    <p:extLst>
+      <p:ext uri="{BB962C8B-B14F-4D97-AF65-F5344CB8AC3E}">
+        <p14:creationId xmlns:p14="http://schemas.microsoft.com/office/powerpoint/2010/main" val="2292626886"/>
+      </p:ext>
+    </p:extLst>
+  </p:cSld>
+  <p:clrMapOvr>
+    <a:masterClrMapping/>
+  </p:clrMapOvr>
+</p:sld>
+</file>
+
+<file path=ppt/slides/slide13.xml><?xml version="1.0" encoding="utf-8"?>
+<p:sld xmlns:a="http://schemas.openxmlformats.org/drawingml/2006/main" xmlns:r="http://schemas.openxmlformats.org/officeDocument/2006/relationships" xmlns:p="http://schemas.openxmlformats.org/presentationml/2006/main">
+  <p:cSld>
+    <p:spTree>
+      <p:nvGrpSpPr>
+        <p:cNvPr id="1" name=""/>
+        <p:cNvGrpSpPr/>
+        <p:nvPr/>
+      </p:nvGrpSpPr>
+      <p:grpSpPr>
+        <a:xfrm>
+          <a:off x="0" y="0"/>
+          <a:ext cx="0" cy="0"/>
+          <a:chOff x="0" y="0"/>
+          <a:chExt cx="0" cy="0"/>
+        </a:xfrm>
+      </p:grpSpPr>
+      <p:sp>
+        <p:nvSpPr>
+          <p:cNvPr id="4" name="Rectangle 3">
+            <a:extLst>
+              <a:ext uri="{FF2B5EF4-FFF2-40B4-BE49-F238E27FC236}">
+                <a16:creationId xmlns:a16="http://schemas.microsoft.com/office/drawing/2014/main" id="{A8D2CAE8-E323-A14E-A62F-188A25405FEA}"/>
+              </a:ext>
+            </a:extLst>
+          </p:cNvPr>
+          <p:cNvSpPr/>
+          <p:nvPr/>
+        </p:nvSpPr>
+        <p:spPr>
+          <a:xfrm>
+            <a:off x="4851400" y="3167390"/>
+            <a:ext cx="2603500" cy="830997"/>
+          </a:xfrm>
+          <a:prstGeom prst="rect">
+            <a:avLst/>
+          </a:prstGeom>
+        </p:spPr>
+        <p:txBody>
+          <a:bodyPr wrap="square">
+            <a:spAutoFit/>
+          </a:bodyPr>
+          <a:lstStyle/>
+          <a:p>
+            <a:r>
+              <a:rPr lang="en-US" sz="4800" dirty="0"/>
+              <a:t>Thanks!</a:t>
+            </a:r>
+          </a:p>
+        </p:txBody>
+      </p:sp>
+    </p:spTree>
+    <p:extLst>
+      <p:ext uri="{BB962C8B-B14F-4D97-AF65-F5344CB8AC3E}">
+        <p14:creationId xmlns:p14="http://schemas.microsoft.com/office/powerpoint/2010/main" val="3216618933"/>
+      </p:ext>
+    </p:extLst>
+  </p:cSld>
+  <p:clrMapOvr>
+    <a:masterClrMapping/>
+  </p:clrMapOvr>
+</p:sld>
+</file>
+
 <file path=ppt/slides/slide2.xml><?xml version="1.0" encoding="utf-8"?>
+<p:sld xmlns:a="http://schemas.openxmlformats.org/drawingml/2006/main" xmlns:r="http://schemas.openxmlformats.org/officeDocument/2006/relationships" xmlns:p="http://schemas.openxmlformats.org/presentationml/2006/main">
+  <p:cSld>
+    <p:spTree>
+      <p:nvGrpSpPr>
+        <p:cNvPr id="1" name=""/>
+        <p:cNvGrpSpPr/>
+        <p:nvPr/>
+      </p:nvGrpSpPr>
+      <p:grpSpPr>
+        <a:xfrm>
+          <a:off x="0" y="0"/>
+          <a:ext cx="0" cy="0"/>
+          <a:chOff x="0" y="0"/>
+          <a:chExt cx="0" cy="0"/>
+        </a:xfrm>
+      </p:grpSpPr>
+      <p:pic>
+        <p:nvPicPr>
+          <p:cNvPr id="5" name="Picture 4">
+            <a:extLst>
+              <a:ext uri="{FF2B5EF4-FFF2-40B4-BE49-F238E27FC236}">
+                <a16:creationId xmlns:a16="http://schemas.microsoft.com/office/drawing/2014/main" id="{4D90C243-66EE-9844-B6C9-297837E8D758}"/>
+              </a:ext>
+            </a:extLst>
+          </p:cNvPr>
+          <p:cNvPicPr>
+            <a:picLocks noChangeAspect="1"/>
+          </p:cNvPicPr>
+          <p:nvPr/>
+        </p:nvPicPr>
+        <p:blipFill>
+          <a:blip r:embed="rId2"/>
+          <a:stretch>
+            <a:fillRect/>
+          </a:stretch>
+        </p:blipFill>
+        <p:spPr>
+          <a:xfrm>
+            <a:off x="1270000" y="1270000"/>
+            <a:ext cx="63500" cy="76200"/>
+          </a:xfrm>
+          <a:prstGeom prst="rect">
+            <a:avLst/>
+          </a:prstGeom>
+        </p:spPr>
+      </p:pic>
+      <p:pic>
+        <p:nvPicPr>
+          <p:cNvPr id="6" name="Picture 5">
+            <a:extLst>
+              <a:ext uri="{FF2B5EF4-FFF2-40B4-BE49-F238E27FC236}">
+                <a16:creationId xmlns:a16="http://schemas.microsoft.com/office/drawing/2014/main" id="{919BED88-AA1D-3144-ABB6-9C775BCC2765}"/>
+              </a:ext>
+            </a:extLst>
+          </p:cNvPr>
+          <p:cNvPicPr>
+            <a:picLocks noChangeAspect="1"/>
+          </p:cNvPicPr>
+          <p:nvPr/>
+        </p:nvPicPr>
+        <p:blipFill>
+          <a:blip r:embed="rId2"/>
+          <a:stretch>
+            <a:fillRect/>
+          </a:stretch>
+        </p:blipFill>
+        <p:spPr>
+          <a:xfrm>
+            <a:off x="1270000" y="1270000"/>
+            <a:ext cx="63500" cy="76200"/>
+          </a:xfrm>
+          <a:prstGeom prst="rect">
+            <a:avLst/>
+          </a:prstGeom>
+        </p:spPr>
+      </p:pic>
+      <p:pic>
+        <p:nvPicPr>
+          <p:cNvPr id="10" name="图片 9">
+            <a:extLst>
+              <a:ext uri="{FF2B5EF4-FFF2-40B4-BE49-F238E27FC236}">
+                <a16:creationId xmlns:a16="http://schemas.microsoft.com/office/drawing/2014/main" id="{A895DE4C-99AF-D2AE-2B1C-F6EB8AE5093C}"/>
+              </a:ext>
+            </a:extLst>
+          </p:cNvPr>
+          <p:cNvPicPr>
+            <a:picLocks noChangeAspect="1"/>
+          </p:cNvPicPr>
+          <p:nvPr/>
+        </p:nvPicPr>
+        <p:blipFill>
+          <a:blip r:embed="rId3"/>
+          <a:stretch>
+            <a:fillRect/>
+          </a:stretch>
+        </p:blipFill>
+        <p:spPr>
+          <a:xfrm>
+            <a:off x="3194050" y="692150"/>
+            <a:ext cx="5803900" cy="5473700"/>
+          </a:xfrm>
+          <a:prstGeom prst="rect">
+            <a:avLst/>
+          </a:prstGeom>
+        </p:spPr>
+      </p:pic>
+    </p:spTree>
+    <p:extLst>
+      <p:ext uri="{BB962C8B-B14F-4D97-AF65-F5344CB8AC3E}">
+        <p14:creationId xmlns:p14="http://schemas.microsoft.com/office/powerpoint/2010/main" val="2406139190"/>
+      </p:ext>
+    </p:extLst>
+  </p:cSld>
+  <p:clrMapOvr>
+    <a:masterClrMapping/>
+  </p:clrMapOvr>
+</p:sld>
+</file>
+
+<file path=ppt/slides/slide3.xml><?xml version="1.0" encoding="utf-8"?>
+<p:sld xmlns:a="http://schemas.openxmlformats.org/drawingml/2006/main" xmlns:r="http://schemas.openxmlformats.org/officeDocument/2006/relationships" xmlns:p="http://schemas.openxmlformats.org/presentationml/2006/main">
+  <p:cSld>
+    <p:spTree>
+      <p:nvGrpSpPr>
+        <p:cNvPr id="1" name=""/>
+        <p:cNvGrpSpPr/>
+        <p:nvPr/>
+      </p:nvGrpSpPr>
+      <p:grpSpPr>
+        <a:xfrm>
+          <a:off x="0" y="0"/>
+          <a:ext cx="0" cy="0"/>
+          <a:chOff x="0" y="0"/>
+          <a:chExt cx="0" cy="0"/>
+        </a:xfrm>
+      </p:grpSpPr>
+      <p:grpSp>
+        <p:nvGrpSpPr>
+          <p:cNvPr id="7" name="组合 6">
+            <a:extLst>
+              <a:ext uri="{FF2B5EF4-FFF2-40B4-BE49-F238E27FC236}">
+                <a16:creationId xmlns:a16="http://schemas.microsoft.com/office/drawing/2014/main" id="{1C00E82C-A639-7686-B0C3-60588B47595F}"/>
+              </a:ext>
+            </a:extLst>
+          </p:cNvPr>
+          <p:cNvGrpSpPr/>
+          <p:nvPr/>
+        </p:nvGrpSpPr>
+        <p:grpSpPr>
+          <a:xfrm>
+            <a:off x="936584" y="233152"/>
+            <a:ext cx="10360307" cy="5690669"/>
+            <a:chOff x="936584" y="603542"/>
+            <a:chExt cx="10360307" cy="5690669"/>
+          </a:xfrm>
+        </p:grpSpPr>
+        <p:pic>
+          <p:nvPicPr>
+            <p:cNvPr id="2" name="图片 1">
+              <a:extLst>
+                <a:ext uri="{FF2B5EF4-FFF2-40B4-BE49-F238E27FC236}">
+                  <a16:creationId xmlns:a16="http://schemas.microsoft.com/office/drawing/2014/main" id="{260BC26A-BA8B-217A-29F6-E75B22423D49}"/>
+                </a:ext>
+              </a:extLst>
+            </p:cNvPr>
+            <p:cNvPicPr>
+              <a:picLocks noChangeAspect="1"/>
+            </p:cNvPicPr>
+            <p:nvPr/>
+          </p:nvPicPr>
+          <p:blipFill>
+            <a:blip r:embed="rId2"/>
+            <a:stretch>
+              <a:fillRect/>
+            </a:stretch>
+          </p:blipFill>
+          <p:spPr>
+            <a:xfrm>
+              <a:off x="936584" y="603542"/>
+              <a:ext cx="10360307" cy="5677015"/>
+            </a:xfrm>
+            <a:prstGeom prst="rect">
+              <a:avLst/>
+            </a:prstGeom>
+          </p:spPr>
+        </p:pic>
+        <p:sp>
+          <p:nvSpPr>
+            <p:cNvPr id="3" name="圆角矩形 2">
+              <a:extLst>
+                <a:ext uri="{FF2B5EF4-FFF2-40B4-BE49-F238E27FC236}">
+                  <a16:creationId xmlns:a16="http://schemas.microsoft.com/office/drawing/2014/main" id="{B607BC10-AB9F-BCC9-E514-36F437EDDFE3}"/>
+                </a:ext>
+              </a:extLst>
+            </p:cNvPr>
+            <p:cNvSpPr/>
+            <p:nvPr/>
+          </p:nvSpPr>
+          <p:spPr>
+            <a:xfrm>
+              <a:off x="2500829" y="4549966"/>
+              <a:ext cx="1784732" cy="352540"/>
+            </a:xfrm>
+            <a:prstGeom prst="roundRect">
+              <a:avLst/>
+            </a:prstGeom>
+            <a:noFill/>
+            <a:ln w="28575">
+              <a:solidFill>
+                <a:srgbClr val="FF0000"/>
+              </a:solidFill>
+            </a:ln>
+          </p:spPr>
+          <p:style>
+            <a:lnRef idx="2">
+              <a:schemeClr val="accent1">
+                <a:shade val="15000"/>
+              </a:schemeClr>
+            </a:lnRef>
+            <a:fillRef idx="1">
+              <a:schemeClr val="accent1"/>
+            </a:fillRef>
+            <a:effectRef idx="0">
+              <a:schemeClr val="accent1"/>
+            </a:effectRef>
+            <a:fontRef idx="minor">
+              <a:schemeClr val="lt1"/>
+            </a:fontRef>
+          </p:style>
+          <p:txBody>
+            <a:bodyPr rtlCol="0" anchor="ctr"/>
+            <a:lstStyle/>
+            <a:p>
+              <a:pPr algn="ctr"/>
+              <a:endParaRPr kumimoji="1" lang="zh-CN" altLang="en-US"/>
+            </a:p>
+          </p:txBody>
+        </p:sp>
+        <p:sp>
+          <p:nvSpPr>
+            <p:cNvPr id="4" name="圆角矩形 3">
+              <a:extLst>
+                <a:ext uri="{FF2B5EF4-FFF2-40B4-BE49-F238E27FC236}">
+                  <a16:creationId xmlns:a16="http://schemas.microsoft.com/office/drawing/2014/main" id="{1D943F31-74A6-643A-4F04-454DC6D0B3F5}"/>
+                </a:ext>
+              </a:extLst>
+            </p:cNvPr>
+            <p:cNvSpPr/>
+            <p:nvPr/>
+          </p:nvSpPr>
+          <p:spPr>
+            <a:xfrm>
+              <a:off x="2062920" y="5593616"/>
+              <a:ext cx="622407" cy="352540"/>
+            </a:xfrm>
+            <a:prstGeom prst="roundRect">
+              <a:avLst/>
+            </a:prstGeom>
+            <a:noFill/>
+            <a:ln w="28575">
+              <a:solidFill>
+                <a:srgbClr val="FF0000"/>
+              </a:solidFill>
+            </a:ln>
+          </p:spPr>
+          <p:style>
+            <a:lnRef idx="2">
+              <a:schemeClr val="accent1">
+                <a:shade val="15000"/>
+              </a:schemeClr>
+            </a:lnRef>
+            <a:fillRef idx="1">
+              <a:schemeClr val="accent1"/>
+            </a:fillRef>
+            <a:effectRef idx="0">
+              <a:schemeClr val="accent1"/>
+            </a:effectRef>
+            <a:fontRef idx="minor">
+              <a:schemeClr val="lt1"/>
+            </a:fontRef>
+          </p:style>
+          <p:txBody>
+            <a:bodyPr rtlCol="0" anchor="ctr"/>
+            <a:lstStyle/>
+            <a:p>
+              <a:pPr algn="ctr"/>
+              <a:endParaRPr kumimoji="1" lang="zh-CN" altLang="en-US"/>
+            </a:p>
+          </p:txBody>
+        </p:sp>
+        <p:sp>
+          <p:nvSpPr>
+            <p:cNvPr id="5" name="圆角矩形 4">
+              <a:extLst>
+                <a:ext uri="{FF2B5EF4-FFF2-40B4-BE49-F238E27FC236}">
+                  <a16:creationId xmlns:a16="http://schemas.microsoft.com/office/drawing/2014/main" id="{BF522035-3247-6A40-97CA-D668C0C36242}"/>
+                </a:ext>
+              </a:extLst>
+            </p:cNvPr>
+            <p:cNvSpPr/>
+            <p:nvPr/>
+          </p:nvSpPr>
+          <p:spPr>
+            <a:xfrm>
+              <a:off x="1981897" y="5941671"/>
+              <a:ext cx="1050670" cy="352540"/>
+            </a:xfrm>
+            <a:prstGeom prst="roundRect">
+              <a:avLst/>
+            </a:prstGeom>
+            <a:noFill/>
+            <a:ln w="28575">
+              <a:solidFill>
+                <a:srgbClr val="FF0000"/>
+              </a:solidFill>
+            </a:ln>
+          </p:spPr>
+          <p:style>
+            <a:lnRef idx="2">
+              <a:schemeClr val="accent1">
+                <a:shade val="15000"/>
+              </a:schemeClr>
+            </a:lnRef>
+            <a:fillRef idx="1">
+              <a:schemeClr val="accent1"/>
+            </a:fillRef>
+            <a:effectRef idx="0">
+              <a:schemeClr val="accent1"/>
+            </a:effectRef>
+            <a:fontRef idx="minor">
+              <a:schemeClr val="lt1"/>
+            </a:fontRef>
+          </p:style>
+          <p:txBody>
+            <a:bodyPr rtlCol="0" anchor="ctr"/>
+            <a:lstStyle/>
+            <a:p>
+              <a:pPr algn="ctr"/>
+              <a:endParaRPr kumimoji="1" lang="zh-CN" altLang="en-US"/>
+            </a:p>
+          </p:txBody>
+        </p:sp>
+      </p:grpSp>
+      <p:pic>
+        <p:nvPicPr>
+          <p:cNvPr id="6" name="图片 5">
+            <a:extLst>
+              <a:ext uri="{FF2B5EF4-FFF2-40B4-BE49-F238E27FC236}">
+                <a16:creationId xmlns:a16="http://schemas.microsoft.com/office/drawing/2014/main" id="{79BFDFA6-3D07-07CE-193E-10EC9BC0A932}"/>
+              </a:ext>
+            </a:extLst>
+          </p:cNvPr>
+          <p:cNvPicPr>
+            <a:picLocks noChangeAspect="1"/>
+          </p:cNvPicPr>
+          <p:nvPr/>
+        </p:nvPicPr>
+        <p:blipFill>
+          <a:blip r:embed="rId3"/>
+          <a:stretch>
+            <a:fillRect/>
+          </a:stretch>
+        </p:blipFill>
+        <p:spPr>
+          <a:xfrm>
+            <a:off x="5890583" y="2835797"/>
+            <a:ext cx="1413042" cy="3881317"/>
+          </a:xfrm>
+          <a:prstGeom prst="rect">
+            <a:avLst/>
+          </a:prstGeom>
+        </p:spPr>
+      </p:pic>
+    </p:spTree>
+    <p:extLst>
+      <p:ext uri="{BB962C8B-B14F-4D97-AF65-F5344CB8AC3E}">
+        <p14:creationId xmlns:p14="http://schemas.microsoft.com/office/powerpoint/2010/main" val="2294440956"/>
+      </p:ext>
+    </p:extLst>
+  </p:cSld>
+  <p:clrMapOvr>
+    <a:masterClrMapping/>
+  </p:clrMapOvr>
+</p:sld>
+</file>
+
+<file path=ppt/slides/slide4.xml><?xml version="1.0" encoding="utf-8"?>
 <p:sld xmlns:a="http://schemas.openxmlformats.org/drawingml/2006/main" xmlns:r="http://schemas.openxmlformats.org/officeDocument/2006/relationships" xmlns:p="http://schemas.openxmlformats.org/presentationml/2006/main">
   <p:cSld>
     <p:bg>
@@ -4775,30 +6291,6 @@
               </a:rPr>
               <a:t>: a reliable transport protocol for file transfer</a:t>
             </a:r>
-          </a:p>
-          <a:p>
-            <a:pPr marL="114300" indent="0">
-              <a:spcBef>
-                <a:spcPts val="0"/>
-              </a:spcBef>
-              <a:buSzPts val="1800"/>
-              <a:buNone/>
-            </a:pPr>
-            <a:endParaRPr lang="en-US" altLang="zh-CN" dirty="0">
-              <a:cs typeface="Calibri" panose="020F0502020204030204" pitchFamily="34" charset="0"/>
-            </a:endParaRPr>
-          </a:p>
-          <a:p>
-            <a:pPr marL="114300" indent="0">
-              <a:spcBef>
-                <a:spcPts val="0"/>
-              </a:spcBef>
-              <a:buSzPts val="1800"/>
-              <a:buNone/>
-            </a:pPr>
-            <a:endParaRPr lang="en-US" altLang="zh-CN" dirty="0">
-              <a:cs typeface="Calibri" panose="020F0502020204030204" pitchFamily="34" charset="0"/>
-            </a:endParaRPr>
           </a:p>
           <a:p>
             <a:pPr marL="457200" indent="-342900">
@@ -5498,15 +6990,7 @@
             </a:pPr>
             <a:r>
               <a:rPr lang="en-US" altLang="zh-CN" sz="2400" dirty="0"/>
-              <a:t>Ethernet frame </a:t>
-            </a:r>
-            <a:r>
-              <a:rPr lang="en-US" altLang="zh-CN" sz="2400" dirty="0" err="1"/>
-              <a:t>upto</a:t>
-            </a:r>
-            <a:r>
-              <a:rPr lang="en-US" altLang="zh-CN" sz="2400" dirty="0"/>
-              <a:t> </a:t>
+              <a:t>Ethernet frame up to </a:t>
             </a:r>
             <a:r>
               <a:rPr lang="en-US" altLang="zh-CN" sz="2400" i="1" dirty="0">
@@ -6457,1564 +7941,12 @@
           </p:txBody>
         </p:sp>
       </p:grpSp>
-    </p:spTree>
-    <p:extLst>
-      <p:ext uri="{BB962C8B-B14F-4D97-AF65-F5344CB8AC3E}">
-        <p14:creationId xmlns:p14="http://schemas.microsoft.com/office/powerpoint/2010/main" val="267997120"/>
-      </p:ext>
-    </p:extLst>
-  </p:cSld>
-  <p:clrMapOvr>
-    <a:masterClrMapping/>
-  </p:clrMapOvr>
-</p:sld>
-</file>
-
-<file path=ppt/slides/slide3.xml><?xml version="1.0" encoding="utf-8"?>
-<p:sld xmlns:a="http://schemas.openxmlformats.org/drawingml/2006/main" xmlns:r="http://schemas.openxmlformats.org/officeDocument/2006/relationships" xmlns:p="http://schemas.openxmlformats.org/presentationml/2006/main">
-  <p:cSld>
-    <p:spTree>
-      <p:nvGrpSpPr>
-        <p:cNvPr id="1" name=""/>
-        <p:cNvGrpSpPr/>
-        <p:nvPr/>
-      </p:nvGrpSpPr>
-      <p:grpSpPr>
-        <a:xfrm>
-          <a:off x="0" y="0"/>
-          <a:ext cx="0" cy="0"/>
-          <a:chOff x="0" y="0"/>
-          <a:chExt cx="0" cy="0"/>
-        </a:xfrm>
-      </p:grpSpPr>
-      <p:sp>
-        <p:nvSpPr>
-          <p:cNvPr id="2" name="Title 1">
-            <a:extLst>
-              <a:ext uri="{FF2B5EF4-FFF2-40B4-BE49-F238E27FC236}">
-                <a16:creationId xmlns:a16="http://schemas.microsoft.com/office/drawing/2014/main" id="{45C79BA1-37A3-5741-B0A1-E64646E4283C}"/>
-              </a:ext>
-            </a:extLst>
-          </p:cNvPr>
-          <p:cNvSpPr>
-            <a:spLocks noGrp="1"/>
-          </p:cNvSpPr>
-          <p:nvPr>
-            <p:ph type="title"/>
-          </p:nvPr>
-        </p:nvSpPr>
-        <p:spPr>
-          <a:xfrm>
-            <a:off x="838200" y="-4206"/>
-            <a:ext cx="10515600" cy="1325563"/>
-          </a:xfrm>
-        </p:spPr>
-        <p:txBody>
-          <a:bodyPr/>
-          <a:lstStyle/>
-          <a:p>
-            <a:r>
-              <a:rPr lang="zh-CN" altLang="zh-CN" b="1" dirty="0"/>
-              <a:t>WTP: stages</a:t>
-            </a:r>
-            <a:endParaRPr lang="en-US" b="1" dirty="0"/>
-          </a:p>
-        </p:txBody>
-      </p:sp>
-      <p:sp>
-        <p:nvSpPr>
-          <p:cNvPr id="4" name="Rectangle 2">
-            <a:extLst>
-              <a:ext uri="{FF2B5EF4-FFF2-40B4-BE49-F238E27FC236}">
-                <a16:creationId xmlns:a16="http://schemas.microsoft.com/office/drawing/2014/main" id="{3A7EC6F6-3A9C-6A4E-9F5B-60AABA1D48A4}"/>
-              </a:ext>
-            </a:extLst>
-          </p:cNvPr>
-          <p:cNvSpPr>
-            <a:spLocks noChangeArrowheads="1"/>
-          </p:cNvSpPr>
-          <p:nvPr/>
-        </p:nvSpPr>
-        <p:spPr bwMode="auto">
-          <a:xfrm>
-            <a:off x="0" y="43934"/>
-            <a:ext cx="184731" cy="369332"/>
-          </a:xfrm>
-          <a:prstGeom prst="rect">
-            <a:avLst/>
-          </a:prstGeom>
-          <a:solidFill>
-            <a:srgbClr val="FFFFFF"/>
-          </a:solidFill>
-          <a:ln>
-            <a:noFill/>
-          </a:ln>
-          <a:effectLst/>
-          <a:extLst>
-            <a:ext uri="{91240B29-F687-4F45-9708-019B960494DF}">
-              <a14:hiddenLine xmlns:a14="http://schemas.microsoft.com/office/drawing/2010/main" w="9525">
-                <a:solidFill>
-                  <a:schemeClr val="tx1"/>
-                </a:solidFill>
-                <a:miter lim="800000"/>
-                <a:headEnd/>
-                <a:tailEnd/>
-              </a14:hiddenLine>
-            </a:ext>
-            <a:ext uri="{AF507438-7753-43E0-B8FC-AC1667EBCBE1}">
-              <a14:hiddenEffects xmlns:a14="http://schemas.microsoft.com/office/drawing/2010/main">
-                <a:effectLst>
-                  <a:outerShdw dist="35921" dir="2700000" algn="ctr" rotWithShape="0">
-                    <a:schemeClr val="bg2"/>
-                  </a:outerShdw>
-                </a:effectLst>
-              </a14:hiddenEffects>
-            </a:ext>
-          </a:extLst>
-        </p:spPr>
-        <p:txBody>
-          <a:bodyPr vert="horz" wrap="none" lIns="91440" tIns="45720" rIns="91440" bIns="45720" numCol="1" anchor="ctr" anchorCtr="0" compatLnSpc="1">
-            <a:prstTxWarp prst="textNoShape">
-              <a:avLst/>
-            </a:prstTxWarp>
-            <a:spAutoFit/>
-          </a:bodyPr>
-          <a:lstStyle/>
-          <a:p>
-            <a:pPr marL="0" marR="0" lvl="0" indent="0" algn="l" defTabSz="914400" rtl="0" eaLnBrk="0" fontAlgn="base" latinLnBrk="0" hangingPunct="0">
-              <a:lnSpc>
-                <a:spcPct val="100000"/>
-              </a:lnSpc>
-              <a:spcBef>
-                <a:spcPct val="0"/>
-              </a:spcBef>
-              <a:spcAft>
-                <a:spcPct val="0"/>
-              </a:spcAft>
-              <a:buClrTx/>
-              <a:buSzTx/>
-              <a:buFontTx/>
-              <a:buNone/>
-              <a:tabLst/>
-            </a:pPr>
-            <a:endParaRPr kumimoji="0" lang="zh-CN" altLang="zh-CN" sz="1800" b="0" i="0" u="none" strike="noStrike" cap="none" normalizeH="0" baseline="0" dirty="0">
-              <a:ln>
-                <a:noFill/>
-              </a:ln>
-              <a:solidFill>
-                <a:schemeClr val="tx1"/>
-              </a:solidFill>
-              <a:effectLst/>
-              <a:latin typeface="Arial" panose="020B0604020202020204" pitchFamily="34" charset="0"/>
-            </a:endParaRPr>
-          </a:p>
-        </p:txBody>
-      </p:sp>
-      <p:sp>
-        <p:nvSpPr>
-          <p:cNvPr id="7" name="Rectangle 2">
-            <a:extLst>
-              <a:ext uri="{FF2B5EF4-FFF2-40B4-BE49-F238E27FC236}">
-                <a16:creationId xmlns:a16="http://schemas.microsoft.com/office/drawing/2014/main" id="{1EE3D794-DB4E-C14E-A5D2-84852F6CC9EA}"/>
-              </a:ext>
-            </a:extLst>
-          </p:cNvPr>
-          <p:cNvSpPr>
-            <a:spLocks noChangeArrowheads="1"/>
-          </p:cNvSpPr>
-          <p:nvPr/>
-        </p:nvSpPr>
-        <p:spPr bwMode="auto">
-          <a:xfrm>
-            <a:off x="0" y="43934"/>
-            <a:ext cx="184731" cy="369332"/>
-          </a:xfrm>
-          <a:prstGeom prst="rect">
-            <a:avLst/>
-          </a:prstGeom>
-          <a:solidFill>
-            <a:srgbClr val="FFFFFF"/>
-          </a:solidFill>
-          <a:ln>
-            <a:noFill/>
-          </a:ln>
-          <a:effectLst/>
-          <a:extLst>
-            <a:ext uri="{91240B29-F687-4F45-9708-019B960494DF}">
-              <a14:hiddenLine xmlns:a14="http://schemas.microsoft.com/office/drawing/2010/main" w="9525">
-                <a:solidFill>
-                  <a:schemeClr val="tx1"/>
-                </a:solidFill>
-                <a:miter lim="800000"/>
-                <a:headEnd/>
-                <a:tailEnd/>
-              </a14:hiddenLine>
-            </a:ext>
-            <a:ext uri="{AF507438-7753-43E0-B8FC-AC1667EBCBE1}">
-              <a14:hiddenEffects xmlns:a14="http://schemas.microsoft.com/office/drawing/2010/main">
-                <a:effectLst>
-                  <a:outerShdw dist="35921" dir="2700000" algn="ctr" rotWithShape="0">
-                    <a:schemeClr val="bg2"/>
-                  </a:outerShdw>
-                </a:effectLst>
-              </a14:hiddenEffects>
-            </a:ext>
-          </a:extLst>
-        </p:spPr>
-        <p:txBody>
-          <a:bodyPr vert="horz" wrap="none" lIns="91440" tIns="45720" rIns="91440" bIns="45720" numCol="1" anchor="ctr" anchorCtr="0" compatLnSpc="1">
-            <a:prstTxWarp prst="textNoShape">
-              <a:avLst/>
-            </a:prstTxWarp>
-            <a:spAutoFit/>
-          </a:bodyPr>
-          <a:lstStyle/>
-          <a:p>
-            <a:pPr marL="0" marR="0" lvl="0" indent="0" algn="l" defTabSz="914400" rtl="0" eaLnBrk="0" fontAlgn="base" latinLnBrk="0" hangingPunct="0">
-              <a:lnSpc>
-                <a:spcPct val="100000"/>
-              </a:lnSpc>
-              <a:spcBef>
-                <a:spcPct val="0"/>
-              </a:spcBef>
-              <a:spcAft>
-                <a:spcPct val="0"/>
-              </a:spcAft>
-              <a:buClrTx/>
-              <a:buSzTx/>
-              <a:buFontTx/>
-              <a:buNone/>
-              <a:tabLst/>
-            </a:pPr>
-            <a:endParaRPr kumimoji="0" lang="zh-CN" altLang="zh-CN" sz="1800" b="0" i="0" u="none" strike="noStrike" cap="none" normalizeH="0" baseline="0" dirty="0">
-              <a:ln>
-                <a:noFill/>
-              </a:ln>
-              <a:solidFill>
-                <a:schemeClr val="tx1"/>
-              </a:solidFill>
-              <a:effectLst/>
-              <a:latin typeface="Arial" panose="020B0604020202020204" pitchFamily="34" charset="0"/>
-            </a:endParaRPr>
-          </a:p>
-        </p:txBody>
-      </p:sp>
-      <p:sp>
-        <p:nvSpPr>
-          <p:cNvPr id="10" name="Google Shape;70;p15">
-            <a:extLst>
-              <a:ext uri="{FF2B5EF4-FFF2-40B4-BE49-F238E27FC236}">
-                <a16:creationId xmlns:a16="http://schemas.microsoft.com/office/drawing/2014/main" id="{22E50F3B-8764-E942-4A7C-439C893FCE64}"/>
-              </a:ext>
-            </a:extLst>
-          </p:cNvPr>
-          <p:cNvSpPr txBox="1">
-            <a:spLocks/>
-          </p:cNvSpPr>
-          <p:nvPr/>
-        </p:nvSpPr>
-        <p:spPr>
-          <a:xfrm>
-            <a:off x="838199" y="863716"/>
-            <a:ext cx="9857763" cy="5994284"/>
-          </a:xfrm>
-          <a:prstGeom prst="rect">
-            <a:avLst/>
-          </a:prstGeom>
-        </p:spPr>
-        <p:txBody>
-          <a:bodyPr spcFirstLastPara="1" vert="horz" wrap="square" lIns="91425" tIns="91425" rIns="91425" bIns="91425" rtlCol="0" anchor="t" anchorCtr="0">
-            <a:noAutofit/>
-          </a:bodyPr>
-          <a:lstStyle>
-            <a:lvl1pPr marL="228600" indent="-228600" algn="l" defTabSz="914400" rtl="0" eaLnBrk="1" latinLnBrk="0" hangingPunct="1">
-              <a:lnSpc>
-                <a:spcPct val="90000"/>
-              </a:lnSpc>
-              <a:spcBef>
-                <a:spcPts val="1000"/>
-              </a:spcBef>
-              <a:buFont typeface="Arial" panose="020B0604020202020204" pitchFamily="34" charset="0"/>
-              <a:buChar char="•"/>
-              <a:defRPr sz="2800" kern="1200">
-                <a:solidFill>
-                  <a:schemeClr val="tx1"/>
-                </a:solidFill>
-                <a:latin typeface="+mn-lt"/>
-                <a:ea typeface="+mn-ea"/>
-                <a:cs typeface="+mn-cs"/>
-              </a:defRPr>
-            </a:lvl1pPr>
-            <a:lvl2pPr marL="685800" indent="-228600" algn="l" defTabSz="914400" rtl="0" eaLnBrk="1" latinLnBrk="0" hangingPunct="1">
-              <a:lnSpc>
-                <a:spcPct val="90000"/>
-              </a:lnSpc>
-              <a:spcBef>
-                <a:spcPts val="500"/>
-              </a:spcBef>
-              <a:buFont typeface="Arial" panose="020B0604020202020204" pitchFamily="34" charset="0"/>
-              <a:buChar char="•"/>
-              <a:defRPr sz="2400" kern="1200">
-                <a:solidFill>
-                  <a:schemeClr val="tx1"/>
-                </a:solidFill>
-                <a:latin typeface="+mn-lt"/>
-                <a:ea typeface="+mn-ea"/>
-                <a:cs typeface="+mn-cs"/>
-              </a:defRPr>
-            </a:lvl2pPr>
-            <a:lvl3pPr marL="1143000" indent="-228600" algn="l" defTabSz="914400" rtl="0" eaLnBrk="1" latinLnBrk="0" hangingPunct="1">
-              <a:lnSpc>
-                <a:spcPct val="90000"/>
-              </a:lnSpc>
-              <a:spcBef>
-                <a:spcPts val="500"/>
-              </a:spcBef>
-              <a:buFont typeface="Arial" panose="020B0604020202020204" pitchFamily="34" charset="0"/>
-              <a:buChar char="•"/>
-              <a:defRPr sz="2000" kern="1200">
-                <a:solidFill>
-                  <a:schemeClr val="tx1"/>
-                </a:solidFill>
-                <a:latin typeface="+mn-lt"/>
-                <a:ea typeface="+mn-ea"/>
-                <a:cs typeface="+mn-cs"/>
-              </a:defRPr>
-            </a:lvl3pPr>
-            <a:lvl4pPr marL="1600200" indent="-228600" algn="l" defTabSz="914400" rtl="0" eaLnBrk="1" latinLnBrk="0" hangingPunct="1">
-              <a:lnSpc>
-                <a:spcPct val="90000"/>
-              </a:lnSpc>
-              <a:spcBef>
-                <a:spcPts val="500"/>
-              </a:spcBef>
-              <a:buFont typeface="Arial" panose="020B0604020202020204" pitchFamily="34" charset="0"/>
-              <a:buChar char="•"/>
-              <a:defRPr sz="1800" kern="1200">
-                <a:solidFill>
-                  <a:schemeClr val="tx1"/>
-                </a:solidFill>
-                <a:latin typeface="+mn-lt"/>
-                <a:ea typeface="+mn-ea"/>
-                <a:cs typeface="+mn-cs"/>
-              </a:defRPr>
-            </a:lvl4pPr>
-            <a:lvl5pPr marL="2057400" indent="-228600" algn="l" defTabSz="914400" rtl="0" eaLnBrk="1" latinLnBrk="0" hangingPunct="1">
-              <a:lnSpc>
-                <a:spcPct val="90000"/>
-              </a:lnSpc>
-              <a:spcBef>
-                <a:spcPts val="500"/>
-              </a:spcBef>
-              <a:buFont typeface="Arial" panose="020B0604020202020204" pitchFamily="34" charset="0"/>
-              <a:buChar char="•"/>
-              <a:defRPr sz="1800" kern="1200">
-                <a:solidFill>
-                  <a:schemeClr val="tx1"/>
-                </a:solidFill>
-                <a:latin typeface="+mn-lt"/>
-                <a:ea typeface="+mn-ea"/>
-                <a:cs typeface="+mn-cs"/>
-              </a:defRPr>
-            </a:lvl5pPr>
-            <a:lvl6pPr marL="2514600" indent="-228600" algn="l" defTabSz="914400" rtl="0" eaLnBrk="1" latinLnBrk="0" hangingPunct="1">
-              <a:lnSpc>
-                <a:spcPct val="90000"/>
-              </a:lnSpc>
-              <a:spcBef>
-                <a:spcPts val="500"/>
-              </a:spcBef>
-              <a:buFont typeface="Arial" panose="020B0604020202020204" pitchFamily="34" charset="0"/>
-              <a:buChar char="•"/>
-              <a:defRPr sz="1800" kern="1200">
-                <a:solidFill>
-                  <a:schemeClr val="tx1"/>
-                </a:solidFill>
-                <a:latin typeface="+mn-lt"/>
-                <a:ea typeface="+mn-ea"/>
-                <a:cs typeface="+mn-cs"/>
-              </a:defRPr>
-            </a:lvl6pPr>
-            <a:lvl7pPr marL="2971800" indent="-228600" algn="l" defTabSz="914400" rtl="0" eaLnBrk="1" latinLnBrk="0" hangingPunct="1">
-              <a:lnSpc>
-                <a:spcPct val="90000"/>
-              </a:lnSpc>
-              <a:spcBef>
-                <a:spcPts val="500"/>
-              </a:spcBef>
-              <a:buFont typeface="Arial" panose="020B0604020202020204" pitchFamily="34" charset="0"/>
-              <a:buChar char="•"/>
-              <a:defRPr sz="1800" kern="1200">
-                <a:solidFill>
-                  <a:schemeClr val="tx1"/>
-                </a:solidFill>
-                <a:latin typeface="+mn-lt"/>
-                <a:ea typeface="+mn-ea"/>
-                <a:cs typeface="+mn-cs"/>
-              </a:defRPr>
-            </a:lvl7pPr>
-            <a:lvl8pPr marL="3429000" indent="-228600" algn="l" defTabSz="914400" rtl="0" eaLnBrk="1" latinLnBrk="0" hangingPunct="1">
-              <a:lnSpc>
-                <a:spcPct val="90000"/>
-              </a:lnSpc>
-              <a:spcBef>
-                <a:spcPts val="500"/>
-              </a:spcBef>
-              <a:buFont typeface="Arial" panose="020B0604020202020204" pitchFamily="34" charset="0"/>
-              <a:buChar char="•"/>
-              <a:defRPr sz="1800" kern="1200">
-                <a:solidFill>
-                  <a:schemeClr val="tx1"/>
-                </a:solidFill>
-                <a:latin typeface="+mn-lt"/>
-                <a:ea typeface="+mn-ea"/>
-                <a:cs typeface="+mn-cs"/>
-              </a:defRPr>
-            </a:lvl8pPr>
-            <a:lvl9pPr marL="3886200" indent="-228600" algn="l" defTabSz="914400" rtl="0" eaLnBrk="1" latinLnBrk="0" hangingPunct="1">
-              <a:lnSpc>
-                <a:spcPct val="90000"/>
-              </a:lnSpc>
-              <a:spcBef>
-                <a:spcPts val="500"/>
-              </a:spcBef>
-              <a:buFont typeface="Arial" panose="020B0604020202020204" pitchFamily="34" charset="0"/>
-              <a:buChar char="•"/>
-              <a:defRPr sz="1800" kern="1200">
-                <a:solidFill>
-                  <a:schemeClr val="tx1"/>
-                </a:solidFill>
-                <a:latin typeface="+mn-lt"/>
-                <a:ea typeface="+mn-ea"/>
-                <a:cs typeface="+mn-cs"/>
-              </a:defRPr>
-            </a:lvl9pPr>
-          </a:lstStyle>
-          <a:p>
-            <a:pPr marL="457200" indent="-334327">
-              <a:lnSpc>
-                <a:spcPct val="114000"/>
-              </a:lnSpc>
-              <a:spcBef>
-                <a:spcPts val="0"/>
-              </a:spcBef>
-              <a:buSzPct val="100000"/>
-              <a:buFont typeface="Arial" panose="020B0604020202020204" pitchFamily="34" charset="0"/>
-              <a:buChar char="●"/>
-            </a:pPr>
-            <a:r>
-              <a:rPr lang="en-US" altLang="zh-CN" sz="2000" b="1" dirty="0"/>
-              <a:t>Header format: </a:t>
-            </a:r>
-            <a:r>
-              <a:rPr lang="en-US" altLang="zh-CN" sz="2000" dirty="0"/>
-              <a:t>&lt;type, </a:t>
-            </a:r>
-            <a:r>
-              <a:rPr lang="en-US" altLang="zh-CN" sz="2000" dirty="0" err="1"/>
-              <a:t>seqNum</a:t>
-            </a:r>
-            <a:r>
-              <a:rPr lang="en-US" altLang="zh-CN" sz="2000" dirty="0"/>
-              <a:t>, length, checksum&gt;</a:t>
-            </a:r>
-          </a:p>
-          <a:p>
-            <a:pPr marL="457200" indent="-334327">
-              <a:lnSpc>
-                <a:spcPct val="114000"/>
-              </a:lnSpc>
-              <a:spcBef>
-                <a:spcPts val="0"/>
-              </a:spcBef>
-              <a:buSzPct val="100000"/>
-              <a:buFont typeface="Arial" panose="020B0604020202020204" pitchFamily="34" charset="0"/>
-              <a:buChar char="●"/>
-            </a:pPr>
-            <a:r>
-              <a:rPr lang="en-US" altLang="zh-CN" sz="2000" b="1" dirty="0"/>
-              <a:t>Initiate:</a:t>
-            </a:r>
-            <a:endParaRPr lang="en-US" sz="2000" b="1" dirty="0"/>
-          </a:p>
-          <a:p>
-            <a:pPr marL="914400" lvl="1" indent="-310832">
-              <a:lnSpc>
-                <a:spcPct val="114000"/>
-              </a:lnSpc>
-              <a:spcBef>
-                <a:spcPts val="0"/>
-              </a:spcBef>
-              <a:buSzPct val="100000"/>
-              <a:buFont typeface="Arial" panose="020B0604020202020204" pitchFamily="34" charset="0"/>
-              <a:buChar char="○"/>
-            </a:pPr>
-            <a:r>
-              <a:rPr lang="en-US" altLang="zh-CN" sz="1800" i="1" dirty="0"/>
-              <a:t>Sender</a:t>
-            </a:r>
-            <a:r>
-              <a:rPr lang="en-US" altLang="zh-CN" sz="1800" dirty="0"/>
-              <a:t>: “I have something for you!” &lt;</a:t>
-            </a:r>
-            <a:r>
-              <a:rPr lang="en-US" altLang="zh-CN" sz="1800" dirty="0">
-                <a:solidFill>
-                  <a:schemeClr val="accent2"/>
-                </a:solidFill>
-              </a:rPr>
-              <a:t>START</a:t>
-            </a:r>
-            <a:r>
-              <a:rPr lang="en-US" altLang="zh-CN" sz="1800" dirty="0"/>
-              <a:t>, </a:t>
-            </a:r>
-            <a:r>
-              <a:rPr lang="en-US" altLang="zh-CN" sz="1800" i="1" dirty="0"/>
-              <a:t>R</a:t>
-            </a:r>
-            <a:r>
-              <a:rPr lang="en-US" altLang="zh-CN" sz="1800" dirty="0"/>
-              <a:t>, 0, 0&gt; </a:t>
-            </a:r>
-            <a:endParaRPr lang="en-US" sz="1800" dirty="0"/>
-          </a:p>
-          <a:p>
-            <a:pPr marL="914400" lvl="1" indent="-310832">
-              <a:lnSpc>
-                <a:spcPct val="114000"/>
-              </a:lnSpc>
-              <a:spcBef>
-                <a:spcPts val="0"/>
-              </a:spcBef>
-              <a:buSzPct val="100000"/>
-              <a:buFont typeface="Arial" panose="020B0604020202020204" pitchFamily="34" charset="0"/>
-              <a:buChar char="○"/>
-            </a:pPr>
-            <a:r>
-              <a:rPr lang="en-US" altLang="zh-CN" sz="1800" i="1" dirty="0"/>
-              <a:t>Receiver</a:t>
-            </a:r>
-            <a:r>
-              <a:rPr lang="en-US" altLang="zh-CN" sz="1800" dirty="0"/>
-              <a:t>: “I am ready, please proceed.” &lt;</a:t>
-            </a:r>
-            <a:r>
-              <a:rPr lang="en-US" altLang="zh-CN" sz="1800" dirty="0">
-                <a:solidFill>
-                  <a:schemeClr val="accent2"/>
-                </a:solidFill>
-              </a:rPr>
-              <a:t>ACK</a:t>
-            </a:r>
-            <a:r>
-              <a:rPr lang="en-US" altLang="zh-CN" sz="1800" dirty="0"/>
-              <a:t>, </a:t>
-            </a:r>
-            <a:r>
-              <a:rPr lang="en-US" altLang="zh-CN" sz="1800" i="1" dirty="0"/>
-              <a:t>R</a:t>
-            </a:r>
-            <a:r>
-              <a:rPr lang="en-US" altLang="zh-CN" sz="1800" dirty="0"/>
-              <a:t>, 0, 0&gt;</a:t>
-            </a:r>
-            <a:endParaRPr lang="en-US" sz="1800" dirty="0"/>
-          </a:p>
-          <a:p>
-            <a:pPr marL="457200" indent="-334327">
-              <a:lnSpc>
-                <a:spcPct val="114000"/>
-              </a:lnSpc>
-              <a:spcBef>
-                <a:spcPts val="0"/>
-              </a:spcBef>
-              <a:buSzPct val="100000"/>
-              <a:buFont typeface="Arial" panose="020B0604020202020204" pitchFamily="34" charset="0"/>
-              <a:buChar char="●"/>
-            </a:pPr>
-            <a:r>
-              <a:rPr lang="en-US" altLang="zh-CN" sz="2000" b="1" dirty="0"/>
-              <a:t>Data transmission:</a:t>
-            </a:r>
-            <a:endParaRPr lang="en-US" sz="2000" b="1" dirty="0"/>
-          </a:p>
-          <a:p>
-            <a:pPr marL="914400" lvl="1" indent="-310832">
-              <a:lnSpc>
-                <a:spcPct val="114000"/>
-              </a:lnSpc>
-              <a:spcBef>
-                <a:spcPts val="0"/>
-              </a:spcBef>
-              <a:buSzPct val="100000"/>
-              <a:buFont typeface="Arial" panose="020B0604020202020204" pitchFamily="34" charset="0"/>
-              <a:buChar char="○"/>
-            </a:pPr>
-            <a:r>
-              <a:rPr lang="en-US" altLang="zh-CN" sz="1800" i="1" dirty="0"/>
-              <a:t>Sender</a:t>
-            </a:r>
-            <a:r>
-              <a:rPr lang="en-US" altLang="zh-CN" sz="1800" dirty="0"/>
-              <a:t>: “Here is the </a:t>
-            </a:r>
-            <a:r>
-              <a:rPr lang="en-US" altLang="zh-CN" sz="1800" i="1" dirty="0" err="1"/>
-              <a:t>i</a:t>
-            </a:r>
-            <a:r>
-              <a:rPr lang="en-US" altLang="zh-CN" sz="1800" dirty="0" err="1"/>
-              <a:t>-th</a:t>
-            </a:r>
-            <a:r>
-              <a:rPr lang="en-US" altLang="zh-CN" sz="1800" dirty="0"/>
-              <a:t> packet.” &lt;</a:t>
-            </a:r>
-            <a:r>
-              <a:rPr lang="en-US" altLang="zh-CN" sz="1800" dirty="0">
-                <a:solidFill>
-                  <a:schemeClr val="accent2"/>
-                </a:solidFill>
-              </a:rPr>
-              <a:t>DATA</a:t>
-            </a:r>
-            <a:r>
-              <a:rPr lang="en-US" altLang="zh-CN" sz="1800" dirty="0"/>
-              <a:t>, </a:t>
-            </a:r>
-            <a:r>
-              <a:rPr lang="en-US" altLang="zh-CN" sz="1800" i="1" dirty="0" err="1"/>
-              <a:t>i</a:t>
-            </a:r>
-            <a:r>
-              <a:rPr lang="en-US" altLang="zh-CN" sz="1800" dirty="0"/>
-              <a:t>, LEN, SUM&gt;</a:t>
-            </a:r>
-            <a:endParaRPr lang="en-US" sz="1800" dirty="0"/>
-          </a:p>
-          <a:p>
-            <a:pPr marL="914400" lvl="1" indent="-310832">
-              <a:lnSpc>
-                <a:spcPct val="114000"/>
-              </a:lnSpc>
-              <a:spcBef>
-                <a:spcPts val="0"/>
-              </a:spcBef>
-              <a:buSzPct val="100000"/>
-              <a:buFont typeface="Arial" panose="020B0604020202020204" pitchFamily="34" charset="0"/>
-              <a:buChar char="○"/>
-            </a:pPr>
-            <a:r>
-              <a:rPr lang="en-US" altLang="zh-CN" sz="1800" i="1" dirty="0"/>
-              <a:t>Receiver</a:t>
-            </a:r>
-            <a:r>
-              <a:rPr lang="en-US" altLang="zh-CN" sz="1800" dirty="0"/>
-              <a:t>: “Got you, please send me the next packet (</a:t>
-            </a:r>
-            <a:r>
-              <a:rPr lang="en-US" altLang="zh-CN" sz="1800" i="1" dirty="0"/>
-              <a:t>j</a:t>
-            </a:r>
-            <a:r>
-              <a:rPr lang="en-US" altLang="zh-CN" sz="1800" dirty="0"/>
-              <a:t>-</a:t>
-            </a:r>
-            <a:r>
-              <a:rPr lang="en-US" altLang="zh-CN" sz="1800" dirty="0" err="1"/>
-              <a:t>th</a:t>
-            </a:r>
-            <a:r>
-              <a:rPr lang="en-US" altLang="zh-CN" sz="1800" dirty="0"/>
-              <a:t> packet).” &lt;</a:t>
-            </a:r>
-            <a:r>
-              <a:rPr lang="en-US" altLang="zh-CN" sz="1800" dirty="0">
-                <a:solidFill>
-                  <a:schemeClr val="accent2"/>
-                </a:solidFill>
-              </a:rPr>
-              <a:t>ACK</a:t>
-            </a:r>
-            <a:r>
-              <a:rPr lang="en-US" altLang="zh-CN" sz="1800" dirty="0"/>
-              <a:t>, </a:t>
-            </a:r>
-            <a:r>
-              <a:rPr lang="en-US" altLang="zh-CN" sz="1800" i="1" dirty="0"/>
-              <a:t>j</a:t>
-            </a:r>
-            <a:r>
-              <a:rPr lang="en-US" altLang="zh-CN" sz="1800" dirty="0"/>
-              <a:t>, 0, 0&gt;</a:t>
-            </a:r>
-            <a:endParaRPr lang="en-US" sz="1800" dirty="0"/>
-          </a:p>
-          <a:p>
-            <a:pPr marL="457200" indent="-334327">
-              <a:lnSpc>
-                <a:spcPct val="114000"/>
-              </a:lnSpc>
-              <a:spcBef>
-                <a:spcPts val="0"/>
-              </a:spcBef>
-              <a:buSzPct val="100000"/>
-              <a:buFont typeface="Arial" panose="020B0604020202020204" pitchFamily="34" charset="0"/>
-              <a:buChar char="●"/>
-            </a:pPr>
-            <a:r>
-              <a:rPr lang="en-US" altLang="zh-CN" sz="2000" b="1" dirty="0"/>
-              <a:t>Finish: </a:t>
-            </a:r>
-            <a:endParaRPr lang="en-US" sz="2000" b="1" dirty="0"/>
-          </a:p>
-          <a:p>
-            <a:pPr marL="914400" lvl="1" indent="-310832">
-              <a:lnSpc>
-                <a:spcPct val="114000"/>
-              </a:lnSpc>
-              <a:spcBef>
-                <a:spcPts val="0"/>
-              </a:spcBef>
-              <a:buSzPct val="100000"/>
-              <a:buFont typeface="Arial" panose="020B0604020202020204" pitchFamily="34" charset="0"/>
-              <a:buChar char="○"/>
-            </a:pPr>
-            <a:r>
-              <a:rPr lang="en-US" altLang="zh-CN" sz="1800" i="1" dirty="0"/>
-              <a:t>Sender</a:t>
-            </a:r>
-            <a:r>
-              <a:rPr lang="en-US" altLang="zh-CN" sz="1800" dirty="0"/>
-              <a:t>: “That’s all there is for file R” &lt;</a:t>
-            </a:r>
-            <a:r>
-              <a:rPr lang="en-US" altLang="zh-CN" sz="1800" dirty="0">
-                <a:solidFill>
-                  <a:schemeClr val="accent2"/>
-                </a:solidFill>
-              </a:rPr>
-              <a:t>END</a:t>
-            </a:r>
-            <a:r>
-              <a:rPr lang="en-US" altLang="zh-CN" sz="1800" dirty="0"/>
-              <a:t>, </a:t>
-            </a:r>
-            <a:r>
-              <a:rPr lang="en-US" altLang="zh-CN" sz="1800" i="1" dirty="0"/>
-              <a:t>R</a:t>
-            </a:r>
-            <a:r>
-              <a:rPr lang="en-US" altLang="zh-CN" sz="1800" dirty="0"/>
-              <a:t>, 0, 0&gt;</a:t>
-            </a:r>
-            <a:endParaRPr lang="en-US" sz="1800" dirty="0"/>
-          </a:p>
-          <a:p>
-            <a:pPr marL="914400" lvl="1" indent="-310832">
-              <a:lnSpc>
-                <a:spcPct val="114000"/>
-              </a:lnSpc>
-              <a:spcBef>
-                <a:spcPts val="0"/>
-              </a:spcBef>
-              <a:buSzPct val="100000"/>
-              <a:buFont typeface="Arial" panose="020B0604020202020204" pitchFamily="34" charset="0"/>
-              <a:buChar char="○"/>
-            </a:pPr>
-            <a:r>
-              <a:rPr lang="en-US" altLang="zh-CN" sz="1800" i="1" dirty="0"/>
-              <a:t>Receiver</a:t>
-            </a:r>
-            <a:r>
-              <a:rPr lang="en-US" altLang="zh-CN" sz="1800" dirty="0"/>
-              <a:t>: “I have saved it.” &lt;</a:t>
-            </a:r>
-            <a:r>
-              <a:rPr lang="en-US" altLang="zh-CN" sz="1800" dirty="0">
-                <a:solidFill>
-                  <a:schemeClr val="accent2"/>
-                </a:solidFill>
-              </a:rPr>
-              <a:t>ACK</a:t>
-            </a:r>
-            <a:r>
-              <a:rPr lang="en-US" altLang="zh-CN" sz="1800" dirty="0"/>
-              <a:t>, </a:t>
-            </a:r>
-            <a:r>
-              <a:rPr lang="en-US" altLang="zh-CN" sz="1800" i="1" dirty="0"/>
-              <a:t>R</a:t>
-            </a:r>
-            <a:r>
-              <a:rPr lang="en-US" altLang="zh-CN" sz="1800" dirty="0"/>
-              <a:t>, 0, 0&gt;</a:t>
-            </a:r>
-            <a:endParaRPr lang="en-US" sz="1800" dirty="0"/>
-          </a:p>
-          <a:p>
-            <a:pPr marL="457200" indent="-334327">
-              <a:lnSpc>
-                <a:spcPct val="114000"/>
-              </a:lnSpc>
-              <a:spcBef>
-                <a:spcPts val="600"/>
-              </a:spcBef>
-              <a:buSzPct val="100000"/>
-              <a:buFont typeface="Arial" panose="020B0604020202020204" pitchFamily="34" charset="0"/>
-              <a:buChar char="●"/>
-            </a:pPr>
-            <a:r>
-              <a:rPr lang="en-US" altLang="zh-CN" sz="2000" b="1" dirty="0"/>
-              <a:t>Special note:</a:t>
-            </a:r>
-            <a:endParaRPr lang="en-US" sz="2000" b="1" dirty="0"/>
-          </a:p>
-          <a:p>
-            <a:pPr marL="914400" lvl="1" indent="-310832">
-              <a:lnSpc>
-                <a:spcPct val="114000"/>
-              </a:lnSpc>
-              <a:spcBef>
-                <a:spcPts val="0"/>
-              </a:spcBef>
-              <a:buSzPct val="100000"/>
-              <a:buFont typeface="Arial" panose="020B0604020202020204" pitchFamily="34" charset="0"/>
-              <a:buChar char="○"/>
-            </a:pPr>
-            <a:r>
-              <a:rPr lang="en-US" altLang="zh-CN" sz="1800" dirty="0"/>
-              <a:t>initiate and finish stages use the same random </a:t>
-            </a:r>
-            <a:r>
-              <a:rPr lang="en-US" altLang="zh-CN" sz="1800" dirty="0" err="1">
-                <a:solidFill>
-                  <a:schemeClr val="accent2"/>
-                </a:solidFill>
-              </a:rPr>
-              <a:t>seqNum</a:t>
-            </a:r>
-            <a:r>
-              <a:rPr lang="en-US" altLang="zh-CN" sz="1800" dirty="0"/>
-              <a:t> </a:t>
-            </a:r>
-            <a:r>
-              <a:rPr lang="en-US" altLang="zh-CN" sz="1800" i="1" dirty="0"/>
-              <a:t>R</a:t>
-            </a:r>
-            <a:endParaRPr lang="en-US" sz="1800" i="1" dirty="0"/>
-          </a:p>
-          <a:p>
-            <a:pPr marL="1371600" lvl="2" indent="-310832">
-              <a:lnSpc>
-                <a:spcPct val="114000"/>
-              </a:lnSpc>
-              <a:spcBef>
-                <a:spcPts val="0"/>
-              </a:spcBef>
-              <a:buSzPct val="100000"/>
-              <a:buFont typeface="Wingdings" pitchFamily="2" charset="2"/>
-              <a:buChar char="ü"/>
-            </a:pPr>
-            <a:r>
-              <a:rPr lang="en-US" altLang="zh-CN" sz="1800" dirty="0"/>
-              <a:t>unrelated to data packets</a:t>
-            </a:r>
-            <a:endParaRPr lang="en-US" sz="1800" dirty="0"/>
-          </a:p>
-          <a:p>
-            <a:pPr marL="1371600" lvl="2" indent="-310832">
-              <a:lnSpc>
-                <a:spcPct val="114000"/>
-              </a:lnSpc>
-              <a:spcBef>
-                <a:spcPts val="0"/>
-              </a:spcBef>
-              <a:buSzPct val="100000"/>
-              <a:buFont typeface="Wingdings" pitchFamily="2" charset="2"/>
-              <a:buChar char="ü"/>
-            </a:pPr>
-            <a:r>
-              <a:rPr lang="en-US" altLang="zh-CN" sz="1800" dirty="0"/>
-              <a:t>to mark the begin and end of the same file</a:t>
-            </a:r>
-            <a:endParaRPr lang="en-US" altLang="zh-CN" sz="1800" b="1" dirty="0"/>
-          </a:p>
-          <a:p>
-            <a:pPr marL="914400" lvl="1" indent="-310832">
-              <a:lnSpc>
-                <a:spcPct val="114000"/>
-              </a:lnSpc>
-              <a:spcBef>
-                <a:spcPts val="0"/>
-              </a:spcBef>
-              <a:buClr>
-                <a:schemeClr val="tx1"/>
-              </a:buClr>
-              <a:buSzPct val="100000"/>
-              <a:buFont typeface="Arial" panose="020B0604020202020204" pitchFamily="34" charset="0"/>
-              <a:buChar char="○"/>
-            </a:pPr>
-            <a:r>
-              <a:rPr lang="en-US" altLang="zh-CN" sz="1800" dirty="0" err="1">
-                <a:solidFill>
-                  <a:schemeClr val="accent2"/>
-                </a:solidFill>
-              </a:rPr>
-              <a:t>seqNum</a:t>
-            </a:r>
-            <a:r>
-              <a:rPr lang="en-US" altLang="zh-CN" sz="1800" dirty="0"/>
-              <a:t> in </a:t>
-            </a:r>
-            <a:r>
-              <a:rPr lang="en-US" altLang="zh-CN" sz="1800" i="1" dirty="0"/>
-              <a:t>ACK</a:t>
-            </a:r>
-            <a:r>
-              <a:rPr lang="zh-CN" altLang="en-US" sz="1800" dirty="0"/>
-              <a:t> </a:t>
-            </a:r>
-            <a:r>
-              <a:rPr lang="en-US" altLang="zh-CN" sz="1800" dirty="0"/>
-              <a:t>packet is the </a:t>
-            </a:r>
-            <a:r>
-              <a:rPr lang="en-US" altLang="zh-CN" sz="1800" b="1" i="1" dirty="0"/>
-              <a:t>next </a:t>
-            </a:r>
-            <a:r>
-              <a:rPr lang="en-US" altLang="zh-CN" sz="1800" dirty="0"/>
-              <a:t>packet to be expected just like TCP</a:t>
-            </a:r>
-            <a:endParaRPr lang="en-US" sz="1800" b="1" dirty="0"/>
-          </a:p>
-          <a:p>
-            <a:pPr marL="1371600" lvl="2" indent="-310832">
-              <a:lnSpc>
-                <a:spcPct val="114000"/>
-              </a:lnSpc>
-              <a:spcBef>
-                <a:spcPts val="0"/>
-              </a:spcBef>
-              <a:buClr>
-                <a:schemeClr val="tx1"/>
-              </a:buClr>
-              <a:buSzPct val="100000"/>
-              <a:buFont typeface="Wingdings" pitchFamily="2" charset="2"/>
-              <a:buChar char="ü"/>
-            </a:pPr>
-            <a:r>
-              <a:rPr lang="en-US" altLang="zh-CN" sz="1800" i="1" dirty="0" err="1"/>
-              <a:t>seqNum</a:t>
-            </a:r>
-            <a:r>
-              <a:rPr lang="en-US" altLang="zh-CN" sz="1800" dirty="0"/>
-              <a:t> begin at 0 and increment by 1 for each packet</a:t>
-            </a:r>
-            <a:r>
-              <a:rPr lang="zh-CN" altLang="en-US" sz="1800" dirty="0"/>
-              <a:t> </a:t>
-            </a:r>
-            <a:r>
-              <a:rPr lang="en-US" altLang="zh-CN" sz="1800" dirty="0"/>
-              <a:t>in</a:t>
-            </a:r>
-            <a:r>
-              <a:rPr lang="zh-CN" altLang="en-US" sz="1800" dirty="0"/>
-              <a:t> </a:t>
-            </a:r>
-            <a:r>
-              <a:rPr lang="en-US" altLang="zh-CN" sz="1800" i="1" dirty="0"/>
-              <a:t>sender </a:t>
-            </a:r>
-            <a:r>
-              <a:rPr lang="en-US" altLang="zh-CN" sz="1800" dirty="0"/>
-              <a:t>when transferring data</a:t>
-            </a:r>
-          </a:p>
-          <a:p>
-            <a:pPr marL="1371600" lvl="2" indent="-310832">
-              <a:lnSpc>
-                <a:spcPct val="114000"/>
-              </a:lnSpc>
-              <a:spcBef>
-                <a:spcPts val="0"/>
-              </a:spcBef>
-              <a:buClr>
-                <a:schemeClr val="tx1"/>
-              </a:buClr>
-              <a:buSzPct val="100000"/>
-              <a:buFont typeface="Wingdings" pitchFamily="2" charset="2"/>
-              <a:buChar char="ü"/>
-            </a:pPr>
-            <a:r>
-              <a:rPr lang="en-US" sz="1800" i="1" dirty="0"/>
-              <a:t>Receiver</a:t>
-            </a:r>
-            <a:r>
-              <a:rPr lang="en-US" sz="1800" dirty="0"/>
-              <a:t> can just send one </a:t>
-            </a:r>
-            <a:r>
-              <a:rPr lang="en-US" altLang="zh-CN" sz="1800" dirty="0"/>
-              <a:t>cumulative</a:t>
-            </a:r>
-            <a:r>
-              <a:rPr lang="en-US" sz="1800" dirty="0"/>
-              <a:t> ACK after receiving all packets in a window rather than ACK for each packet</a:t>
-            </a:r>
-          </a:p>
-        </p:txBody>
-      </p:sp>
-    </p:spTree>
-    <p:extLst>
-      <p:ext uri="{BB962C8B-B14F-4D97-AF65-F5344CB8AC3E}">
-        <p14:creationId xmlns:p14="http://schemas.microsoft.com/office/powerpoint/2010/main" val="1485044418"/>
-      </p:ext>
-    </p:extLst>
-  </p:cSld>
-  <p:clrMapOvr>
-    <a:masterClrMapping/>
-  </p:clrMapOvr>
-</p:sld>
-</file>
-
-<file path=ppt/slides/slide4.xml><?xml version="1.0" encoding="utf-8"?>
-<p:sld xmlns:a="http://schemas.openxmlformats.org/drawingml/2006/main" xmlns:r="http://schemas.openxmlformats.org/officeDocument/2006/relationships" xmlns:p="http://schemas.openxmlformats.org/presentationml/2006/main">
-  <p:cSld>
-    <p:spTree>
-      <p:nvGrpSpPr>
-        <p:cNvPr id="1" name=""/>
-        <p:cNvGrpSpPr/>
-        <p:nvPr/>
-      </p:nvGrpSpPr>
-      <p:grpSpPr>
-        <a:xfrm>
-          <a:off x="0" y="0"/>
-          <a:ext cx="0" cy="0"/>
-          <a:chOff x="0" y="0"/>
-          <a:chExt cx="0" cy="0"/>
-        </a:xfrm>
-      </p:grpSpPr>
-      <p:sp>
-        <p:nvSpPr>
-          <p:cNvPr id="2" name="Title 1">
-            <a:extLst>
-              <a:ext uri="{FF2B5EF4-FFF2-40B4-BE49-F238E27FC236}">
-                <a16:creationId xmlns:a16="http://schemas.microsoft.com/office/drawing/2014/main" id="{45C79BA1-37A3-5741-B0A1-E64646E4283C}"/>
-              </a:ext>
-            </a:extLst>
-          </p:cNvPr>
-          <p:cNvSpPr>
-            <a:spLocks noGrp="1"/>
-          </p:cNvSpPr>
-          <p:nvPr>
-            <p:ph type="title"/>
-          </p:nvPr>
-        </p:nvSpPr>
-        <p:spPr>
-          <a:xfrm>
-            <a:off x="838200" y="-4206"/>
-            <a:ext cx="10515600" cy="1325563"/>
-          </a:xfrm>
-        </p:spPr>
-        <p:txBody>
-          <a:bodyPr/>
-          <a:lstStyle/>
-          <a:p>
-            <a:r>
-              <a:rPr lang="en-US" altLang="zh-CN" b="1" dirty="0"/>
-              <a:t>WTP: </a:t>
-            </a:r>
-            <a:r>
-              <a:rPr lang="zh-CN" altLang="zh-CN" b="1" dirty="0"/>
-              <a:t>sliding window</a:t>
-            </a:r>
-            <a:endParaRPr lang="en-US" b="1" dirty="0"/>
-          </a:p>
-        </p:txBody>
-      </p:sp>
-      <p:sp>
-        <p:nvSpPr>
-          <p:cNvPr id="4" name="Rectangle 2">
-            <a:extLst>
-              <a:ext uri="{FF2B5EF4-FFF2-40B4-BE49-F238E27FC236}">
-                <a16:creationId xmlns:a16="http://schemas.microsoft.com/office/drawing/2014/main" id="{3A7EC6F6-3A9C-6A4E-9F5B-60AABA1D48A4}"/>
-              </a:ext>
-            </a:extLst>
-          </p:cNvPr>
-          <p:cNvSpPr>
-            <a:spLocks noChangeArrowheads="1"/>
-          </p:cNvSpPr>
-          <p:nvPr/>
-        </p:nvSpPr>
-        <p:spPr bwMode="auto">
-          <a:xfrm>
-            <a:off x="0" y="43934"/>
-            <a:ext cx="184731" cy="369332"/>
-          </a:xfrm>
-          <a:prstGeom prst="rect">
-            <a:avLst/>
-          </a:prstGeom>
-          <a:solidFill>
-            <a:srgbClr val="FFFFFF"/>
-          </a:solidFill>
-          <a:ln>
-            <a:noFill/>
-          </a:ln>
-          <a:effectLst/>
-          <a:extLst>
-            <a:ext uri="{91240B29-F687-4F45-9708-019B960494DF}">
-              <a14:hiddenLine xmlns:a14="http://schemas.microsoft.com/office/drawing/2010/main" w="9525">
-                <a:solidFill>
-                  <a:schemeClr val="tx1"/>
-                </a:solidFill>
-                <a:miter lim="800000"/>
-                <a:headEnd/>
-                <a:tailEnd/>
-              </a14:hiddenLine>
-            </a:ext>
-            <a:ext uri="{AF507438-7753-43E0-B8FC-AC1667EBCBE1}">
-              <a14:hiddenEffects xmlns:a14="http://schemas.microsoft.com/office/drawing/2010/main">
-                <a:effectLst>
-                  <a:outerShdw dist="35921" dir="2700000" algn="ctr" rotWithShape="0">
-                    <a:schemeClr val="bg2"/>
-                  </a:outerShdw>
-                </a:effectLst>
-              </a14:hiddenEffects>
-            </a:ext>
-          </a:extLst>
-        </p:spPr>
-        <p:txBody>
-          <a:bodyPr vert="horz" wrap="none" lIns="91440" tIns="45720" rIns="91440" bIns="45720" numCol="1" anchor="ctr" anchorCtr="0" compatLnSpc="1">
-            <a:prstTxWarp prst="textNoShape">
-              <a:avLst/>
-            </a:prstTxWarp>
-            <a:spAutoFit/>
-          </a:bodyPr>
-          <a:lstStyle/>
-          <a:p>
-            <a:pPr marL="0" marR="0" lvl="0" indent="0" algn="l" defTabSz="914400" rtl="0" eaLnBrk="0" fontAlgn="base" latinLnBrk="0" hangingPunct="0">
-              <a:lnSpc>
-                <a:spcPct val="100000"/>
-              </a:lnSpc>
-              <a:spcBef>
-                <a:spcPct val="0"/>
-              </a:spcBef>
-              <a:spcAft>
-                <a:spcPct val="0"/>
-              </a:spcAft>
-              <a:buClrTx/>
-              <a:buSzTx/>
-              <a:buFontTx/>
-              <a:buNone/>
-              <a:tabLst/>
-            </a:pPr>
-            <a:endParaRPr kumimoji="0" lang="zh-CN" altLang="zh-CN" sz="1800" b="0" i="0" u="none" strike="noStrike" cap="none" normalizeH="0" baseline="0" dirty="0">
-              <a:ln>
-                <a:noFill/>
-              </a:ln>
-              <a:solidFill>
-                <a:schemeClr val="tx1"/>
-              </a:solidFill>
-              <a:effectLst/>
-              <a:latin typeface="Arial" panose="020B0604020202020204" pitchFamily="34" charset="0"/>
-            </a:endParaRPr>
-          </a:p>
-        </p:txBody>
-      </p:sp>
-      <p:sp>
-        <p:nvSpPr>
-          <p:cNvPr id="7" name="Rectangle 2">
-            <a:extLst>
-              <a:ext uri="{FF2B5EF4-FFF2-40B4-BE49-F238E27FC236}">
-                <a16:creationId xmlns:a16="http://schemas.microsoft.com/office/drawing/2014/main" id="{1EE3D794-DB4E-C14E-A5D2-84852F6CC9EA}"/>
-              </a:ext>
-            </a:extLst>
-          </p:cNvPr>
-          <p:cNvSpPr>
-            <a:spLocks noChangeArrowheads="1"/>
-          </p:cNvSpPr>
-          <p:nvPr/>
-        </p:nvSpPr>
-        <p:spPr bwMode="auto">
-          <a:xfrm>
-            <a:off x="0" y="43934"/>
-            <a:ext cx="184731" cy="369332"/>
-          </a:xfrm>
-          <a:prstGeom prst="rect">
-            <a:avLst/>
-          </a:prstGeom>
-          <a:solidFill>
-            <a:srgbClr val="FFFFFF"/>
-          </a:solidFill>
-          <a:ln>
-            <a:noFill/>
-          </a:ln>
-          <a:effectLst/>
-          <a:extLst>
-            <a:ext uri="{91240B29-F687-4F45-9708-019B960494DF}">
-              <a14:hiddenLine xmlns:a14="http://schemas.microsoft.com/office/drawing/2010/main" w="9525">
-                <a:solidFill>
-                  <a:schemeClr val="tx1"/>
-                </a:solidFill>
-                <a:miter lim="800000"/>
-                <a:headEnd/>
-                <a:tailEnd/>
-              </a14:hiddenLine>
-            </a:ext>
-            <a:ext uri="{AF507438-7753-43E0-B8FC-AC1667EBCBE1}">
-              <a14:hiddenEffects xmlns:a14="http://schemas.microsoft.com/office/drawing/2010/main">
-                <a:effectLst>
-                  <a:outerShdw dist="35921" dir="2700000" algn="ctr" rotWithShape="0">
-                    <a:schemeClr val="bg2"/>
-                  </a:outerShdw>
-                </a:effectLst>
-              </a14:hiddenEffects>
-            </a:ext>
-          </a:extLst>
-        </p:spPr>
-        <p:txBody>
-          <a:bodyPr vert="horz" wrap="none" lIns="91440" tIns="45720" rIns="91440" bIns="45720" numCol="1" anchor="ctr" anchorCtr="0" compatLnSpc="1">
-            <a:prstTxWarp prst="textNoShape">
-              <a:avLst/>
-            </a:prstTxWarp>
-            <a:spAutoFit/>
-          </a:bodyPr>
-          <a:lstStyle/>
-          <a:p>
-            <a:pPr marL="0" marR="0" lvl="0" indent="0" algn="l" defTabSz="914400" rtl="0" eaLnBrk="0" fontAlgn="base" latinLnBrk="0" hangingPunct="0">
-              <a:lnSpc>
-                <a:spcPct val="100000"/>
-              </a:lnSpc>
-              <a:spcBef>
-                <a:spcPct val="0"/>
-              </a:spcBef>
-              <a:spcAft>
-                <a:spcPct val="0"/>
-              </a:spcAft>
-              <a:buClrTx/>
-              <a:buSzTx/>
-              <a:buFontTx/>
-              <a:buNone/>
-              <a:tabLst/>
-            </a:pPr>
-            <a:endParaRPr kumimoji="0" lang="zh-CN" altLang="zh-CN" sz="1800" b="0" i="0" u="none" strike="noStrike" cap="none" normalizeH="0" baseline="0" dirty="0">
-              <a:ln>
-                <a:noFill/>
-              </a:ln>
-              <a:solidFill>
-                <a:schemeClr val="tx1"/>
-              </a:solidFill>
-              <a:effectLst/>
-              <a:latin typeface="Arial" panose="020B0604020202020204" pitchFamily="34" charset="0"/>
-            </a:endParaRPr>
-          </a:p>
-        </p:txBody>
-      </p:sp>
-      <p:sp>
-        <p:nvSpPr>
-          <p:cNvPr id="8" name="Google Shape;76;p16">
-            <a:extLst>
-              <a:ext uri="{FF2B5EF4-FFF2-40B4-BE49-F238E27FC236}">
-                <a16:creationId xmlns:a16="http://schemas.microsoft.com/office/drawing/2014/main" id="{CB197AB9-D666-0CF1-8B71-F9D14429C4EA}"/>
-              </a:ext>
-            </a:extLst>
-          </p:cNvPr>
-          <p:cNvSpPr txBox="1">
-            <a:spLocks/>
-          </p:cNvSpPr>
-          <p:nvPr/>
-        </p:nvSpPr>
-        <p:spPr>
-          <a:xfrm>
-            <a:off x="838200" y="852327"/>
-            <a:ext cx="10582656" cy="1964025"/>
-          </a:xfrm>
-          <a:prstGeom prst="rect">
-            <a:avLst/>
-          </a:prstGeom>
-        </p:spPr>
-        <p:txBody>
-          <a:bodyPr spcFirstLastPara="1" vert="horz" wrap="square" lIns="91425" tIns="91425" rIns="91425" bIns="91425" rtlCol="0" anchor="t" anchorCtr="0">
-            <a:normAutofit lnSpcReduction="10000"/>
-          </a:bodyPr>
-          <a:lstStyle>
-            <a:lvl1pPr marL="228600" indent="-228600" algn="l" defTabSz="914400" rtl="0" eaLnBrk="1" latinLnBrk="0" hangingPunct="1">
-              <a:lnSpc>
-                <a:spcPct val="90000"/>
-              </a:lnSpc>
-              <a:spcBef>
-                <a:spcPts val="1000"/>
-              </a:spcBef>
-              <a:buFont typeface="Arial" panose="020B0604020202020204" pitchFamily="34" charset="0"/>
-              <a:buChar char="•"/>
-              <a:defRPr sz="2800" kern="1200">
-                <a:solidFill>
-                  <a:schemeClr val="tx1"/>
-                </a:solidFill>
-                <a:latin typeface="+mn-lt"/>
-                <a:ea typeface="+mn-ea"/>
-                <a:cs typeface="+mn-cs"/>
-              </a:defRPr>
-            </a:lvl1pPr>
-            <a:lvl2pPr marL="685800" indent="-228600" algn="l" defTabSz="914400" rtl="0" eaLnBrk="1" latinLnBrk="0" hangingPunct="1">
-              <a:lnSpc>
-                <a:spcPct val="90000"/>
-              </a:lnSpc>
-              <a:spcBef>
-                <a:spcPts val="500"/>
-              </a:spcBef>
-              <a:buFont typeface="Arial" panose="020B0604020202020204" pitchFamily="34" charset="0"/>
-              <a:buChar char="•"/>
-              <a:defRPr sz="2400" kern="1200">
-                <a:solidFill>
-                  <a:schemeClr val="tx1"/>
-                </a:solidFill>
-                <a:latin typeface="+mn-lt"/>
-                <a:ea typeface="+mn-ea"/>
-                <a:cs typeface="+mn-cs"/>
-              </a:defRPr>
-            </a:lvl2pPr>
-            <a:lvl3pPr marL="1143000" indent="-228600" algn="l" defTabSz="914400" rtl="0" eaLnBrk="1" latinLnBrk="0" hangingPunct="1">
-              <a:lnSpc>
-                <a:spcPct val="90000"/>
-              </a:lnSpc>
-              <a:spcBef>
-                <a:spcPts val="500"/>
-              </a:spcBef>
-              <a:buFont typeface="Arial" panose="020B0604020202020204" pitchFamily="34" charset="0"/>
-              <a:buChar char="•"/>
-              <a:defRPr sz="2000" kern="1200">
-                <a:solidFill>
-                  <a:schemeClr val="tx1"/>
-                </a:solidFill>
-                <a:latin typeface="+mn-lt"/>
-                <a:ea typeface="+mn-ea"/>
-                <a:cs typeface="+mn-cs"/>
-              </a:defRPr>
-            </a:lvl3pPr>
-            <a:lvl4pPr marL="1600200" indent="-228600" algn="l" defTabSz="914400" rtl="0" eaLnBrk="1" latinLnBrk="0" hangingPunct="1">
-              <a:lnSpc>
-                <a:spcPct val="90000"/>
-              </a:lnSpc>
-              <a:spcBef>
-                <a:spcPts val="500"/>
-              </a:spcBef>
-              <a:buFont typeface="Arial" panose="020B0604020202020204" pitchFamily="34" charset="0"/>
-              <a:buChar char="•"/>
-              <a:defRPr sz="1800" kern="1200">
-                <a:solidFill>
-                  <a:schemeClr val="tx1"/>
-                </a:solidFill>
-                <a:latin typeface="+mn-lt"/>
-                <a:ea typeface="+mn-ea"/>
-                <a:cs typeface="+mn-cs"/>
-              </a:defRPr>
-            </a:lvl4pPr>
-            <a:lvl5pPr marL="2057400" indent="-228600" algn="l" defTabSz="914400" rtl="0" eaLnBrk="1" latinLnBrk="0" hangingPunct="1">
-              <a:lnSpc>
-                <a:spcPct val="90000"/>
-              </a:lnSpc>
-              <a:spcBef>
-                <a:spcPts val="500"/>
-              </a:spcBef>
-              <a:buFont typeface="Arial" panose="020B0604020202020204" pitchFamily="34" charset="0"/>
-              <a:buChar char="•"/>
-              <a:defRPr sz="1800" kern="1200">
-                <a:solidFill>
-                  <a:schemeClr val="tx1"/>
-                </a:solidFill>
-                <a:latin typeface="+mn-lt"/>
-                <a:ea typeface="+mn-ea"/>
-                <a:cs typeface="+mn-cs"/>
-              </a:defRPr>
-            </a:lvl5pPr>
-            <a:lvl6pPr marL="2514600" indent="-228600" algn="l" defTabSz="914400" rtl="0" eaLnBrk="1" latinLnBrk="0" hangingPunct="1">
-              <a:lnSpc>
-                <a:spcPct val="90000"/>
-              </a:lnSpc>
-              <a:spcBef>
-                <a:spcPts val="500"/>
-              </a:spcBef>
-              <a:buFont typeface="Arial" panose="020B0604020202020204" pitchFamily="34" charset="0"/>
-              <a:buChar char="•"/>
-              <a:defRPr sz="1800" kern="1200">
-                <a:solidFill>
-                  <a:schemeClr val="tx1"/>
-                </a:solidFill>
-                <a:latin typeface="+mn-lt"/>
-                <a:ea typeface="+mn-ea"/>
-                <a:cs typeface="+mn-cs"/>
-              </a:defRPr>
-            </a:lvl6pPr>
-            <a:lvl7pPr marL="2971800" indent="-228600" algn="l" defTabSz="914400" rtl="0" eaLnBrk="1" latinLnBrk="0" hangingPunct="1">
-              <a:lnSpc>
-                <a:spcPct val="90000"/>
-              </a:lnSpc>
-              <a:spcBef>
-                <a:spcPts val="500"/>
-              </a:spcBef>
-              <a:buFont typeface="Arial" panose="020B0604020202020204" pitchFamily="34" charset="0"/>
-              <a:buChar char="•"/>
-              <a:defRPr sz="1800" kern="1200">
-                <a:solidFill>
-                  <a:schemeClr val="tx1"/>
-                </a:solidFill>
-                <a:latin typeface="+mn-lt"/>
-                <a:ea typeface="+mn-ea"/>
-                <a:cs typeface="+mn-cs"/>
-              </a:defRPr>
-            </a:lvl7pPr>
-            <a:lvl8pPr marL="3429000" indent="-228600" algn="l" defTabSz="914400" rtl="0" eaLnBrk="1" latinLnBrk="0" hangingPunct="1">
-              <a:lnSpc>
-                <a:spcPct val="90000"/>
-              </a:lnSpc>
-              <a:spcBef>
-                <a:spcPts val="500"/>
-              </a:spcBef>
-              <a:buFont typeface="Arial" panose="020B0604020202020204" pitchFamily="34" charset="0"/>
-              <a:buChar char="•"/>
-              <a:defRPr sz="1800" kern="1200">
-                <a:solidFill>
-                  <a:schemeClr val="tx1"/>
-                </a:solidFill>
-                <a:latin typeface="+mn-lt"/>
-                <a:ea typeface="+mn-ea"/>
-                <a:cs typeface="+mn-cs"/>
-              </a:defRPr>
-            </a:lvl8pPr>
-            <a:lvl9pPr marL="3886200" indent="-228600" algn="l" defTabSz="914400" rtl="0" eaLnBrk="1" latinLnBrk="0" hangingPunct="1">
-              <a:lnSpc>
-                <a:spcPct val="90000"/>
-              </a:lnSpc>
-              <a:spcBef>
-                <a:spcPts val="500"/>
-              </a:spcBef>
-              <a:buFont typeface="Arial" panose="020B0604020202020204" pitchFamily="34" charset="0"/>
-              <a:buChar char="•"/>
-              <a:defRPr sz="1800" kern="1200">
-                <a:solidFill>
-                  <a:schemeClr val="tx1"/>
-                </a:solidFill>
-                <a:latin typeface="+mn-lt"/>
-                <a:ea typeface="+mn-ea"/>
-                <a:cs typeface="+mn-cs"/>
-              </a:defRPr>
-            </a:lvl9pPr>
-          </a:lstStyle>
-          <a:p>
-            <a:pPr marL="457200" indent="-342900">
-              <a:lnSpc>
-                <a:spcPct val="125000"/>
-              </a:lnSpc>
-              <a:spcBef>
-                <a:spcPts val="0"/>
-              </a:spcBef>
-              <a:buSzPts val="1800"/>
-              <a:buFont typeface="Arial" panose="020B0604020202020204" pitchFamily="34" charset="0"/>
-              <a:buChar char="●"/>
-            </a:pPr>
-            <a:r>
-              <a:rPr lang="en-US" altLang="zh-CN" sz="2200" dirty="0"/>
-              <a:t>Initially</a:t>
-            </a:r>
-            <a:endParaRPr lang="en-US" sz="2200" dirty="0"/>
-          </a:p>
-          <a:p>
-            <a:pPr marL="914400" lvl="1" indent="-317500">
-              <a:lnSpc>
-                <a:spcPct val="125000"/>
-              </a:lnSpc>
-              <a:spcBef>
-                <a:spcPts val="0"/>
-              </a:spcBef>
-              <a:buSzPts val="1400"/>
-              <a:buFont typeface="Arial" panose="020B0604020202020204" pitchFamily="34" charset="0"/>
-              <a:buChar char="○"/>
-            </a:pPr>
-            <a:r>
-              <a:rPr lang="en-US" altLang="zh-CN" sz="1800" dirty="0"/>
-              <a:t>Send a window of packets</a:t>
-            </a:r>
-            <a:endParaRPr lang="en-US" sz="1800" dirty="0"/>
-          </a:p>
-          <a:p>
-            <a:pPr marL="457200" indent="-342900">
-              <a:lnSpc>
-                <a:spcPct val="125000"/>
-              </a:lnSpc>
-              <a:spcBef>
-                <a:spcPts val="0"/>
-              </a:spcBef>
-              <a:buSzPts val="1800"/>
-              <a:buFont typeface="Arial" panose="020B0604020202020204" pitchFamily="34" charset="0"/>
-              <a:buChar char="●"/>
-            </a:pPr>
-            <a:r>
-              <a:rPr lang="en-US" altLang="zh-CN" sz="2200" dirty="0"/>
-              <a:t>When sender sees a new </a:t>
-            </a:r>
-            <a:r>
-              <a:rPr lang="en-US" altLang="zh-CN" sz="2200" i="1" dirty="0"/>
-              <a:t>ACK</a:t>
-            </a:r>
-            <a:endParaRPr lang="en-US" sz="2200" i="1" dirty="0"/>
-          </a:p>
-          <a:p>
-            <a:pPr marL="914400" lvl="1" indent="-317500">
-              <a:lnSpc>
-                <a:spcPct val="125000"/>
-              </a:lnSpc>
-              <a:spcBef>
-                <a:spcPts val="0"/>
-              </a:spcBef>
-              <a:buSzPts val="1400"/>
-              <a:buFont typeface="Arial" panose="020B0604020202020204" pitchFamily="34" charset="0"/>
-              <a:buChar char="○"/>
-            </a:pPr>
-            <a:r>
-              <a:rPr lang="en-US" altLang="zh-CN" sz="1800" dirty="0"/>
-              <a:t>Advance the window by how many pkt </a:t>
-            </a:r>
-            <a:r>
-              <a:rPr lang="en-US" altLang="zh-CN" sz="1800" dirty="0" err="1"/>
-              <a:t>acked</a:t>
-            </a:r>
-            <a:r>
-              <a:rPr lang="en-US" altLang="zh-CN" sz="1800" dirty="0"/>
-              <a:t> (could &gt; 1: cumulative ack)</a:t>
-            </a:r>
-            <a:endParaRPr lang="en-US" sz="1800" dirty="0"/>
-          </a:p>
-          <a:p>
-            <a:pPr marL="914400" lvl="1" indent="-317500">
-              <a:lnSpc>
-                <a:spcPct val="125000"/>
-              </a:lnSpc>
-              <a:spcBef>
-                <a:spcPts val="0"/>
-              </a:spcBef>
-              <a:buSzPts val="1400"/>
-              <a:buFont typeface="Arial" panose="020B0604020202020204" pitchFamily="34" charset="0"/>
-              <a:buChar char="○"/>
-            </a:pPr>
-            <a:r>
-              <a:rPr lang="en-US" altLang="zh-CN" sz="1800" dirty="0"/>
-              <a:t>Send new packets covered by the window</a:t>
-            </a:r>
-            <a:endParaRPr lang="en-US" sz="1800" dirty="0"/>
-          </a:p>
-        </p:txBody>
-      </p:sp>
       <p:pic>
         <p:nvPicPr>
           <p:cNvPr id="3" name="图片 2">
             <a:extLst>
               <a:ext uri="{FF2B5EF4-FFF2-40B4-BE49-F238E27FC236}">
-                <a16:creationId xmlns:a16="http://schemas.microsoft.com/office/drawing/2014/main" id="{236D3ACA-7329-6A33-335E-621584B65410}"/>
+                <a16:creationId xmlns:a16="http://schemas.microsoft.com/office/drawing/2014/main" id="{3AA76C84-288A-95A9-BCBA-C79628B9DEEB}"/>
               </a:ext>
             </a:extLst>
           </p:cNvPr>
@@ -8031,18 +7963,59 @@
         </p:blipFill>
         <p:spPr>
           <a:xfrm>
-            <a:off x="838200" y="2726846"/>
-            <a:ext cx="9073837" cy="4012281"/>
+            <a:off x="925178" y="2181577"/>
+            <a:ext cx="6787587" cy="1278380"/>
           </a:xfrm>
           <a:prstGeom prst="rect">
             <a:avLst/>
           </a:prstGeom>
         </p:spPr>
       </p:pic>
+      <p:cxnSp>
+        <p:nvCxnSpPr>
+          <p:cNvPr id="6" name="直线连接符 5">
+            <a:extLst>
+              <a:ext uri="{FF2B5EF4-FFF2-40B4-BE49-F238E27FC236}">
+                <a16:creationId xmlns:a16="http://schemas.microsoft.com/office/drawing/2014/main" id="{EDC8471E-3349-CE60-C2A6-AEA389316FC5}"/>
+              </a:ext>
+            </a:extLst>
+          </p:cNvPr>
+          <p:cNvCxnSpPr/>
+          <p:nvPr/>
+        </p:nvCxnSpPr>
+        <p:spPr>
+          <a:xfrm>
+            <a:off x="3518704" y="2592729"/>
+            <a:ext cx="2777924" cy="0"/>
+          </a:xfrm>
+          <a:prstGeom prst="line">
+            <a:avLst/>
+          </a:prstGeom>
+          <a:ln w="22225">
+            <a:solidFill>
+              <a:srgbClr val="FF0000"/>
+            </a:solidFill>
+          </a:ln>
+        </p:spPr>
+        <p:style>
+          <a:lnRef idx="1">
+            <a:schemeClr val="accent1"/>
+          </a:lnRef>
+          <a:fillRef idx="0">
+            <a:schemeClr val="accent1"/>
+          </a:fillRef>
+          <a:effectRef idx="0">
+            <a:schemeClr val="accent1"/>
+          </a:effectRef>
+          <a:fontRef idx="minor">
+            <a:schemeClr val="tx1"/>
+          </a:fontRef>
+        </p:style>
+      </p:cxnSp>
     </p:spTree>
     <p:extLst>
       <p:ext uri="{BB962C8B-B14F-4D97-AF65-F5344CB8AC3E}">
-        <p14:creationId xmlns:p14="http://schemas.microsoft.com/office/powerpoint/2010/main" val="2626515644"/>
+        <p14:creationId xmlns:p14="http://schemas.microsoft.com/office/powerpoint/2010/main" val="267997120"/>
       </p:ext>
     </p:extLst>
   </p:cSld>
@@ -8097,7 +8070,7 @@
           <a:p>
             <a:r>
               <a:rPr lang="zh-CN" altLang="zh-CN" b="1" dirty="0"/>
-              <a:t>WTP: sender</a:t>
+              <a:t>WTP: stages</a:t>
             </a:r>
             <a:endParaRPr lang="en-US" b="1" dirty="0"/>
           </a:p>
@@ -8283,10 +8256,10 @@
       </p:sp>
       <p:sp>
         <p:nvSpPr>
-          <p:cNvPr id="8" name="Google Shape;83;p17">
+          <p:cNvPr id="10" name="Google Shape;70;p15">
             <a:extLst>
               <a:ext uri="{FF2B5EF4-FFF2-40B4-BE49-F238E27FC236}">
-                <a16:creationId xmlns:a16="http://schemas.microsoft.com/office/drawing/2014/main" id="{090BEAF3-E38A-D357-DD2B-221412EE44DE}"/>
+                <a16:creationId xmlns:a16="http://schemas.microsoft.com/office/drawing/2014/main" id="{22E50F3B-8764-E942-4A7C-439C893FCE64}"/>
               </a:ext>
             </a:extLst>
           </p:cNvPr>
@@ -8297,8 +8270,8 @@
         </p:nvSpPr>
         <p:spPr>
           <a:xfrm>
-            <a:off x="838199" y="1199833"/>
-            <a:ext cx="10200503" cy="5561693"/>
+            <a:off x="838199" y="863716"/>
+            <a:ext cx="9857763" cy="5994284"/>
           </a:xfrm>
           <a:prstGeom prst="rect">
             <a:avLst/>
@@ -8306,7 +8279,7 @@
         </p:spPr>
         <p:txBody>
           <a:bodyPr spcFirstLastPara="1" vert="horz" wrap="square" lIns="91425" tIns="91425" rIns="91425" bIns="91425" rtlCol="0" anchor="t" anchorCtr="0">
-            <a:normAutofit fontScale="25000" lnSpcReduction="20000"/>
+            <a:noAutofit/>
           </a:bodyPr>
           <a:lstStyle>
             <a:lvl1pPr marL="228600" indent="-228600" algn="l" defTabSz="914400" rtl="0" eaLnBrk="1" latinLnBrk="0" hangingPunct="1">
@@ -8473,66 +8446,460 @@
             </a:lvl9pPr>
           </a:lstStyle>
           <a:p>
-            <a:pPr marL="0" indent="0">
+            <a:pPr marL="457200" indent="-334327">
+              <a:lnSpc>
+                <a:spcPct val="114000"/>
+              </a:lnSpc>
               <a:spcBef>
                 <a:spcPts val="0"/>
               </a:spcBef>
-              <a:buFont typeface="Arial" panose="020B0604020202020204" pitchFamily="34" charset="0"/>
-              <a:buNone/>
-            </a:pPr>
-            <a:r>
-              <a:rPr lang="en-US" altLang="zh-CN" sz="12800" b="1" dirty="0"/>
-              <a:t>Special Cases Strategy</a:t>
-            </a:r>
-            <a:endParaRPr lang="en-US" sz="12800" b="1" dirty="0"/>
-          </a:p>
-          <a:p>
-            <a:pPr marL="457200" indent="-342900">
-              <a:lnSpc>
-                <a:spcPct val="145000"/>
-              </a:lnSpc>
-              <a:spcBef>
-                <a:spcPts val="1200"/>
-              </a:spcBef>
-              <a:buSzPts val="1800"/>
+              <a:buSzPct val="100000"/>
               <a:buFont typeface="Arial" panose="020B0604020202020204" pitchFamily="34" charset="0"/>
               <a:buChar char="●"/>
             </a:pPr>
             <a:r>
-              <a:rPr lang="en-US" altLang="zh-CN" sz="9600" i="1" dirty="0"/>
-              <a:t>Packet Loss</a:t>
-            </a:r>
-            <a:r>
-              <a:rPr lang="en-US" altLang="zh-CN" sz="9600" dirty="0"/>
-              <a:t>: retransmission timer</a:t>
-            </a:r>
-            <a:endParaRPr lang="en-US" sz="9600" dirty="0"/>
-          </a:p>
-          <a:p>
-            <a:pPr marL="457200" indent="-342900">
-              <a:lnSpc>
-                <a:spcPct val="145000"/>
+              <a:rPr lang="en-US" altLang="zh-CN" sz="2000" b="1" dirty="0"/>
+              <a:t>Header format: </a:t>
+            </a:r>
+            <a:r>
+              <a:rPr lang="en-US" altLang="zh-CN" sz="2000" dirty="0"/>
+              <a:t>&lt;type, </a:t>
+            </a:r>
+            <a:r>
+              <a:rPr lang="en-US" altLang="zh-CN" sz="2000" dirty="0" err="1"/>
+              <a:t>seqNum</a:t>
+            </a:r>
+            <a:r>
+              <a:rPr lang="en-US" altLang="zh-CN" sz="2000" dirty="0"/>
+              <a:t>, length, checksum&gt;</a:t>
+            </a:r>
+          </a:p>
+          <a:p>
+            <a:pPr marL="457200" indent="-334327">
+              <a:lnSpc>
+                <a:spcPct val="114000"/>
               </a:lnSpc>
               <a:spcBef>
                 <a:spcPts val="0"/>
               </a:spcBef>
-              <a:buSzPts val="1800"/>
+              <a:buSzPct val="100000"/>
               <a:buFont typeface="Arial" panose="020B0604020202020204" pitchFamily="34" charset="0"/>
               <a:buChar char="●"/>
             </a:pPr>
             <a:r>
-              <a:rPr lang="en-US" altLang="zh-CN" sz="9600" i="1" dirty="0"/>
-              <a:t>Reordered/delayed/duplicated ACK</a:t>
-            </a:r>
-            <a:r>
-              <a:rPr lang="en-US" altLang="zh-CN" sz="9600" dirty="0"/>
-              <a:t>:</a:t>
-            </a:r>
-          </a:p>
-          <a:p>
-            <a:pPr marL="914400" lvl="1" indent="-317500">
-              <a:lnSpc>
-                <a:spcPct val="145000"/>
+              <a:rPr lang="en-US" altLang="zh-CN" sz="2000" b="1" dirty="0"/>
+              <a:t>Initiate:</a:t>
+            </a:r>
+            <a:endParaRPr lang="en-US" sz="2000" b="1" dirty="0"/>
+          </a:p>
+          <a:p>
+            <a:pPr marL="914400" lvl="1" indent="-310832">
+              <a:lnSpc>
+                <a:spcPct val="114000"/>
+              </a:lnSpc>
+              <a:spcBef>
+                <a:spcPts val="0"/>
+              </a:spcBef>
+              <a:buSzPct val="100000"/>
+              <a:buFont typeface="Arial" panose="020B0604020202020204" pitchFamily="34" charset="0"/>
+              <a:buChar char="○"/>
+            </a:pPr>
+            <a:r>
+              <a:rPr lang="en-US" altLang="zh-CN" sz="1800" i="1" dirty="0"/>
+              <a:t>Sender</a:t>
+            </a:r>
+            <a:r>
+              <a:rPr lang="en-US" altLang="zh-CN" sz="1800" dirty="0"/>
+              <a:t>: “I have something for you!” &lt;</a:t>
+            </a:r>
+            <a:r>
+              <a:rPr lang="en-US" altLang="zh-CN" sz="1800" dirty="0">
+                <a:solidFill>
+                  <a:schemeClr val="accent2"/>
+                </a:solidFill>
+              </a:rPr>
+              <a:t>START</a:t>
+            </a:r>
+            <a:r>
+              <a:rPr lang="en-US" altLang="zh-CN" sz="1800" dirty="0"/>
+              <a:t>, </a:t>
+            </a:r>
+            <a:r>
+              <a:rPr lang="en-US" altLang="zh-CN" sz="1800" i="1" dirty="0"/>
+              <a:t>R</a:t>
+            </a:r>
+            <a:r>
+              <a:rPr lang="en-US" altLang="zh-CN" sz="1800" dirty="0"/>
+              <a:t>, 0, 0&gt; </a:t>
+            </a:r>
+            <a:endParaRPr lang="en-US" sz="1800" dirty="0"/>
+          </a:p>
+          <a:p>
+            <a:pPr marL="914400" lvl="1" indent="-310832">
+              <a:lnSpc>
+                <a:spcPct val="114000"/>
+              </a:lnSpc>
+              <a:spcBef>
+                <a:spcPts val="0"/>
+              </a:spcBef>
+              <a:buSzPct val="100000"/>
+              <a:buFont typeface="Arial" panose="020B0604020202020204" pitchFamily="34" charset="0"/>
+              <a:buChar char="○"/>
+            </a:pPr>
+            <a:r>
+              <a:rPr lang="en-US" altLang="zh-CN" sz="1800" i="1" dirty="0"/>
+              <a:t>Receiver</a:t>
+            </a:r>
+            <a:r>
+              <a:rPr lang="en-US" altLang="zh-CN" sz="1800" dirty="0"/>
+              <a:t>: “I am ready, please proceed.” &lt;</a:t>
+            </a:r>
+            <a:r>
+              <a:rPr lang="en-US" altLang="zh-CN" sz="1800" dirty="0">
+                <a:solidFill>
+                  <a:schemeClr val="accent2"/>
+                </a:solidFill>
+              </a:rPr>
+              <a:t>ACK</a:t>
+            </a:r>
+            <a:r>
+              <a:rPr lang="en-US" altLang="zh-CN" sz="1800" dirty="0"/>
+              <a:t>, </a:t>
+            </a:r>
+            <a:r>
+              <a:rPr lang="en-US" altLang="zh-CN" sz="1800" i="1" dirty="0"/>
+              <a:t>R</a:t>
+            </a:r>
+            <a:r>
+              <a:rPr lang="en-US" altLang="zh-CN" sz="1800" dirty="0"/>
+              <a:t>, 0, 0&gt;</a:t>
+            </a:r>
+            <a:endParaRPr lang="en-US" sz="1800" dirty="0"/>
+          </a:p>
+          <a:p>
+            <a:pPr marL="457200" indent="-334327">
+              <a:lnSpc>
+                <a:spcPct val="114000"/>
+              </a:lnSpc>
+              <a:spcBef>
+                <a:spcPts val="0"/>
+              </a:spcBef>
+              <a:buSzPct val="100000"/>
+              <a:buFont typeface="Arial" panose="020B0604020202020204" pitchFamily="34" charset="0"/>
+              <a:buChar char="●"/>
+            </a:pPr>
+            <a:r>
+              <a:rPr lang="en-US" altLang="zh-CN" sz="2000" b="1" dirty="0"/>
+              <a:t>Data transmission:</a:t>
+            </a:r>
+            <a:endParaRPr lang="en-US" sz="2000" b="1" dirty="0"/>
+          </a:p>
+          <a:p>
+            <a:pPr marL="914400" lvl="1" indent="-310832">
+              <a:lnSpc>
+                <a:spcPct val="114000"/>
+              </a:lnSpc>
+              <a:spcBef>
+                <a:spcPts val="0"/>
+              </a:spcBef>
+              <a:buSzPct val="100000"/>
+              <a:buFont typeface="Arial" panose="020B0604020202020204" pitchFamily="34" charset="0"/>
+              <a:buChar char="○"/>
+            </a:pPr>
+            <a:r>
+              <a:rPr lang="en-US" altLang="zh-CN" sz="1800" i="1" dirty="0"/>
+              <a:t>Sender</a:t>
+            </a:r>
+            <a:r>
+              <a:rPr lang="en-US" altLang="zh-CN" sz="1800" dirty="0"/>
+              <a:t>: “Here is the </a:t>
+            </a:r>
+            <a:r>
+              <a:rPr lang="en-US" altLang="zh-CN" sz="1800" i="1" dirty="0" err="1"/>
+              <a:t>i</a:t>
+            </a:r>
+            <a:r>
+              <a:rPr lang="en-US" altLang="zh-CN" sz="1800" dirty="0" err="1"/>
+              <a:t>-th</a:t>
+            </a:r>
+            <a:r>
+              <a:rPr lang="en-US" altLang="zh-CN" sz="1800" dirty="0"/>
+              <a:t> packet.” &lt;</a:t>
+            </a:r>
+            <a:r>
+              <a:rPr lang="en-US" altLang="zh-CN" sz="1800" dirty="0">
+                <a:solidFill>
+                  <a:schemeClr val="accent2"/>
+                </a:solidFill>
+              </a:rPr>
+              <a:t>DATA</a:t>
+            </a:r>
+            <a:r>
+              <a:rPr lang="en-US" altLang="zh-CN" sz="1800" dirty="0"/>
+              <a:t>, </a:t>
+            </a:r>
+            <a:r>
+              <a:rPr lang="en-US" altLang="zh-CN" sz="1800" i="1" dirty="0" err="1"/>
+              <a:t>i</a:t>
+            </a:r>
+            <a:r>
+              <a:rPr lang="en-US" altLang="zh-CN" sz="1800" dirty="0"/>
+              <a:t>, LEN, SUM&gt;</a:t>
+            </a:r>
+            <a:endParaRPr lang="en-US" sz="1800" dirty="0"/>
+          </a:p>
+          <a:p>
+            <a:pPr marL="914400" lvl="1" indent="-310832">
+              <a:lnSpc>
+                <a:spcPct val="114000"/>
+              </a:lnSpc>
+              <a:spcBef>
+                <a:spcPts val="0"/>
+              </a:spcBef>
+              <a:buSzPct val="100000"/>
+              <a:buFont typeface="Arial" panose="020B0604020202020204" pitchFamily="34" charset="0"/>
+              <a:buChar char="○"/>
+            </a:pPr>
+            <a:r>
+              <a:rPr lang="en-US" altLang="zh-CN" sz="1800" i="1" dirty="0"/>
+              <a:t>Receiver</a:t>
+            </a:r>
+            <a:r>
+              <a:rPr lang="en-US" altLang="zh-CN" sz="1800" dirty="0"/>
+              <a:t>: “Got you, please send me the next packet (</a:t>
+            </a:r>
+            <a:r>
+              <a:rPr lang="en-US" altLang="zh-CN" sz="1800" i="1" dirty="0"/>
+              <a:t>j</a:t>
+            </a:r>
+            <a:r>
+              <a:rPr lang="en-US" altLang="zh-CN" sz="1800" dirty="0"/>
+              <a:t>-</a:t>
+            </a:r>
+            <a:r>
+              <a:rPr lang="en-US" altLang="zh-CN" sz="1800" dirty="0" err="1"/>
+              <a:t>th</a:t>
+            </a:r>
+            <a:r>
+              <a:rPr lang="en-US" altLang="zh-CN" sz="1800" dirty="0"/>
+              <a:t> packet).” &lt;</a:t>
+            </a:r>
+            <a:r>
+              <a:rPr lang="en-US" altLang="zh-CN" sz="1800" dirty="0">
+                <a:solidFill>
+                  <a:schemeClr val="accent2"/>
+                </a:solidFill>
+              </a:rPr>
+              <a:t>ACK</a:t>
+            </a:r>
+            <a:r>
+              <a:rPr lang="en-US" altLang="zh-CN" sz="1800" dirty="0"/>
+              <a:t>, </a:t>
+            </a:r>
+            <a:r>
+              <a:rPr lang="en-US" altLang="zh-CN" sz="1800" i="1" dirty="0"/>
+              <a:t>j</a:t>
+            </a:r>
+            <a:r>
+              <a:rPr lang="en-US" altLang="zh-CN" sz="1800" dirty="0"/>
+              <a:t>, 0, 0&gt;</a:t>
+            </a:r>
+            <a:endParaRPr lang="en-US" sz="1800" dirty="0"/>
+          </a:p>
+          <a:p>
+            <a:pPr marL="457200" indent="-334327">
+              <a:lnSpc>
+                <a:spcPct val="114000"/>
+              </a:lnSpc>
+              <a:spcBef>
+                <a:spcPts val="0"/>
+              </a:spcBef>
+              <a:buSzPct val="100000"/>
+              <a:buFont typeface="Arial" panose="020B0604020202020204" pitchFamily="34" charset="0"/>
+              <a:buChar char="●"/>
+            </a:pPr>
+            <a:r>
+              <a:rPr lang="en-US" altLang="zh-CN" sz="2000" b="1" dirty="0"/>
+              <a:t>Finish: </a:t>
+            </a:r>
+            <a:endParaRPr lang="en-US" sz="2000" b="1" dirty="0"/>
+          </a:p>
+          <a:p>
+            <a:pPr marL="914400" lvl="1" indent="-310832">
+              <a:lnSpc>
+                <a:spcPct val="114000"/>
+              </a:lnSpc>
+              <a:spcBef>
+                <a:spcPts val="0"/>
+              </a:spcBef>
+              <a:buSzPct val="100000"/>
+              <a:buFont typeface="Arial" panose="020B0604020202020204" pitchFamily="34" charset="0"/>
+              <a:buChar char="○"/>
+            </a:pPr>
+            <a:r>
+              <a:rPr lang="en-US" altLang="zh-CN" sz="1800" i="1" dirty="0"/>
+              <a:t>Sender</a:t>
+            </a:r>
+            <a:r>
+              <a:rPr lang="en-US" altLang="zh-CN" sz="1800" dirty="0"/>
+              <a:t>: “That’s all there is for file R” &lt;</a:t>
+            </a:r>
+            <a:r>
+              <a:rPr lang="en-US" altLang="zh-CN" sz="1800" dirty="0">
+                <a:solidFill>
+                  <a:schemeClr val="accent2"/>
+                </a:solidFill>
+              </a:rPr>
+              <a:t>END</a:t>
+            </a:r>
+            <a:r>
+              <a:rPr lang="en-US" altLang="zh-CN" sz="1800" dirty="0"/>
+              <a:t>, </a:t>
+            </a:r>
+            <a:r>
+              <a:rPr lang="en-US" altLang="zh-CN" sz="1800" i="1" dirty="0"/>
+              <a:t>R</a:t>
+            </a:r>
+            <a:r>
+              <a:rPr lang="en-US" altLang="zh-CN" sz="1800" dirty="0"/>
+              <a:t>, 0, 0&gt;</a:t>
+            </a:r>
+            <a:endParaRPr lang="en-US" sz="1800" dirty="0"/>
+          </a:p>
+          <a:p>
+            <a:pPr marL="914400" lvl="1" indent="-310832">
+              <a:lnSpc>
+                <a:spcPct val="114000"/>
+              </a:lnSpc>
+              <a:spcBef>
+                <a:spcPts val="0"/>
+              </a:spcBef>
+              <a:buSzPct val="100000"/>
+              <a:buFont typeface="Arial" panose="020B0604020202020204" pitchFamily="34" charset="0"/>
+              <a:buChar char="○"/>
+            </a:pPr>
+            <a:r>
+              <a:rPr lang="en-US" altLang="zh-CN" sz="1800" i="1" dirty="0"/>
+              <a:t>Receiver</a:t>
+            </a:r>
+            <a:r>
+              <a:rPr lang="en-US" altLang="zh-CN" sz="1800" dirty="0"/>
+              <a:t>: “I have saved it.” &lt;</a:t>
+            </a:r>
+            <a:r>
+              <a:rPr lang="en-US" altLang="zh-CN" sz="1800" dirty="0">
+                <a:solidFill>
+                  <a:schemeClr val="accent2"/>
+                </a:solidFill>
+              </a:rPr>
+              <a:t>ACK</a:t>
+            </a:r>
+            <a:r>
+              <a:rPr lang="en-US" altLang="zh-CN" sz="1800" dirty="0"/>
+              <a:t>, </a:t>
+            </a:r>
+            <a:r>
+              <a:rPr lang="en-US" altLang="zh-CN" sz="1800" i="1" dirty="0"/>
+              <a:t>R</a:t>
+            </a:r>
+            <a:r>
+              <a:rPr lang="en-US" altLang="zh-CN" sz="1800" dirty="0"/>
+              <a:t>, 0, 0&gt;</a:t>
+            </a:r>
+            <a:endParaRPr lang="en-US" sz="1800" dirty="0"/>
+          </a:p>
+          <a:p>
+            <a:pPr marL="457200" indent="-334327">
+              <a:lnSpc>
+                <a:spcPct val="114000"/>
+              </a:lnSpc>
+              <a:spcBef>
+                <a:spcPts val="600"/>
+              </a:spcBef>
+              <a:buSzPct val="100000"/>
+              <a:buFont typeface="Arial" panose="020B0604020202020204" pitchFamily="34" charset="0"/>
+              <a:buChar char="●"/>
+            </a:pPr>
+            <a:r>
+              <a:rPr lang="en-US" altLang="zh-CN" sz="2000" b="1" dirty="0"/>
+              <a:t>Special note:</a:t>
+            </a:r>
+            <a:endParaRPr lang="en-US" sz="2000" b="1" dirty="0"/>
+          </a:p>
+          <a:p>
+            <a:pPr marL="914400" lvl="1" indent="-310832">
+              <a:lnSpc>
+                <a:spcPct val="114000"/>
+              </a:lnSpc>
+              <a:spcBef>
+                <a:spcPts val="0"/>
+              </a:spcBef>
+              <a:buSzPct val="100000"/>
+              <a:buFont typeface="Arial" panose="020B0604020202020204" pitchFamily="34" charset="0"/>
+              <a:buChar char="○"/>
+            </a:pPr>
+            <a:r>
+              <a:rPr lang="en-US" altLang="zh-CN" sz="1800" dirty="0"/>
+              <a:t>initiate and finish stages use the same random </a:t>
+            </a:r>
+            <a:r>
+              <a:rPr lang="en-US" altLang="zh-CN" sz="1800" dirty="0" err="1">
+                <a:solidFill>
+                  <a:schemeClr val="accent2"/>
+                </a:solidFill>
+              </a:rPr>
+              <a:t>seqNum</a:t>
+            </a:r>
+            <a:r>
+              <a:rPr lang="en-US" altLang="zh-CN" sz="1800" dirty="0"/>
+              <a:t> </a:t>
+            </a:r>
+            <a:r>
+              <a:rPr lang="en-US" altLang="zh-CN" sz="1800" i="1" dirty="0"/>
+              <a:t>R</a:t>
+            </a:r>
+            <a:endParaRPr lang="en-US" sz="1800" i="1" dirty="0"/>
+          </a:p>
+          <a:p>
+            <a:pPr marL="1371600" lvl="2" indent="-310832">
+              <a:lnSpc>
+                <a:spcPct val="114000"/>
+              </a:lnSpc>
+              <a:spcBef>
+                <a:spcPts val="0"/>
+              </a:spcBef>
+              <a:buSzPct val="100000"/>
+              <a:buFont typeface="Wingdings" pitchFamily="2" charset="2"/>
+              <a:buChar char="ü"/>
+            </a:pPr>
+            <a:r>
+              <a:rPr lang="en-US" altLang="zh-CN" sz="1800" dirty="0"/>
+              <a:t>unrelated to data packets</a:t>
+            </a:r>
+            <a:endParaRPr lang="en-US" sz="1800" dirty="0"/>
+          </a:p>
+          <a:p>
+            <a:pPr marL="1371600" lvl="2" indent="-310832">
+              <a:lnSpc>
+                <a:spcPct val="114000"/>
+              </a:lnSpc>
+              <a:spcBef>
+                <a:spcPts val="0"/>
+              </a:spcBef>
+              <a:buSzPct val="100000"/>
+              <a:buFont typeface="Wingdings" pitchFamily="2" charset="2"/>
+              <a:buChar char="ü"/>
+            </a:pPr>
+            <a:r>
+              <a:rPr lang="en-US" altLang="zh-CN" sz="1800" dirty="0"/>
+              <a:t>to mark the begin and end of the same file</a:t>
+            </a:r>
+            <a:endParaRPr lang="en-US" altLang="zh-CN" sz="1800" b="1" dirty="0"/>
+          </a:p>
+          <a:p>
+            <a:pPr marL="914400" lvl="1" indent="-310832">
+              <a:lnSpc>
+                <a:spcPct val="114000"/>
               </a:lnSpc>
               <a:spcBef>
                 <a:spcPts val="0"/>
@@ -8540,255 +8907,118 @@
               <a:buClr>
                 <a:schemeClr val="tx1"/>
               </a:buClr>
-              <a:buSzPts val="1400"/>
+              <a:buSzPct val="100000"/>
               <a:buFont typeface="Arial" panose="020B0604020202020204" pitchFamily="34" charset="0"/>
               <a:buChar char="○"/>
             </a:pPr>
             <a:r>
-              <a:rPr lang="en-US" altLang="zh-CN" sz="8000" i="1" dirty="0">
+              <a:rPr lang="en-US" altLang="zh-CN" sz="1800" dirty="0" err="1">
                 <a:solidFill>
                   <a:schemeClr val="accent2"/>
                 </a:solidFill>
               </a:rPr>
-              <a:t>Ignore</a:t>
-            </a:r>
-            <a:r>
-              <a:rPr lang="en-US" altLang="zh-CN" sz="8000" dirty="0"/>
-              <a:t> if the </a:t>
-            </a:r>
-            <a:r>
-              <a:rPr lang="en-US" altLang="zh-CN" sz="8000" dirty="0" err="1"/>
-              <a:t>ACKed</a:t>
-            </a:r>
-            <a:r>
-              <a:rPr lang="en-US" altLang="zh-CN" sz="8000" dirty="0"/>
-              <a:t> packet is not in the sliding window in the sender</a:t>
-            </a:r>
-          </a:p>
-          <a:p>
-            <a:pPr marL="914400" lvl="1" indent="-317500">
-              <a:lnSpc>
-                <a:spcPct val="145000"/>
+              <a:t>seqNum</a:t>
+            </a:r>
+            <a:r>
+              <a:rPr lang="en-US" altLang="zh-CN" sz="1800" dirty="0"/>
+              <a:t> in </a:t>
+            </a:r>
+            <a:r>
+              <a:rPr lang="en-US" altLang="zh-CN" sz="1800" i="1" dirty="0"/>
+              <a:t>ACK</a:t>
+            </a:r>
+            <a:r>
+              <a:rPr lang="zh-CN" altLang="en-US" sz="1800" dirty="0"/>
+              <a:t> </a:t>
+            </a:r>
+            <a:r>
+              <a:rPr lang="en-US" altLang="zh-CN" sz="1800" dirty="0"/>
+              <a:t>packet is the </a:t>
+            </a:r>
+            <a:r>
+              <a:rPr lang="en-US" altLang="zh-CN" sz="1800" b="1" i="1" dirty="0"/>
+              <a:t>next </a:t>
+            </a:r>
+            <a:r>
+              <a:rPr lang="en-US" altLang="zh-CN" sz="1800" dirty="0"/>
+              <a:t>packet to be expected just like TCP</a:t>
+            </a:r>
+            <a:endParaRPr lang="en-US" sz="1800" b="1" dirty="0"/>
+          </a:p>
+          <a:p>
+            <a:pPr marL="1371600" lvl="2" indent="-310832">
+              <a:lnSpc>
+                <a:spcPct val="114000"/>
               </a:lnSpc>
               <a:spcBef>
                 <a:spcPts val="0"/>
               </a:spcBef>
-              <a:buSzPts val="1400"/>
-              <a:buFont typeface="Arial" panose="020B0604020202020204" pitchFamily="34" charset="0"/>
-              <a:buChar char="○"/>
-            </a:pPr>
-            <a:r>
-              <a:rPr lang="en-US" altLang="zh-CN" sz="8000" dirty="0"/>
-              <a:t>Otherwise </a:t>
-            </a:r>
-            <a:r>
-              <a:rPr lang="en-US" altLang="zh-CN" sz="8000" i="1" dirty="0">
-                <a:solidFill>
-                  <a:schemeClr val="accent2"/>
-                </a:solidFill>
-              </a:rPr>
-              <a:t>retransmit</a:t>
-            </a:r>
-            <a:r>
-              <a:rPr lang="en-US" altLang="zh-CN" sz="8000" dirty="0"/>
-              <a:t> the desired packet</a:t>
-            </a:r>
-            <a:br>
-              <a:rPr lang="en-US" altLang="zh-CN" sz="3300" dirty="0"/>
-            </a:br>
-            <a:endParaRPr lang="en-US" sz="3300" dirty="0"/>
-          </a:p>
-          <a:p>
-            <a:pPr marL="457200" indent="-342900">
-              <a:lnSpc>
-                <a:spcPct val="145000"/>
-              </a:lnSpc>
-              <a:spcBef>
-                <a:spcPts val="0"/>
-              </a:spcBef>
-              <a:buSzPts val="1800"/>
-              <a:buFont typeface="Arial" panose="020B0604020202020204" pitchFamily="34" charset="0"/>
-              <a:buChar char="●"/>
-            </a:pPr>
-            <a:r>
-              <a:rPr lang="en-US" altLang="zh-CN" sz="9600" dirty="0"/>
-              <a:t>Implementation of </a:t>
-            </a:r>
-            <a:r>
-              <a:rPr lang="en-US" altLang="zh-CN" sz="9600" i="1" dirty="0"/>
-              <a:t>retransmission timer</a:t>
-            </a:r>
-            <a:endParaRPr lang="en-US" sz="9600" i="1" dirty="0"/>
-          </a:p>
-          <a:p>
-            <a:pPr marL="914400" lvl="1" indent="-317500">
-              <a:lnSpc>
-                <a:spcPct val="145000"/>
-              </a:lnSpc>
-              <a:spcBef>
-                <a:spcPts val="0"/>
-              </a:spcBef>
-              <a:buSzPts val="1400"/>
-              <a:buFont typeface="Arial" panose="020B0604020202020204" pitchFamily="34" charset="0"/>
-              <a:buChar char="○"/>
-            </a:pPr>
-            <a:r>
-              <a:rPr lang="en-US" altLang="zh-CN" sz="8000" dirty="0"/>
-              <a:t>Use a </a:t>
-            </a:r>
-            <a:r>
-              <a:rPr lang="en-US" altLang="zh-CN" sz="8000" i="1" dirty="0">
-                <a:solidFill>
-                  <a:schemeClr val="accent2"/>
-                </a:solidFill>
-              </a:rPr>
-              <a:t>timestamp</a:t>
-            </a:r>
-            <a:r>
-              <a:rPr lang="en-US" altLang="zh-CN" sz="8000" dirty="0"/>
-              <a:t> to record packet </a:t>
-            </a:r>
-            <a:r>
-              <a:rPr lang="en-US" altLang="zh-CN" sz="8000" i="1" dirty="0"/>
-              <a:t>sending</a:t>
-            </a:r>
-            <a:r>
-              <a:rPr lang="en-US" altLang="zh-CN" sz="8000" dirty="0"/>
-              <a:t> time.</a:t>
-            </a:r>
-          </a:p>
-          <a:p>
-            <a:pPr marL="914400" lvl="1" indent="-317500">
-              <a:lnSpc>
-                <a:spcPct val="145000"/>
-              </a:lnSpc>
-              <a:spcBef>
-                <a:spcPts val="0"/>
-              </a:spcBef>
-              <a:buSzPts val="1400"/>
-              <a:buFont typeface="Arial" panose="020B0604020202020204" pitchFamily="34" charset="0"/>
-              <a:buChar char="○"/>
-            </a:pPr>
-            <a:r>
-              <a:rPr lang="en-US" altLang="zh-CN" sz="8000" dirty="0"/>
-              <a:t>After sending, then wait for </a:t>
-            </a:r>
-            <a:r>
-              <a:rPr lang="en-US" altLang="zh-CN" sz="8000" i="1" dirty="0"/>
-              <a:t>ACK</a:t>
-            </a:r>
-            <a:r>
-              <a:rPr lang="en-US" altLang="zh-CN" sz="8000" dirty="0"/>
-              <a:t> receiving, </a:t>
-            </a:r>
-            <a:r>
-              <a:rPr lang="en-US" altLang="zh-CN" sz="8000" i="1" dirty="0">
-                <a:solidFill>
-                  <a:schemeClr val="accent2"/>
-                </a:solidFill>
-              </a:rPr>
-              <a:t>check the time </a:t>
-            </a:r>
-            <a:r>
-              <a:rPr lang="en-US" altLang="zh-CN" sz="8000" i="1" dirty="0"/>
-              <a:t>from timestamp to now</a:t>
-            </a:r>
-            <a:r>
-              <a:rPr lang="en-US" altLang="zh-CN" sz="8000" dirty="0"/>
-              <a:t>.</a:t>
-            </a:r>
-          </a:p>
-          <a:p>
-            <a:pPr marL="914400" lvl="1" indent="-317500">
-              <a:lnSpc>
-                <a:spcPct val="145000"/>
-              </a:lnSpc>
-              <a:spcBef>
-                <a:spcPts val="0"/>
-              </a:spcBef>
-              <a:buSzPts val="1400"/>
-              <a:buFont typeface="Arial" panose="020B0604020202020204" pitchFamily="34" charset="0"/>
-              <a:buChar char="○"/>
-            </a:pPr>
-            <a:r>
-              <a:rPr lang="en-US" altLang="zh-CN" sz="8000" dirty="0"/>
-              <a:t>If the time does not exceed timeout when receiving </a:t>
-            </a:r>
-            <a:r>
-              <a:rPr lang="en-US" altLang="zh-CN" sz="8000" i="1" dirty="0"/>
-              <a:t>ACK</a:t>
-            </a:r>
-            <a:r>
-              <a:rPr lang="en-US" altLang="zh-CN" sz="8000" dirty="0"/>
-              <a:t>, then:</a:t>
-            </a:r>
-            <a:endParaRPr lang="en-US" altLang="zh-CN" sz="7600" dirty="0"/>
-          </a:p>
-          <a:p>
-            <a:pPr marL="1377950" lvl="2" indent="-350838">
-              <a:lnSpc>
-                <a:spcPct val="145000"/>
-              </a:lnSpc>
-              <a:spcBef>
-                <a:spcPts val="0"/>
-              </a:spcBef>
-              <a:buSzPts val="1400"/>
+              <a:buClr>
+                <a:schemeClr val="tx1"/>
+              </a:buClr>
+              <a:buSzPct val="100000"/>
               <a:buFont typeface="Wingdings" pitchFamily="2" charset="2"/>
               <a:buChar char="ü"/>
             </a:pPr>
             <a:r>
-              <a:rPr lang="en-US" altLang="zh-CN" sz="7600" dirty="0"/>
-              <a:t>Move sliding window and send new packet in window</a:t>
-            </a:r>
-          </a:p>
-          <a:p>
-            <a:pPr marL="1377950" lvl="2" indent="-350838">
-              <a:lnSpc>
-                <a:spcPct val="145000"/>
+              <a:rPr lang="en-US" altLang="zh-CN" sz="1800" i="1" dirty="0" err="1"/>
+              <a:t>seqNum</a:t>
+            </a:r>
+            <a:r>
+              <a:rPr lang="en-US" altLang="zh-CN" sz="1800" dirty="0"/>
+              <a:t> begin at 0 and increment by 1 for each packet</a:t>
+            </a:r>
+            <a:r>
+              <a:rPr lang="zh-CN" altLang="en-US" sz="1800" dirty="0"/>
+              <a:t> </a:t>
+            </a:r>
+            <a:r>
+              <a:rPr lang="en-US" altLang="zh-CN" sz="1800" dirty="0"/>
+              <a:t>in</a:t>
+            </a:r>
+            <a:r>
+              <a:rPr lang="zh-CN" altLang="en-US" sz="1800" dirty="0"/>
+              <a:t> </a:t>
+            </a:r>
+            <a:r>
+              <a:rPr lang="en-US" altLang="zh-CN" sz="1800" i="1" dirty="0"/>
+              <a:t>sender </a:t>
+            </a:r>
+            <a:r>
+              <a:rPr lang="en-US" altLang="zh-CN" sz="1800" dirty="0"/>
+              <a:t>when transferring data</a:t>
+            </a:r>
+          </a:p>
+          <a:p>
+            <a:pPr marL="1371600" lvl="2" indent="-310832">
+              <a:lnSpc>
+                <a:spcPct val="114000"/>
               </a:lnSpc>
               <a:spcBef>
                 <a:spcPts val="0"/>
               </a:spcBef>
-              <a:buSzPts val="1400"/>
+              <a:buClr>
+                <a:schemeClr val="tx1"/>
+              </a:buClr>
+              <a:buSzPct val="100000"/>
               <a:buFont typeface="Wingdings" pitchFamily="2" charset="2"/>
               <a:buChar char="ü"/>
             </a:pPr>
             <a:r>
-              <a:rPr lang="en-US" altLang="zh-CN" sz="7600" dirty="0"/>
-              <a:t>Update timestamp when sending new data packet</a:t>
-            </a:r>
-          </a:p>
-          <a:p>
-            <a:pPr marL="914400" lvl="1" indent="-317500">
-              <a:lnSpc>
-                <a:spcPct val="145000"/>
-              </a:lnSpc>
-              <a:spcBef>
-                <a:spcPts val="0"/>
-              </a:spcBef>
-              <a:buSzPts val="1400"/>
-              <a:buFont typeface="Arial" panose="020B0604020202020204" pitchFamily="34" charset="0"/>
-              <a:buChar char="○"/>
-            </a:pPr>
-            <a:r>
-              <a:rPr lang="en-US" sz="8000" dirty="0"/>
-              <a:t>If the time exceed timeout, then: </a:t>
-            </a:r>
-            <a:r>
-              <a:rPr lang="en-US" sz="8000" i="1" dirty="0"/>
-              <a:t>re-transmit</a:t>
-            </a:r>
-            <a:r>
-              <a:rPr lang="en-US" sz="8000" dirty="0"/>
-              <a:t> the un-</a:t>
-            </a:r>
-            <a:r>
-              <a:rPr lang="en-US" sz="8000" dirty="0" err="1"/>
-              <a:t>ACKed</a:t>
-            </a:r>
-            <a:r>
-              <a:rPr lang="en-US" sz="8000" dirty="0"/>
-              <a:t> data.</a:t>
+              <a:rPr lang="en-US" sz="1800" i="1" dirty="0"/>
+              <a:t>Receiver</a:t>
+            </a:r>
+            <a:r>
+              <a:rPr lang="en-US" sz="1800" dirty="0"/>
+              <a:t> can just send one </a:t>
+            </a:r>
+            <a:r>
+              <a:rPr lang="en-US" altLang="zh-CN" sz="1800" dirty="0"/>
+              <a:t>cumulative</a:t>
+            </a:r>
+            <a:r>
+              <a:rPr lang="en-US" sz="1800" dirty="0"/>
+              <a:t> ACK after receiving all packets in a window rather than ACK for each packet</a:t>
             </a:r>
           </a:p>
         </p:txBody>
@@ -8796,7 +9026,7 @@
     </p:spTree>
     <p:extLst>
       <p:ext uri="{BB962C8B-B14F-4D97-AF65-F5344CB8AC3E}">
-        <p14:creationId xmlns:p14="http://schemas.microsoft.com/office/powerpoint/2010/main" val="746100141"/>
+        <p14:creationId xmlns:p14="http://schemas.microsoft.com/office/powerpoint/2010/main" val="1485044418"/>
       </p:ext>
     </p:extLst>
   </p:cSld>
@@ -8850,6 +9080,1331 @@
           <a:lstStyle/>
           <a:p>
             <a:r>
+              <a:rPr lang="en-US" altLang="zh-CN" b="1" dirty="0"/>
+              <a:t>WTP: </a:t>
+            </a:r>
+            <a:r>
+              <a:rPr lang="zh-CN" altLang="zh-CN" b="1" dirty="0"/>
+              <a:t>sliding window</a:t>
+            </a:r>
+            <a:endParaRPr lang="en-US" b="1" dirty="0"/>
+          </a:p>
+        </p:txBody>
+      </p:sp>
+      <p:sp>
+        <p:nvSpPr>
+          <p:cNvPr id="4" name="Rectangle 2">
+            <a:extLst>
+              <a:ext uri="{FF2B5EF4-FFF2-40B4-BE49-F238E27FC236}">
+                <a16:creationId xmlns:a16="http://schemas.microsoft.com/office/drawing/2014/main" id="{3A7EC6F6-3A9C-6A4E-9F5B-60AABA1D48A4}"/>
+              </a:ext>
+            </a:extLst>
+          </p:cNvPr>
+          <p:cNvSpPr>
+            <a:spLocks noChangeArrowheads="1"/>
+          </p:cNvSpPr>
+          <p:nvPr/>
+        </p:nvSpPr>
+        <p:spPr bwMode="auto">
+          <a:xfrm>
+            <a:off x="0" y="43934"/>
+            <a:ext cx="184731" cy="369332"/>
+          </a:xfrm>
+          <a:prstGeom prst="rect">
+            <a:avLst/>
+          </a:prstGeom>
+          <a:solidFill>
+            <a:srgbClr val="FFFFFF"/>
+          </a:solidFill>
+          <a:ln>
+            <a:noFill/>
+          </a:ln>
+          <a:effectLst/>
+          <a:extLst>
+            <a:ext uri="{91240B29-F687-4F45-9708-019B960494DF}">
+              <a14:hiddenLine xmlns:a14="http://schemas.microsoft.com/office/drawing/2010/main" w="9525">
+                <a:solidFill>
+                  <a:schemeClr val="tx1"/>
+                </a:solidFill>
+                <a:miter lim="800000"/>
+                <a:headEnd/>
+                <a:tailEnd/>
+              </a14:hiddenLine>
+            </a:ext>
+            <a:ext uri="{AF507438-7753-43E0-B8FC-AC1667EBCBE1}">
+              <a14:hiddenEffects xmlns:a14="http://schemas.microsoft.com/office/drawing/2010/main">
+                <a:effectLst>
+                  <a:outerShdw dist="35921" dir="2700000" algn="ctr" rotWithShape="0">
+                    <a:schemeClr val="bg2"/>
+                  </a:outerShdw>
+                </a:effectLst>
+              </a14:hiddenEffects>
+            </a:ext>
+          </a:extLst>
+        </p:spPr>
+        <p:txBody>
+          <a:bodyPr vert="horz" wrap="none" lIns="91440" tIns="45720" rIns="91440" bIns="45720" numCol="1" anchor="ctr" anchorCtr="0" compatLnSpc="1">
+            <a:prstTxWarp prst="textNoShape">
+              <a:avLst/>
+            </a:prstTxWarp>
+            <a:spAutoFit/>
+          </a:bodyPr>
+          <a:lstStyle/>
+          <a:p>
+            <a:pPr marL="0" marR="0" lvl="0" indent="0" algn="l" defTabSz="914400" rtl="0" eaLnBrk="0" fontAlgn="base" latinLnBrk="0" hangingPunct="0">
+              <a:lnSpc>
+                <a:spcPct val="100000"/>
+              </a:lnSpc>
+              <a:spcBef>
+                <a:spcPct val="0"/>
+              </a:spcBef>
+              <a:spcAft>
+                <a:spcPct val="0"/>
+              </a:spcAft>
+              <a:buClrTx/>
+              <a:buSzTx/>
+              <a:buFontTx/>
+              <a:buNone/>
+              <a:tabLst/>
+            </a:pPr>
+            <a:endParaRPr kumimoji="0" lang="zh-CN" altLang="zh-CN" sz="1800" b="0" i="0" u="none" strike="noStrike" cap="none" normalizeH="0" baseline="0" dirty="0">
+              <a:ln>
+                <a:noFill/>
+              </a:ln>
+              <a:solidFill>
+                <a:schemeClr val="tx1"/>
+              </a:solidFill>
+              <a:effectLst/>
+              <a:latin typeface="Arial" panose="020B0604020202020204" pitchFamily="34" charset="0"/>
+            </a:endParaRPr>
+          </a:p>
+        </p:txBody>
+      </p:sp>
+      <p:sp>
+        <p:nvSpPr>
+          <p:cNvPr id="7" name="Rectangle 2">
+            <a:extLst>
+              <a:ext uri="{FF2B5EF4-FFF2-40B4-BE49-F238E27FC236}">
+                <a16:creationId xmlns:a16="http://schemas.microsoft.com/office/drawing/2014/main" id="{1EE3D794-DB4E-C14E-A5D2-84852F6CC9EA}"/>
+              </a:ext>
+            </a:extLst>
+          </p:cNvPr>
+          <p:cNvSpPr>
+            <a:spLocks noChangeArrowheads="1"/>
+          </p:cNvSpPr>
+          <p:nvPr/>
+        </p:nvSpPr>
+        <p:spPr bwMode="auto">
+          <a:xfrm>
+            <a:off x="0" y="43934"/>
+            <a:ext cx="184731" cy="369332"/>
+          </a:xfrm>
+          <a:prstGeom prst="rect">
+            <a:avLst/>
+          </a:prstGeom>
+          <a:solidFill>
+            <a:srgbClr val="FFFFFF"/>
+          </a:solidFill>
+          <a:ln>
+            <a:noFill/>
+          </a:ln>
+          <a:effectLst/>
+          <a:extLst>
+            <a:ext uri="{91240B29-F687-4F45-9708-019B960494DF}">
+              <a14:hiddenLine xmlns:a14="http://schemas.microsoft.com/office/drawing/2010/main" w="9525">
+                <a:solidFill>
+                  <a:schemeClr val="tx1"/>
+                </a:solidFill>
+                <a:miter lim="800000"/>
+                <a:headEnd/>
+                <a:tailEnd/>
+              </a14:hiddenLine>
+            </a:ext>
+            <a:ext uri="{AF507438-7753-43E0-B8FC-AC1667EBCBE1}">
+              <a14:hiddenEffects xmlns:a14="http://schemas.microsoft.com/office/drawing/2010/main">
+                <a:effectLst>
+                  <a:outerShdw dist="35921" dir="2700000" algn="ctr" rotWithShape="0">
+                    <a:schemeClr val="bg2"/>
+                  </a:outerShdw>
+                </a:effectLst>
+              </a14:hiddenEffects>
+            </a:ext>
+          </a:extLst>
+        </p:spPr>
+        <p:txBody>
+          <a:bodyPr vert="horz" wrap="none" lIns="91440" tIns="45720" rIns="91440" bIns="45720" numCol="1" anchor="ctr" anchorCtr="0" compatLnSpc="1">
+            <a:prstTxWarp prst="textNoShape">
+              <a:avLst/>
+            </a:prstTxWarp>
+            <a:spAutoFit/>
+          </a:bodyPr>
+          <a:lstStyle/>
+          <a:p>
+            <a:pPr marL="0" marR="0" lvl="0" indent="0" algn="l" defTabSz="914400" rtl="0" eaLnBrk="0" fontAlgn="base" latinLnBrk="0" hangingPunct="0">
+              <a:lnSpc>
+                <a:spcPct val="100000"/>
+              </a:lnSpc>
+              <a:spcBef>
+                <a:spcPct val="0"/>
+              </a:spcBef>
+              <a:spcAft>
+                <a:spcPct val="0"/>
+              </a:spcAft>
+              <a:buClrTx/>
+              <a:buSzTx/>
+              <a:buFontTx/>
+              <a:buNone/>
+              <a:tabLst/>
+            </a:pPr>
+            <a:endParaRPr kumimoji="0" lang="zh-CN" altLang="zh-CN" sz="1800" b="0" i="0" u="none" strike="noStrike" cap="none" normalizeH="0" baseline="0" dirty="0">
+              <a:ln>
+                <a:noFill/>
+              </a:ln>
+              <a:solidFill>
+                <a:schemeClr val="tx1"/>
+              </a:solidFill>
+              <a:effectLst/>
+              <a:latin typeface="Arial" panose="020B0604020202020204" pitchFamily="34" charset="0"/>
+            </a:endParaRPr>
+          </a:p>
+        </p:txBody>
+      </p:sp>
+      <p:sp>
+        <p:nvSpPr>
+          <p:cNvPr id="8" name="Google Shape;76;p16">
+            <a:extLst>
+              <a:ext uri="{FF2B5EF4-FFF2-40B4-BE49-F238E27FC236}">
+                <a16:creationId xmlns:a16="http://schemas.microsoft.com/office/drawing/2014/main" id="{CB197AB9-D666-0CF1-8B71-F9D14429C4EA}"/>
+              </a:ext>
+            </a:extLst>
+          </p:cNvPr>
+          <p:cNvSpPr txBox="1">
+            <a:spLocks/>
+          </p:cNvSpPr>
+          <p:nvPr/>
+        </p:nvSpPr>
+        <p:spPr>
+          <a:xfrm>
+            <a:off x="838200" y="852327"/>
+            <a:ext cx="10582656" cy="1964025"/>
+          </a:xfrm>
+          <a:prstGeom prst="rect">
+            <a:avLst/>
+          </a:prstGeom>
+        </p:spPr>
+        <p:txBody>
+          <a:bodyPr spcFirstLastPara="1" vert="horz" wrap="square" lIns="91425" tIns="91425" rIns="91425" bIns="91425" rtlCol="0" anchor="t" anchorCtr="0">
+            <a:normAutofit lnSpcReduction="10000"/>
+          </a:bodyPr>
+          <a:lstStyle>
+            <a:lvl1pPr marL="228600" indent="-228600" algn="l" defTabSz="914400" rtl="0" eaLnBrk="1" latinLnBrk="0" hangingPunct="1">
+              <a:lnSpc>
+                <a:spcPct val="90000"/>
+              </a:lnSpc>
+              <a:spcBef>
+                <a:spcPts val="1000"/>
+              </a:spcBef>
+              <a:buFont typeface="Arial" panose="020B0604020202020204" pitchFamily="34" charset="0"/>
+              <a:buChar char="•"/>
+              <a:defRPr sz="2800" kern="1200">
+                <a:solidFill>
+                  <a:schemeClr val="tx1"/>
+                </a:solidFill>
+                <a:latin typeface="+mn-lt"/>
+                <a:ea typeface="+mn-ea"/>
+                <a:cs typeface="+mn-cs"/>
+              </a:defRPr>
+            </a:lvl1pPr>
+            <a:lvl2pPr marL="685800" indent="-228600" algn="l" defTabSz="914400" rtl="0" eaLnBrk="1" latinLnBrk="0" hangingPunct="1">
+              <a:lnSpc>
+                <a:spcPct val="90000"/>
+              </a:lnSpc>
+              <a:spcBef>
+                <a:spcPts val="500"/>
+              </a:spcBef>
+              <a:buFont typeface="Arial" panose="020B0604020202020204" pitchFamily="34" charset="0"/>
+              <a:buChar char="•"/>
+              <a:defRPr sz="2400" kern="1200">
+                <a:solidFill>
+                  <a:schemeClr val="tx1"/>
+                </a:solidFill>
+                <a:latin typeface="+mn-lt"/>
+                <a:ea typeface="+mn-ea"/>
+                <a:cs typeface="+mn-cs"/>
+              </a:defRPr>
+            </a:lvl2pPr>
+            <a:lvl3pPr marL="1143000" indent="-228600" algn="l" defTabSz="914400" rtl="0" eaLnBrk="1" latinLnBrk="0" hangingPunct="1">
+              <a:lnSpc>
+                <a:spcPct val="90000"/>
+              </a:lnSpc>
+              <a:spcBef>
+                <a:spcPts val="500"/>
+              </a:spcBef>
+              <a:buFont typeface="Arial" panose="020B0604020202020204" pitchFamily="34" charset="0"/>
+              <a:buChar char="•"/>
+              <a:defRPr sz="2000" kern="1200">
+                <a:solidFill>
+                  <a:schemeClr val="tx1"/>
+                </a:solidFill>
+                <a:latin typeface="+mn-lt"/>
+                <a:ea typeface="+mn-ea"/>
+                <a:cs typeface="+mn-cs"/>
+              </a:defRPr>
+            </a:lvl3pPr>
+            <a:lvl4pPr marL="1600200" indent="-228600" algn="l" defTabSz="914400" rtl="0" eaLnBrk="1" latinLnBrk="0" hangingPunct="1">
+              <a:lnSpc>
+                <a:spcPct val="90000"/>
+              </a:lnSpc>
+              <a:spcBef>
+                <a:spcPts val="500"/>
+              </a:spcBef>
+              <a:buFont typeface="Arial" panose="020B0604020202020204" pitchFamily="34" charset="0"/>
+              <a:buChar char="•"/>
+              <a:defRPr sz="1800" kern="1200">
+                <a:solidFill>
+                  <a:schemeClr val="tx1"/>
+                </a:solidFill>
+                <a:latin typeface="+mn-lt"/>
+                <a:ea typeface="+mn-ea"/>
+                <a:cs typeface="+mn-cs"/>
+              </a:defRPr>
+            </a:lvl4pPr>
+            <a:lvl5pPr marL="2057400" indent="-228600" algn="l" defTabSz="914400" rtl="0" eaLnBrk="1" latinLnBrk="0" hangingPunct="1">
+              <a:lnSpc>
+                <a:spcPct val="90000"/>
+              </a:lnSpc>
+              <a:spcBef>
+                <a:spcPts val="500"/>
+              </a:spcBef>
+              <a:buFont typeface="Arial" panose="020B0604020202020204" pitchFamily="34" charset="0"/>
+              <a:buChar char="•"/>
+              <a:defRPr sz="1800" kern="1200">
+                <a:solidFill>
+                  <a:schemeClr val="tx1"/>
+                </a:solidFill>
+                <a:latin typeface="+mn-lt"/>
+                <a:ea typeface="+mn-ea"/>
+                <a:cs typeface="+mn-cs"/>
+              </a:defRPr>
+            </a:lvl5pPr>
+            <a:lvl6pPr marL="2514600" indent="-228600" algn="l" defTabSz="914400" rtl="0" eaLnBrk="1" latinLnBrk="0" hangingPunct="1">
+              <a:lnSpc>
+                <a:spcPct val="90000"/>
+              </a:lnSpc>
+              <a:spcBef>
+                <a:spcPts val="500"/>
+              </a:spcBef>
+              <a:buFont typeface="Arial" panose="020B0604020202020204" pitchFamily="34" charset="0"/>
+              <a:buChar char="•"/>
+              <a:defRPr sz="1800" kern="1200">
+                <a:solidFill>
+                  <a:schemeClr val="tx1"/>
+                </a:solidFill>
+                <a:latin typeface="+mn-lt"/>
+                <a:ea typeface="+mn-ea"/>
+                <a:cs typeface="+mn-cs"/>
+              </a:defRPr>
+            </a:lvl6pPr>
+            <a:lvl7pPr marL="2971800" indent="-228600" algn="l" defTabSz="914400" rtl="0" eaLnBrk="1" latinLnBrk="0" hangingPunct="1">
+              <a:lnSpc>
+                <a:spcPct val="90000"/>
+              </a:lnSpc>
+              <a:spcBef>
+                <a:spcPts val="500"/>
+              </a:spcBef>
+              <a:buFont typeface="Arial" panose="020B0604020202020204" pitchFamily="34" charset="0"/>
+              <a:buChar char="•"/>
+              <a:defRPr sz="1800" kern="1200">
+                <a:solidFill>
+                  <a:schemeClr val="tx1"/>
+                </a:solidFill>
+                <a:latin typeface="+mn-lt"/>
+                <a:ea typeface="+mn-ea"/>
+                <a:cs typeface="+mn-cs"/>
+              </a:defRPr>
+            </a:lvl7pPr>
+            <a:lvl8pPr marL="3429000" indent="-228600" algn="l" defTabSz="914400" rtl="0" eaLnBrk="1" latinLnBrk="0" hangingPunct="1">
+              <a:lnSpc>
+                <a:spcPct val="90000"/>
+              </a:lnSpc>
+              <a:spcBef>
+                <a:spcPts val="500"/>
+              </a:spcBef>
+              <a:buFont typeface="Arial" panose="020B0604020202020204" pitchFamily="34" charset="0"/>
+              <a:buChar char="•"/>
+              <a:defRPr sz="1800" kern="1200">
+                <a:solidFill>
+                  <a:schemeClr val="tx1"/>
+                </a:solidFill>
+                <a:latin typeface="+mn-lt"/>
+                <a:ea typeface="+mn-ea"/>
+                <a:cs typeface="+mn-cs"/>
+              </a:defRPr>
+            </a:lvl8pPr>
+            <a:lvl9pPr marL="3886200" indent="-228600" algn="l" defTabSz="914400" rtl="0" eaLnBrk="1" latinLnBrk="0" hangingPunct="1">
+              <a:lnSpc>
+                <a:spcPct val="90000"/>
+              </a:lnSpc>
+              <a:spcBef>
+                <a:spcPts val="500"/>
+              </a:spcBef>
+              <a:buFont typeface="Arial" panose="020B0604020202020204" pitchFamily="34" charset="0"/>
+              <a:buChar char="•"/>
+              <a:defRPr sz="1800" kern="1200">
+                <a:solidFill>
+                  <a:schemeClr val="tx1"/>
+                </a:solidFill>
+                <a:latin typeface="+mn-lt"/>
+                <a:ea typeface="+mn-ea"/>
+                <a:cs typeface="+mn-cs"/>
+              </a:defRPr>
+            </a:lvl9pPr>
+          </a:lstStyle>
+          <a:p>
+            <a:pPr marL="457200" indent="-342900">
+              <a:lnSpc>
+                <a:spcPct val="125000"/>
+              </a:lnSpc>
+              <a:spcBef>
+                <a:spcPts val="0"/>
+              </a:spcBef>
+              <a:buSzPts val="1800"/>
+              <a:buFont typeface="Arial" panose="020B0604020202020204" pitchFamily="34" charset="0"/>
+              <a:buChar char="●"/>
+            </a:pPr>
+            <a:r>
+              <a:rPr lang="en-US" altLang="zh-CN" sz="2200" dirty="0"/>
+              <a:t>Initially</a:t>
+            </a:r>
+            <a:endParaRPr lang="en-US" sz="2200" dirty="0"/>
+          </a:p>
+          <a:p>
+            <a:pPr marL="914400" lvl="1" indent="-317500">
+              <a:lnSpc>
+                <a:spcPct val="125000"/>
+              </a:lnSpc>
+              <a:spcBef>
+                <a:spcPts val="0"/>
+              </a:spcBef>
+              <a:buSzPts val="1400"/>
+              <a:buFont typeface="Arial" panose="020B0604020202020204" pitchFamily="34" charset="0"/>
+              <a:buChar char="○"/>
+            </a:pPr>
+            <a:r>
+              <a:rPr lang="en-US" altLang="zh-CN" sz="1800" dirty="0"/>
+              <a:t>Send a window of packets</a:t>
+            </a:r>
+            <a:endParaRPr lang="en-US" sz="1800" dirty="0"/>
+          </a:p>
+          <a:p>
+            <a:pPr marL="457200" indent="-342900">
+              <a:lnSpc>
+                <a:spcPct val="125000"/>
+              </a:lnSpc>
+              <a:spcBef>
+                <a:spcPts val="0"/>
+              </a:spcBef>
+              <a:buSzPts val="1800"/>
+              <a:buFont typeface="Arial" panose="020B0604020202020204" pitchFamily="34" charset="0"/>
+              <a:buChar char="●"/>
+            </a:pPr>
+            <a:r>
+              <a:rPr lang="en-US" altLang="zh-CN" sz="2200" dirty="0"/>
+              <a:t>When sender sees a new </a:t>
+            </a:r>
+            <a:r>
+              <a:rPr lang="en-US" altLang="zh-CN" sz="2200" i="1" dirty="0"/>
+              <a:t>ACK</a:t>
+            </a:r>
+            <a:endParaRPr lang="en-US" sz="2200" i="1" dirty="0"/>
+          </a:p>
+          <a:p>
+            <a:pPr marL="914400" lvl="1" indent="-317500">
+              <a:lnSpc>
+                <a:spcPct val="125000"/>
+              </a:lnSpc>
+              <a:spcBef>
+                <a:spcPts val="0"/>
+              </a:spcBef>
+              <a:buSzPts val="1400"/>
+              <a:buFont typeface="Arial" panose="020B0604020202020204" pitchFamily="34" charset="0"/>
+              <a:buChar char="○"/>
+            </a:pPr>
+            <a:r>
+              <a:rPr lang="en-US" altLang="zh-CN" sz="1800" dirty="0"/>
+              <a:t>Advance the window by how many pkt </a:t>
+            </a:r>
+            <a:r>
+              <a:rPr lang="en-US" altLang="zh-CN" sz="1800" dirty="0" err="1"/>
+              <a:t>acked</a:t>
+            </a:r>
+            <a:r>
+              <a:rPr lang="en-US" altLang="zh-CN" sz="1800" dirty="0"/>
+              <a:t> (could &gt; 1: cumulative ack)</a:t>
+            </a:r>
+            <a:endParaRPr lang="en-US" sz="1800" dirty="0"/>
+          </a:p>
+          <a:p>
+            <a:pPr marL="914400" lvl="1" indent="-317500">
+              <a:lnSpc>
+                <a:spcPct val="125000"/>
+              </a:lnSpc>
+              <a:spcBef>
+                <a:spcPts val="0"/>
+              </a:spcBef>
+              <a:buSzPts val="1400"/>
+              <a:buFont typeface="Arial" panose="020B0604020202020204" pitchFamily="34" charset="0"/>
+              <a:buChar char="○"/>
+            </a:pPr>
+            <a:r>
+              <a:rPr lang="en-US" altLang="zh-CN" sz="1800" dirty="0"/>
+              <a:t>Send new packets covered by the window</a:t>
+            </a:r>
+            <a:endParaRPr lang="en-US" sz="1800" dirty="0"/>
+          </a:p>
+        </p:txBody>
+      </p:sp>
+      <p:pic>
+        <p:nvPicPr>
+          <p:cNvPr id="3" name="图片 2">
+            <a:extLst>
+              <a:ext uri="{FF2B5EF4-FFF2-40B4-BE49-F238E27FC236}">
+                <a16:creationId xmlns:a16="http://schemas.microsoft.com/office/drawing/2014/main" id="{236D3ACA-7329-6A33-335E-621584B65410}"/>
+              </a:ext>
+            </a:extLst>
+          </p:cNvPr>
+          <p:cNvPicPr>
+            <a:picLocks noChangeAspect="1"/>
+          </p:cNvPicPr>
+          <p:nvPr/>
+        </p:nvPicPr>
+        <p:blipFill>
+          <a:blip r:embed="rId2"/>
+          <a:stretch>
+            <a:fillRect/>
+          </a:stretch>
+        </p:blipFill>
+        <p:spPr>
+          <a:xfrm>
+            <a:off x="838200" y="2726846"/>
+            <a:ext cx="9073837" cy="4012281"/>
+          </a:xfrm>
+          <a:prstGeom prst="rect">
+            <a:avLst/>
+          </a:prstGeom>
+        </p:spPr>
+      </p:pic>
+    </p:spTree>
+    <p:extLst>
+      <p:ext uri="{BB962C8B-B14F-4D97-AF65-F5344CB8AC3E}">
+        <p14:creationId xmlns:p14="http://schemas.microsoft.com/office/powerpoint/2010/main" val="2626515644"/>
+      </p:ext>
+    </p:extLst>
+  </p:cSld>
+  <p:clrMapOvr>
+    <a:masterClrMapping/>
+  </p:clrMapOvr>
+</p:sld>
+</file>
+
+<file path=ppt/slides/slide7.xml><?xml version="1.0" encoding="utf-8"?>
+<p:sld xmlns:a="http://schemas.openxmlformats.org/drawingml/2006/main" xmlns:r="http://schemas.openxmlformats.org/officeDocument/2006/relationships" xmlns:p="http://schemas.openxmlformats.org/presentationml/2006/main">
+  <p:cSld>
+    <p:spTree>
+      <p:nvGrpSpPr>
+        <p:cNvPr id="1" name=""/>
+        <p:cNvGrpSpPr/>
+        <p:nvPr/>
+      </p:nvGrpSpPr>
+      <p:grpSpPr>
+        <a:xfrm>
+          <a:off x="0" y="0"/>
+          <a:ext cx="0" cy="0"/>
+          <a:chOff x="0" y="0"/>
+          <a:chExt cx="0" cy="0"/>
+        </a:xfrm>
+      </p:grpSpPr>
+      <p:sp>
+        <p:nvSpPr>
+          <p:cNvPr id="2" name="Title 1">
+            <a:extLst>
+              <a:ext uri="{FF2B5EF4-FFF2-40B4-BE49-F238E27FC236}">
+                <a16:creationId xmlns:a16="http://schemas.microsoft.com/office/drawing/2014/main" id="{45C79BA1-37A3-5741-B0A1-E64646E4283C}"/>
+              </a:ext>
+            </a:extLst>
+          </p:cNvPr>
+          <p:cNvSpPr>
+            <a:spLocks noGrp="1"/>
+          </p:cNvSpPr>
+          <p:nvPr>
+            <p:ph type="title"/>
+          </p:nvPr>
+        </p:nvSpPr>
+        <p:spPr>
+          <a:xfrm>
+            <a:off x="838200" y="-4206"/>
+            <a:ext cx="10515600" cy="1325563"/>
+          </a:xfrm>
+        </p:spPr>
+        <p:txBody>
+          <a:bodyPr/>
+          <a:lstStyle/>
+          <a:p>
+            <a:r>
+              <a:rPr lang="zh-CN" altLang="zh-CN" b="1" dirty="0"/>
+              <a:t>WTP: sender</a:t>
+            </a:r>
+            <a:endParaRPr lang="en-US" b="1" dirty="0"/>
+          </a:p>
+        </p:txBody>
+      </p:sp>
+      <p:sp>
+        <p:nvSpPr>
+          <p:cNvPr id="4" name="Rectangle 2">
+            <a:extLst>
+              <a:ext uri="{FF2B5EF4-FFF2-40B4-BE49-F238E27FC236}">
+                <a16:creationId xmlns:a16="http://schemas.microsoft.com/office/drawing/2014/main" id="{3A7EC6F6-3A9C-6A4E-9F5B-60AABA1D48A4}"/>
+              </a:ext>
+            </a:extLst>
+          </p:cNvPr>
+          <p:cNvSpPr>
+            <a:spLocks noChangeArrowheads="1"/>
+          </p:cNvSpPr>
+          <p:nvPr/>
+        </p:nvSpPr>
+        <p:spPr bwMode="auto">
+          <a:xfrm>
+            <a:off x="0" y="43934"/>
+            <a:ext cx="184731" cy="369332"/>
+          </a:xfrm>
+          <a:prstGeom prst="rect">
+            <a:avLst/>
+          </a:prstGeom>
+          <a:solidFill>
+            <a:srgbClr val="FFFFFF"/>
+          </a:solidFill>
+          <a:ln>
+            <a:noFill/>
+          </a:ln>
+          <a:effectLst/>
+          <a:extLst>
+            <a:ext uri="{91240B29-F687-4F45-9708-019B960494DF}">
+              <a14:hiddenLine xmlns:a14="http://schemas.microsoft.com/office/drawing/2010/main" w="9525">
+                <a:solidFill>
+                  <a:schemeClr val="tx1"/>
+                </a:solidFill>
+                <a:miter lim="800000"/>
+                <a:headEnd/>
+                <a:tailEnd/>
+              </a14:hiddenLine>
+            </a:ext>
+            <a:ext uri="{AF507438-7753-43E0-B8FC-AC1667EBCBE1}">
+              <a14:hiddenEffects xmlns:a14="http://schemas.microsoft.com/office/drawing/2010/main">
+                <a:effectLst>
+                  <a:outerShdw dist="35921" dir="2700000" algn="ctr" rotWithShape="0">
+                    <a:schemeClr val="bg2"/>
+                  </a:outerShdw>
+                </a:effectLst>
+              </a14:hiddenEffects>
+            </a:ext>
+          </a:extLst>
+        </p:spPr>
+        <p:txBody>
+          <a:bodyPr vert="horz" wrap="none" lIns="91440" tIns="45720" rIns="91440" bIns="45720" numCol="1" anchor="ctr" anchorCtr="0" compatLnSpc="1">
+            <a:prstTxWarp prst="textNoShape">
+              <a:avLst/>
+            </a:prstTxWarp>
+            <a:spAutoFit/>
+          </a:bodyPr>
+          <a:lstStyle/>
+          <a:p>
+            <a:pPr marL="0" marR="0" lvl="0" indent="0" algn="l" defTabSz="914400" rtl="0" eaLnBrk="0" fontAlgn="base" latinLnBrk="0" hangingPunct="0">
+              <a:lnSpc>
+                <a:spcPct val="100000"/>
+              </a:lnSpc>
+              <a:spcBef>
+                <a:spcPct val="0"/>
+              </a:spcBef>
+              <a:spcAft>
+                <a:spcPct val="0"/>
+              </a:spcAft>
+              <a:buClrTx/>
+              <a:buSzTx/>
+              <a:buFontTx/>
+              <a:buNone/>
+              <a:tabLst/>
+            </a:pPr>
+            <a:endParaRPr kumimoji="0" lang="zh-CN" altLang="zh-CN" sz="1800" b="0" i="0" u="none" strike="noStrike" cap="none" normalizeH="0" baseline="0" dirty="0">
+              <a:ln>
+                <a:noFill/>
+              </a:ln>
+              <a:solidFill>
+                <a:schemeClr val="tx1"/>
+              </a:solidFill>
+              <a:effectLst/>
+              <a:latin typeface="Arial" panose="020B0604020202020204" pitchFamily="34" charset="0"/>
+            </a:endParaRPr>
+          </a:p>
+        </p:txBody>
+      </p:sp>
+      <p:sp>
+        <p:nvSpPr>
+          <p:cNvPr id="7" name="Rectangle 2">
+            <a:extLst>
+              <a:ext uri="{FF2B5EF4-FFF2-40B4-BE49-F238E27FC236}">
+                <a16:creationId xmlns:a16="http://schemas.microsoft.com/office/drawing/2014/main" id="{1EE3D794-DB4E-C14E-A5D2-84852F6CC9EA}"/>
+              </a:ext>
+            </a:extLst>
+          </p:cNvPr>
+          <p:cNvSpPr>
+            <a:spLocks noChangeArrowheads="1"/>
+          </p:cNvSpPr>
+          <p:nvPr/>
+        </p:nvSpPr>
+        <p:spPr bwMode="auto">
+          <a:xfrm>
+            <a:off x="0" y="43934"/>
+            <a:ext cx="184731" cy="369332"/>
+          </a:xfrm>
+          <a:prstGeom prst="rect">
+            <a:avLst/>
+          </a:prstGeom>
+          <a:solidFill>
+            <a:srgbClr val="FFFFFF"/>
+          </a:solidFill>
+          <a:ln>
+            <a:noFill/>
+          </a:ln>
+          <a:effectLst/>
+          <a:extLst>
+            <a:ext uri="{91240B29-F687-4F45-9708-019B960494DF}">
+              <a14:hiddenLine xmlns:a14="http://schemas.microsoft.com/office/drawing/2010/main" w="9525">
+                <a:solidFill>
+                  <a:schemeClr val="tx1"/>
+                </a:solidFill>
+                <a:miter lim="800000"/>
+                <a:headEnd/>
+                <a:tailEnd/>
+              </a14:hiddenLine>
+            </a:ext>
+            <a:ext uri="{AF507438-7753-43E0-B8FC-AC1667EBCBE1}">
+              <a14:hiddenEffects xmlns:a14="http://schemas.microsoft.com/office/drawing/2010/main">
+                <a:effectLst>
+                  <a:outerShdw dist="35921" dir="2700000" algn="ctr" rotWithShape="0">
+                    <a:schemeClr val="bg2"/>
+                  </a:outerShdw>
+                </a:effectLst>
+              </a14:hiddenEffects>
+            </a:ext>
+          </a:extLst>
+        </p:spPr>
+        <p:txBody>
+          <a:bodyPr vert="horz" wrap="none" lIns="91440" tIns="45720" rIns="91440" bIns="45720" numCol="1" anchor="ctr" anchorCtr="0" compatLnSpc="1">
+            <a:prstTxWarp prst="textNoShape">
+              <a:avLst/>
+            </a:prstTxWarp>
+            <a:spAutoFit/>
+          </a:bodyPr>
+          <a:lstStyle/>
+          <a:p>
+            <a:pPr marL="0" marR="0" lvl="0" indent="0" algn="l" defTabSz="914400" rtl="0" eaLnBrk="0" fontAlgn="base" latinLnBrk="0" hangingPunct="0">
+              <a:lnSpc>
+                <a:spcPct val="100000"/>
+              </a:lnSpc>
+              <a:spcBef>
+                <a:spcPct val="0"/>
+              </a:spcBef>
+              <a:spcAft>
+                <a:spcPct val="0"/>
+              </a:spcAft>
+              <a:buClrTx/>
+              <a:buSzTx/>
+              <a:buFontTx/>
+              <a:buNone/>
+              <a:tabLst/>
+            </a:pPr>
+            <a:endParaRPr kumimoji="0" lang="zh-CN" altLang="zh-CN" sz="1800" b="0" i="0" u="none" strike="noStrike" cap="none" normalizeH="0" baseline="0" dirty="0">
+              <a:ln>
+                <a:noFill/>
+              </a:ln>
+              <a:solidFill>
+                <a:schemeClr val="tx1"/>
+              </a:solidFill>
+              <a:effectLst/>
+              <a:latin typeface="Arial" panose="020B0604020202020204" pitchFamily="34" charset="0"/>
+            </a:endParaRPr>
+          </a:p>
+        </p:txBody>
+      </p:sp>
+      <p:sp>
+        <p:nvSpPr>
+          <p:cNvPr id="8" name="Google Shape;83;p17">
+            <a:extLst>
+              <a:ext uri="{FF2B5EF4-FFF2-40B4-BE49-F238E27FC236}">
+                <a16:creationId xmlns:a16="http://schemas.microsoft.com/office/drawing/2014/main" id="{090BEAF3-E38A-D357-DD2B-221412EE44DE}"/>
+              </a:ext>
+            </a:extLst>
+          </p:cNvPr>
+          <p:cNvSpPr txBox="1">
+            <a:spLocks/>
+          </p:cNvSpPr>
+          <p:nvPr/>
+        </p:nvSpPr>
+        <p:spPr>
+          <a:xfrm>
+            <a:off x="838199" y="1199833"/>
+            <a:ext cx="10200503" cy="5561693"/>
+          </a:xfrm>
+          <a:prstGeom prst="rect">
+            <a:avLst/>
+          </a:prstGeom>
+        </p:spPr>
+        <p:txBody>
+          <a:bodyPr spcFirstLastPara="1" vert="horz" wrap="square" lIns="91425" tIns="91425" rIns="91425" bIns="91425" rtlCol="0" anchor="t" anchorCtr="0">
+            <a:normAutofit fontScale="25000" lnSpcReduction="20000"/>
+          </a:bodyPr>
+          <a:lstStyle>
+            <a:lvl1pPr marL="228600" indent="-228600" algn="l" defTabSz="914400" rtl="0" eaLnBrk="1" latinLnBrk="0" hangingPunct="1">
+              <a:lnSpc>
+                <a:spcPct val="90000"/>
+              </a:lnSpc>
+              <a:spcBef>
+                <a:spcPts val="1000"/>
+              </a:spcBef>
+              <a:buFont typeface="Arial" panose="020B0604020202020204" pitchFamily="34" charset="0"/>
+              <a:buChar char="•"/>
+              <a:defRPr sz="2800" kern="1200">
+                <a:solidFill>
+                  <a:schemeClr val="tx1"/>
+                </a:solidFill>
+                <a:latin typeface="+mn-lt"/>
+                <a:ea typeface="+mn-ea"/>
+                <a:cs typeface="+mn-cs"/>
+              </a:defRPr>
+            </a:lvl1pPr>
+            <a:lvl2pPr marL="685800" indent="-228600" algn="l" defTabSz="914400" rtl="0" eaLnBrk="1" latinLnBrk="0" hangingPunct="1">
+              <a:lnSpc>
+                <a:spcPct val="90000"/>
+              </a:lnSpc>
+              <a:spcBef>
+                <a:spcPts val="500"/>
+              </a:spcBef>
+              <a:buFont typeface="Arial" panose="020B0604020202020204" pitchFamily="34" charset="0"/>
+              <a:buChar char="•"/>
+              <a:defRPr sz="2400" kern="1200">
+                <a:solidFill>
+                  <a:schemeClr val="tx1"/>
+                </a:solidFill>
+                <a:latin typeface="+mn-lt"/>
+                <a:ea typeface="+mn-ea"/>
+                <a:cs typeface="+mn-cs"/>
+              </a:defRPr>
+            </a:lvl2pPr>
+            <a:lvl3pPr marL="1143000" indent="-228600" algn="l" defTabSz="914400" rtl="0" eaLnBrk="1" latinLnBrk="0" hangingPunct="1">
+              <a:lnSpc>
+                <a:spcPct val="90000"/>
+              </a:lnSpc>
+              <a:spcBef>
+                <a:spcPts val="500"/>
+              </a:spcBef>
+              <a:buFont typeface="Arial" panose="020B0604020202020204" pitchFamily="34" charset="0"/>
+              <a:buChar char="•"/>
+              <a:defRPr sz="2000" kern="1200">
+                <a:solidFill>
+                  <a:schemeClr val="tx1"/>
+                </a:solidFill>
+                <a:latin typeface="+mn-lt"/>
+                <a:ea typeface="+mn-ea"/>
+                <a:cs typeface="+mn-cs"/>
+              </a:defRPr>
+            </a:lvl3pPr>
+            <a:lvl4pPr marL="1600200" indent="-228600" algn="l" defTabSz="914400" rtl="0" eaLnBrk="1" latinLnBrk="0" hangingPunct="1">
+              <a:lnSpc>
+                <a:spcPct val="90000"/>
+              </a:lnSpc>
+              <a:spcBef>
+                <a:spcPts val="500"/>
+              </a:spcBef>
+              <a:buFont typeface="Arial" panose="020B0604020202020204" pitchFamily="34" charset="0"/>
+              <a:buChar char="•"/>
+              <a:defRPr sz="1800" kern="1200">
+                <a:solidFill>
+                  <a:schemeClr val="tx1"/>
+                </a:solidFill>
+                <a:latin typeface="+mn-lt"/>
+                <a:ea typeface="+mn-ea"/>
+                <a:cs typeface="+mn-cs"/>
+              </a:defRPr>
+            </a:lvl4pPr>
+            <a:lvl5pPr marL="2057400" indent="-228600" algn="l" defTabSz="914400" rtl="0" eaLnBrk="1" latinLnBrk="0" hangingPunct="1">
+              <a:lnSpc>
+                <a:spcPct val="90000"/>
+              </a:lnSpc>
+              <a:spcBef>
+                <a:spcPts val="500"/>
+              </a:spcBef>
+              <a:buFont typeface="Arial" panose="020B0604020202020204" pitchFamily="34" charset="0"/>
+              <a:buChar char="•"/>
+              <a:defRPr sz="1800" kern="1200">
+                <a:solidFill>
+                  <a:schemeClr val="tx1"/>
+                </a:solidFill>
+                <a:latin typeface="+mn-lt"/>
+                <a:ea typeface="+mn-ea"/>
+                <a:cs typeface="+mn-cs"/>
+              </a:defRPr>
+            </a:lvl5pPr>
+            <a:lvl6pPr marL="2514600" indent="-228600" algn="l" defTabSz="914400" rtl="0" eaLnBrk="1" latinLnBrk="0" hangingPunct="1">
+              <a:lnSpc>
+                <a:spcPct val="90000"/>
+              </a:lnSpc>
+              <a:spcBef>
+                <a:spcPts val="500"/>
+              </a:spcBef>
+              <a:buFont typeface="Arial" panose="020B0604020202020204" pitchFamily="34" charset="0"/>
+              <a:buChar char="•"/>
+              <a:defRPr sz="1800" kern="1200">
+                <a:solidFill>
+                  <a:schemeClr val="tx1"/>
+                </a:solidFill>
+                <a:latin typeface="+mn-lt"/>
+                <a:ea typeface="+mn-ea"/>
+                <a:cs typeface="+mn-cs"/>
+              </a:defRPr>
+            </a:lvl6pPr>
+            <a:lvl7pPr marL="2971800" indent="-228600" algn="l" defTabSz="914400" rtl="0" eaLnBrk="1" latinLnBrk="0" hangingPunct="1">
+              <a:lnSpc>
+                <a:spcPct val="90000"/>
+              </a:lnSpc>
+              <a:spcBef>
+                <a:spcPts val="500"/>
+              </a:spcBef>
+              <a:buFont typeface="Arial" panose="020B0604020202020204" pitchFamily="34" charset="0"/>
+              <a:buChar char="•"/>
+              <a:defRPr sz="1800" kern="1200">
+                <a:solidFill>
+                  <a:schemeClr val="tx1"/>
+                </a:solidFill>
+                <a:latin typeface="+mn-lt"/>
+                <a:ea typeface="+mn-ea"/>
+                <a:cs typeface="+mn-cs"/>
+              </a:defRPr>
+            </a:lvl7pPr>
+            <a:lvl8pPr marL="3429000" indent="-228600" algn="l" defTabSz="914400" rtl="0" eaLnBrk="1" latinLnBrk="0" hangingPunct="1">
+              <a:lnSpc>
+                <a:spcPct val="90000"/>
+              </a:lnSpc>
+              <a:spcBef>
+                <a:spcPts val="500"/>
+              </a:spcBef>
+              <a:buFont typeface="Arial" panose="020B0604020202020204" pitchFamily="34" charset="0"/>
+              <a:buChar char="•"/>
+              <a:defRPr sz="1800" kern="1200">
+                <a:solidFill>
+                  <a:schemeClr val="tx1"/>
+                </a:solidFill>
+                <a:latin typeface="+mn-lt"/>
+                <a:ea typeface="+mn-ea"/>
+                <a:cs typeface="+mn-cs"/>
+              </a:defRPr>
+            </a:lvl8pPr>
+            <a:lvl9pPr marL="3886200" indent="-228600" algn="l" defTabSz="914400" rtl="0" eaLnBrk="1" latinLnBrk="0" hangingPunct="1">
+              <a:lnSpc>
+                <a:spcPct val="90000"/>
+              </a:lnSpc>
+              <a:spcBef>
+                <a:spcPts val="500"/>
+              </a:spcBef>
+              <a:buFont typeface="Arial" panose="020B0604020202020204" pitchFamily="34" charset="0"/>
+              <a:buChar char="•"/>
+              <a:defRPr sz="1800" kern="1200">
+                <a:solidFill>
+                  <a:schemeClr val="tx1"/>
+                </a:solidFill>
+                <a:latin typeface="+mn-lt"/>
+                <a:ea typeface="+mn-ea"/>
+                <a:cs typeface="+mn-cs"/>
+              </a:defRPr>
+            </a:lvl9pPr>
+          </a:lstStyle>
+          <a:p>
+            <a:pPr marL="0" indent="0">
+              <a:spcBef>
+                <a:spcPts val="0"/>
+              </a:spcBef>
+              <a:buFont typeface="Arial" panose="020B0604020202020204" pitchFamily="34" charset="0"/>
+              <a:buNone/>
+            </a:pPr>
+            <a:r>
+              <a:rPr lang="en-US" altLang="zh-CN" sz="12800" b="1" dirty="0"/>
+              <a:t>Special Cases Strategy</a:t>
+            </a:r>
+            <a:endParaRPr lang="en-US" sz="12800" b="1" dirty="0"/>
+          </a:p>
+          <a:p>
+            <a:pPr marL="457200" indent="-342900">
+              <a:lnSpc>
+                <a:spcPct val="145000"/>
+              </a:lnSpc>
+              <a:spcBef>
+                <a:spcPts val="1200"/>
+              </a:spcBef>
+              <a:buSzPts val="1800"/>
+              <a:buFont typeface="Arial" panose="020B0604020202020204" pitchFamily="34" charset="0"/>
+              <a:buChar char="●"/>
+            </a:pPr>
+            <a:r>
+              <a:rPr lang="en-US" altLang="zh-CN" sz="9600" i="1" dirty="0"/>
+              <a:t>Packet Loss</a:t>
+            </a:r>
+            <a:r>
+              <a:rPr lang="en-US" altLang="zh-CN" sz="9600" dirty="0"/>
+              <a:t>: retransmission timer</a:t>
+            </a:r>
+            <a:endParaRPr lang="en-US" sz="9600" dirty="0"/>
+          </a:p>
+          <a:p>
+            <a:pPr marL="457200" indent="-342900">
+              <a:lnSpc>
+                <a:spcPct val="145000"/>
+              </a:lnSpc>
+              <a:spcBef>
+                <a:spcPts val="0"/>
+              </a:spcBef>
+              <a:buSzPts val="1800"/>
+              <a:buFont typeface="Arial" panose="020B0604020202020204" pitchFamily="34" charset="0"/>
+              <a:buChar char="●"/>
+            </a:pPr>
+            <a:r>
+              <a:rPr lang="en-US" altLang="zh-CN" sz="9600" i="1" dirty="0"/>
+              <a:t>Reordered/delayed/duplicated ACK</a:t>
+            </a:r>
+            <a:r>
+              <a:rPr lang="en-US" altLang="zh-CN" sz="9600" dirty="0"/>
+              <a:t>:</a:t>
+            </a:r>
+          </a:p>
+          <a:p>
+            <a:pPr marL="914400" lvl="1" indent="-317500">
+              <a:lnSpc>
+                <a:spcPct val="145000"/>
+              </a:lnSpc>
+              <a:spcBef>
+                <a:spcPts val="0"/>
+              </a:spcBef>
+              <a:buClr>
+                <a:schemeClr val="tx1"/>
+              </a:buClr>
+              <a:buSzPts val="1400"/>
+              <a:buFont typeface="Arial" panose="020B0604020202020204" pitchFamily="34" charset="0"/>
+              <a:buChar char="○"/>
+            </a:pPr>
+            <a:r>
+              <a:rPr lang="en-US" altLang="zh-CN" sz="8000" i="1" dirty="0">
+                <a:solidFill>
+                  <a:schemeClr val="accent2"/>
+                </a:solidFill>
+              </a:rPr>
+              <a:t>Ignore</a:t>
+            </a:r>
+            <a:r>
+              <a:rPr lang="en-US" altLang="zh-CN" sz="8000" dirty="0"/>
+              <a:t> if the </a:t>
+            </a:r>
+            <a:r>
+              <a:rPr lang="en-US" altLang="zh-CN" sz="8000" dirty="0" err="1"/>
+              <a:t>ACKed</a:t>
+            </a:r>
+            <a:r>
+              <a:rPr lang="en-US" altLang="zh-CN" sz="8000" dirty="0"/>
+              <a:t> packet is not in the sliding window in the sender</a:t>
+            </a:r>
+          </a:p>
+          <a:p>
+            <a:pPr marL="914400" lvl="1" indent="-317500">
+              <a:lnSpc>
+                <a:spcPct val="145000"/>
+              </a:lnSpc>
+              <a:spcBef>
+                <a:spcPts val="0"/>
+              </a:spcBef>
+              <a:buSzPts val="1400"/>
+              <a:buFont typeface="Arial" panose="020B0604020202020204" pitchFamily="34" charset="0"/>
+              <a:buChar char="○"/>
+            </a:pPr>
+            <a:r>
+              <a:rPr lang="en-US" altLang="zh-CN" sz="8000" dirty="0"/>
+              <a:t>Otherwise </a:t>
+            </a:r>
+            <a:r>
+              <a:rPr lang="en-US" altLang="zh-CN" sz="8000" i="1" dirty="0">
+                <a:solidFill>
+                  <a:schemeClr val="accent2"/>
+                </a:solidFill>
+              </a:rPr>
+              <a:t>retransmit</a:t>
+            </a:r>
+            <a:r>
+              <a:rPr lang="en-US" altLang="zh-CN" sz="8000" dirty="0"/>
+              <a:t> the desired packet</a:t>
+            </a:r>
+            <a:br>
+              <a:rPr lang="en-US" altLang="zh-CN" sz="3300" dirty="0"/>
+            </a:br>
+            <a:endParaRPr lang="en-US" sz="3300" dirty="0"/>
+          </a:p>
+          <a:p>
+            <a:pPr marL="457200" indent="-342900">
+              <a:lnSpc>
+                <a:spcPct val="145000"/>
+              </a:lnSpc>
+              <a:spcBef>
+                <a:spcPts val="0"/>
+              </a:spcBef>
+              <a:buSzPts val="1800"/>
+              <a:buFont typeface="Arial" panose="020B0604020202020204" pitchFamily="34" charset="0"/>
+              <a:buChar char="●"/>
+            </a:pPr>
+            <a:r>
+              <a:rPr lang="en-US" altLang="zh-CN" sz="9600" dirty="0"/>
+              <a:t>Implementation of </a:t>
+            </a:r>
+            <a:r>
+              <a:rPr lang="en-US" altLang="zh-CN" sz="9600" i="1" dirty="0"/>
+              <a:t>retransmission timer</a:t>
+            </a:r>
+            <a:endParaRPr lang="en-US" sz="9600" i="1" dirty="0"/>
+          </a:p>
+          <a:p>
+            <a:pPr marL="914400" lvl="1" indent="-317500">
+              <a:lnSpc>
+                <a:spcPct val="145000"/>
+              </a:lnSpc>
+              <a:spcBef>
+                <a:spcPts val="0"/>
+              </a:spcBef>
+              <a:buSzPts val="1400"/>
+              <a:buFont typeface="Arial" panose="020B0604020202020204" pitchFamily="34" charset="0"/>
+              <a:buChar char="○"/>
+            </a:pPr>
+            <a:r>
+              <a:rPr lang="en-US" altLang="zh-CN" sz="8000" dirty="0"/>
+              <a:t>Use a </a:t>
+            </a:r>
+            <a:r>
+              <a:rPr lang="en-US" altLang="zh-CN" sz="8000" i="1" dirty="0">
+                <a:solidFill>
+                  <a:schemeClr val="accent2"/>
+                </a:solidFill>
+              </a:rPr>
+              <a:t>timestamp</a:t>
+            </a:r>
+            <a:r>
+              <a:rPr lang="en-US" altLang="zh-CN" sz="8000" dirty="0"/>
+              <a:t> to record packet </a:t>
+            </a:r>
+            <a:r>
+              <a:rPr lang="en-US" altLang="zh-CN" sz="8000" i="1" dirty="0"/>
+              <a:t>sending</a:t>
+            </a:r>
+            <a:r>
+              <a:rPr lang="en-US" altLang="zh-CN" sz="8000" dirty="0"/>
+              <a:t> time.</a:t>
+            </a:r>
+          </a:p>
+          <a:p>
+            <a:pPr marL="914400" lvl="1" indent="-317500">
+              <a:lnSpc>
+                <a:spcPct val="145000"/>
+              </a:lnSpc>
+              <a:spcBef>
+                <a:spcPts val="0"/>
+              </a:spcBef>
+              <a:buSzPts val="1400"/>
+              <a:buFont typeface="Arial" panose="020B0604020202020204" pitchFamily="34" charset="0"/>
+              <a:buChar char="○"/>
+            </a:pPr>
+            <a:r>
+              <a:rPr lang="en-US" altLang="zh-CN" sz="8000" dirty="0"/>
+              <a:t>After sending, then wait for </a:t>
+            </a:r>
+            <a:r>
+              <a:rPr lang="en-US" altLang="zh-CN" sz="8000" i="1" dirty="0"/>
+              <a:t>ACK</a:t>
+            </a:r>
+            <a:r>
+              <a:rPr lang="en-US" altLang="zh-CN" sz="8000" dirty="0"/>
+              <a:t> receiving, </a:t>
+            </a:r>
+            <a:r>
+              <a:rPr lang="en-US" altLang="zh-CN" sz="8000" i="1" dirty="0">
+                <a:solidFill>
+                  <a:schemeClr val="accent2"/>
+                </a:solidFill>
+              </a:rPr>
+              <a:t>check the time </a:t>
+            </a:r>
+            <a:r>
+              <a:rPr lang="en-US" altLang="zh-CN" sz="8000" i="1" dirty="0"/>
+              <a:t>from timestamp to now</a:t>
+            </a:r>
+            <a:r>
+              <a:rPr lang="en-US" altLang="zh-CN" sz="8000" dirty="0"/>
+              <a:t>.</a:t>
+            </a:r>
+          </a:p>
+          <a:p>
+            <a:pPr marL="914400" lvl="1" indent="-317500">
+              <a:lnSpc>
+                <a:spcPct val="145000"/>
+              </a:lnSpc>
+              <a:spcBef>
+                <a:spcPts val="0"/>
+              </a:spcBef>
+              <a:buSzPts val="1400"/>
+              <a:buFont typeface="Arial" panose="020B0604020202020204" pitchFamily="34" charset="0"/>
+              <a:buChar char="○"/>
+            </a:pPr>
+            <a:r>
+              <a:rPr lang="en-US" altLang="zh-CN" sz="8000" dirty="0"/>
+              <a:t>If the time does not exceed timeout when receiving </a:t>
+            </a:r>
+            <a:r>
+              <a:rPr lang="en-US" altLang="zh-CN" sz="8000" i="1" dirty="0"/>
+              <a:t>ACK</a:t>
+            </a:r>
+            <a:r>
+              <a:rPr lang="en-US" altLang="zh-CN" sz="8000" dirty="0"/>
+              <a:t>, then:</a:t>
+            </a:r>
+            <a:endParaRPr lang="en-US" altLang="zh-CN" sz="7600" dirty="0"/>
+          </a:p>
+          <a:p>
+            <a:pPr marL="1377950" lvl="2" indent="-350838">
+              <a:lnSpc>
+                <a:spcPct val="145000"/>
+              </a:lnSpc>
+              <a:spcBef>
+                <a:spcPts val="0"/>
+              </a:spcBef>
+              <a:buSzPts val="1400"/>
+              <a:buFont typeface="Wingdings" pitchFamily="2" charset="2"/>
+              <a:buChar char="ü"/>
+            </a:pPr>
+            <a:r>
+              <a:rPr lang="en-US" altLang="zh-CN" sz="7600" dirty="0"/>
+              <a:t>Move sliding window and send new packet in window</a:t>
+            </a:r>
+          </a:p>
+          <a:p>
+            <a:pPr marL="1377950" lvl="2" indent="-350838">
+              <a:lnSpc>
+                <a:spcPct val="145000"/>
+              </a:lnSpc>
+              <a:spcBef>
+                <a:spcPts val="0"/>
+              </a:spcBef>
+              <a:buSzPts val="1400"/>
+              <a:buFont typeface="Wingdings" pitchFamily="2" charset="2"/>
+              <a:buChar char="ü"/>
+            </a:pPr>
+            <a:r>
+              <a:rPr lang="en-US" altLang="zh-CN" sz="7600" dirty="0"/>
+              <a:t>Update timestamp when sending new data packet</a:t>
+            </a:r>
+          </a:p>
+          <a:p>
+            <a:pPr marL="914400" lvl="1" indent="-317500">
+              <a:lnSpc>
+                <a:spcPct val="145000"/>
+              </a:lnSpc>
+              <a:spcBef>
+                <a:spcPts val="0"/>
+              </a:spcBef>
+              <a:buSzPts val="1400"/>
+              <a:buFont typeface="Arial" panose="020B0604020202020204" pitchFamily="34" charset="0"/>
+              <a:buChar char="○"/>
+            </a:pPr>
+            <a:r>
+              <a:rPr lang="en-US" sz="8000" dirty="0"/>
+              <a:t>If the time exceed timeout, then: </a:t>
+            </a:r>
+            <a:r>
+              <a:rPr lang="en-US" sz="8000" i="1" dirty="0"/>
+              <a:t>re-transmit</a:t>
+            </a:r>
+            <a:r>
+              <a:rPr lang="en-US" sz="8000" dirty="0"/>
+              <a:t> the un-</a:t>
+            </a:r>
+            <a:r>
+              <a:rPr lang="en-US" sz="8000" dirty="0" err="1"/>
+              <a:t>ACKed</a:t>
+            </a:r>
+            <a:r>
+              <a:rPr lang="en-US" sz="8000" dirty="0"/>
+              <a:t> data.</a:t>
+            </a:r>
+          </a:p>
+        </p:txBody>
+      </p:sp>
+    </p:spTree>
+    <p:extLst>
+      <p:ext uri="{BB962C8B-B14F-4D97-AF65-F5344CB8AC3E}">
+        <p14:creationId xmlns:p14="http://schemas.microsoft.com/office/powerpoint/2010/main" val="746100141"/>
+      </p:ext>
+    </p:extLst>
+  </p:cSld>
+  <p:clrMapOvr>
+    <a:masterClrMapping/>
+  </p:clrMapOvr>
+</p:sld>
+</file>
+
+<file path=ppt/slides/slide8.xml><?xml version="1.0" encoding="utf-8"?>
+<p:sld xmlns:a="http://schemas.openxmlformats.org/drawingml/2006/main" xmlns:r="http://schemas.openxmlformats.org/officeDocument/2006/relationships" xmlns:p="http://schemas.openxmlformats.org/presentationml/2006/main">
+  <p:cSld>
+    <p:spTree>
+      <p:nvGrpSpPr>
+        <p:cNvPr id="1" name=""/>
+        <p:cNvGrpSpPr/>
+        <p:nvPr/>
+      </p:nvGrpSpPr>
+      <p:grpSpPr>
+        <a:xfrm>
+          <a:off x="0" y="0"/>
+          <a:ext cx="0" cy="0"/>
+          <a:chOff x="0" y="0"/>
+          <a:chExt cx="0" cy="0"/>
+        </a:xfrm>
+      </p:grpSpPr>
+      <p:sp>
+        <p:nvSpPr>
+          <p:cNvPr id="2" name="Title 1">
+            <a:extLst>
+              <a:ext uri="{FF2B5EF4-FFF2-40B4-BE49-F238E27FC236}">
+                <a16:creationId xmlns:a16="http://schemas.microsoft.com/office/drawing/2014/main" id="{45C79BA1-37A3-5741-B0A1-E64646E4283C}"/>
+              </a:ext>
+            </a:extLst>
+          </p:cNvPr>
+          <p:cNvSpPr>
+            <a:spLocks noGrp="1"/>
+          </p:cNvSpPr>
+          <p:nvPr>
+            <p:ph type="title"/>
+          </p:nvPr>
+        </p:nvSpPr>
+        <p:spPr>
+          <a:xfrm>
+            <a:off x="838200" y="-4206"/>
+            <a:ext cx="10515600" cy="1325563"/>
+          </a:xfrm>
+        </p:spPr>
+        <p:txBody>
+          <a:bodyPr/>
+          <a:lstStyle/>
+          <a:p>
+            <a:r>
               <a:rPr lang="zh-CN" altLang="zh-CN" b="1" dirty="0"/>
               <a:t>Hint: non-blocking recv</a:t>
             </a:r>
@@ -9515,7 +11070,7 @@
 </p:sld>
 </file>
 
-<file path=ppt/slides/slide7.xml><?xml version="1.0" encoding="utf-8"?>
+<file path=ppt/slides/slide9.xml><?xml version="1.0" encoding="utf-8"?>
 <p:sld xmlns:a="http://schemas.openxmlformats.org/drawingml/2006/main" xmlns:r="http://schemas.openxmlformats.org/officeDocument/2006/relationships" xmlns:p="http://schemas.openxmlformats.org/presentationml/2006/main">
   <p:cSld>
     <p:spTree>
@@ -9925,323 +11480,6 @@
     <p:extLst>
       <p:ext uri="{BB962C8B-B14F-4D97-AF65-F5344CB8AC3E}">
         <p14:creationId xmlns:p14="http://schemas.microsoft.com/office/powerpoint/2010/main" val="312586823"/>
-      </p:ext>
-    </p:extLst>
-  </p:cSld>
-  <p:clrMapOvr>
-    <a:masterClrMapping/>
-  </p:clrMapOvr>
-</p:sld>
-</file>
-
-<file path=ppt/slides/slide8.xml><?xml version="1.0" encoding="utf-8"?>
-<p:sld xmlns:a="http://schemas.openxmlformats.org/drawingml/2006/main" xmlns:r="http://schemas.openxmlformats.org/officeDocument/2006/relationships" xmlns:p="http://schemas.openxmlformats.org/presentationml/2006/main">
-  <p:cSld>
-    <p:spTree>
-      <p:nvGrpSpPr>
-        <p:cNvPr id="1" name=""/>
-        <p:cNvGrpSpPr/>
-        <p:nvPr/>
-      </p:nvGrpSpPr>
-      <p:grpSpPr>
-        <a:xfrm>
-          <a:off x="0" y="0"/>
-          <a:ext cx="0" cy="0"/>
-          <a:chOff x="0" y="0"/>
-          <a:chExt cx="0" cy="0"/>
-        </a:xfrm>
-      </p:grpSpPr>
-      <p:sp>
-        <p:nvSpPr>
-          <p:cNvPr id="2" name="标题 1">
-            <a:extLst>
-              <a:ext uri="{FF2B5EF4-FFF2-40B4-BE49-F238E27FC236}">
-                <a16:creationId xmlns:a16="http://schemas.microsoft.com/office/drawing/2014/main" id="{8D7A4BFD-FF2E-4FE5-8458-67338C96BAF4}"/>
-              </a:ext>
-            </a:extLst>
-          </p:cNvPr>
-          <p:cNvSpPr>
-            <a:spLocks noGrp="1"/>
-          </p:cNvSpPr>
-          <p:nvPr>
-            <p:ph type="title"/>
-          </p:nvPr>
-        </p:nvSpPr>
-        <p:spPr>
-          <a:xfrm>
-            <a:off x="838200" y="3688711"/>
-            <a:ext cx="10515600" cy="646331"/>
-          </a:xfrm>
-        </p:spPr>
-        <p:txBody>
-          <a:bodyPr>
-            <a:normAutofit/>
-          </a:bodyPr>
-          <a:lstStyle/>
-          <a:p>
-            <a:pPr algn="ctr"/>
-            <a:r>
-              <a:rPr lang="en-US" sz="3200" dirty="0">
-                <a:latin typeface="+mn-lt"/>
-              </a:rPr>
-              <a:t>Assignment 3 Q &amp; A</a:t>
-            </a:r>
-          </a:p>
-        </p:txBody>
-      </p:sp>
-      <p:sp>
-        <p:nvSpPr>
-          <p:cNvPr id="3" name="Title 1">
-            <a:extLst>
-              <a:ext uri="{FF2B5EF4-FFF2-40B4-BE49-F238E27FC236}">
-                <a16:creationId xmlns:a16="http://schemas.microsoft.com/office/drawing/2014/main" id="{41C77E84-359B-B990-B568-A3302507241B}"/>
-              </a:ext>
-            </a:extLst>
-          </p:cNvPr>
-          <p:cNvSpPr txBox="1">
-            <a:spLocks/>
-          </p:cNvSpPr>
-          <p:nvPr/>
-        </p:nvSpPr>
-        <p:spPr>
-          <a:xfrm>
-            <a:off x="838200" y="1138744"/>
-            <a:ext cx="10515600" cy="1325563"/>
-          </a:xfrm>
-          <a:prstGeom prst="rect">
-            <a:avLst/>
-          </a:prstGeom>
-        </p:spPr>
-        <p:txBody>
-          <a:bodyPr vert="horz" lIns="91440" tIns="45720" rIns="91440" bIns="45720" rtlCol="0" anchor="ctr">
-            <a:normAutofit/>
-          </a:bodyPr>
-          <a:lstStyle>
-            <a:lvl1pPr algn="l" defTabSz="914400" rtl="0" eaLnBrk="1" latinLnBrk="0" hangingPunct="1">
-              <a:lnSpc>
-                <a:spcPct val="90000"/>
-              </a:lnSpc>
-              <a:spcBef>
-                <a:spcPct val="0"/>
-              </a:spcBef>
-              <a:buNone/>
-              <a:defRPr sz="4400" kern="1200">
-                <a:solidFill>
-                  <a:schemeClr val="tx1"/>
-                </a:solidFill>
-                <a:latin typeface="+mj-lt"/>
-                <a:ea typeface="+mj-ea"/>
-                <a:cs typeface="+mj-cs"/>
-              </a:defRPr>
-            </a:lvl1pPr>
-          </a:lstStyle>
-          <a:p>
-            <a:r>
-              <a:rPr lang="en-US" b="1" dirty="0"/>
-              <a:t>Please</a:t>
-            </a:r>
-            <a:r>
-              <a:rPr lang="zh-CN" altLang="en-US" b="1" dirty="0"/>
-              <a:t> </a:t>
-            </a:r>
-            <a:r>
-              <a:rPr lang="en-US" altLang="zh-CN" b="1" dirty="0"/>
-              <a:t>refer</a:t>
-            </a:r>
-            <a:r>
-              <a:rPr lang="zh-CN" altLang="en-US" b="1" dirty="0"/>
-              <a:t> </a:t>
-            </a:r>
-            <a:r>
-              <a:rPr lang="en-US" altLang="zh-CN" b="1" dirty="0"/>
-              <a:t>to the </a:t>
-            </a:r>
-            <a:r>
-              <a:rPr lang="en-US" altLang="zh-CN" b="1" dirty="0" err="1"/>
-              <a:t>Github</a:t>
-            </a:r>
-            <a:r>
-              <a:rPr lang="en-US" altLang="zh-CN" b="1" dirty="0"/>
-              <a:t> Webpage for more detailed implementation hints.</a:t>
-            </a:r>
-            <a:endParaRPr lang="en-US" b="1" dirty="0"/>
-          </a:p>
-        </p:txBody>
-      </p:sp>
-      <p:sp>
-        <p:nvSpPr>
-          <p:cNvPr id="4" name="文本框 3">
-            <a:extLst>
-              <a:ext uri="{FF2B5EF4-FFF2-40B4-BE49-F238E27FC236}">
-                <a16:creationId xmlns:a16="http://schemas.microsoft.com/office/drawing/2014/main" id="{C81EC202-5887-D163-A62A-3C0264C98434}"/>
-              </a:ext>
-            </a:extLst>
-          </p:cNvPr>
-          <p:cNvSpPr txBox="1"/>
-          <p:nvPr/>
-        </p:nvSpPr>
-        <p:spPr>
-          <a:xfrm>
-            <a:off x="838200" y="2753343"/>
-            <a:ext cx="10086986" cy="646331"/>
-          </a:xfrm>
-          <a:prstGeom prst="rect">
-            <a:avLst/>
-          </a:prstGeom>
-          <a:noFill/>
-        </p:spPr>
-        <p:txBody>
-          <a:bodyPr wrap="square" rtlCol="0">
-            <a:spAutoFit/>
-          </a:bodyPr>
-          <a:lstStyle/>
-          <a:p>
-            <a:r>
-              <a:rPr kumimoji="1" lang="en-US" altLang="zh-CN" dirty="0"/>
-              <a:t>Note: the </a:t>
-            </a:r>
-            <a:r>
-              <a:rPr kumimoji="1" lang="en-US" altLang="zh-CN" i="1" dirty="0"/>
-              <a:t>base part </a:t>
-            </a:r>
-            <a:r>
-              <a:rPr kumimoji="1" lang="en-US" altLang="zh-CN" dirty="0"/>
-              <a:t>of WTP is not the typical Go-Back-N method (we do not ACK for every received packet), please follow the information in </a:t>
-            </a:r>
-            <a:r>
-              <a:rPr kumimoji="1" lang="en-US" altLang="zh-CN" dirty="0" err="1"/>
-              <a:t>Github</a:t>
-            </a:r>
-            <a:r>
-              <a:rPr kumimoji="1" lang="en-US" altLang="zh-CN" dirty="0"/>
-              <a:t> Webpage and this tutorial strictly for implementation.</a:t>
-            </a:r>
-            <a:endParaRPr kumimoji="1" lang="zh-CN" altLang="en-US" dirty="0"/>
-          </a:p>
-        </p:txBody>
-      </p:sp>
-      <p:sp>
-        <p:nvSpPr>
-          <p:cNvPr id="5" name="标题 1">
-            <a:extLst>
-              <a:ext uri="{FF2B5EF4-FFF2-40B4-BE49-F238E27FC236}">
-                <a16:creationId xmlns:a16="http://schemas.microsoft.com/office/drawing/2014/main" id="{E8F71926-39FF-3A84-7BE0-15AD94B7F033}"/>
-              </a:ext>
-            </a:extLst>
-          </p:cNvPr>
-          <p:cNvSpPr txBox="1">
-            <a:spLocks/>
-          </p:cNvSpPr>
-          <p:nvPr/>
-        </p:nvSpPr>
-        <p:spPr>
-          <a:xfrm>
-            <a:off x="623893" y="4782879"/>
-            <a:ext cx="10515600" cy="646331"/>
-          </a:xfrm>
-          <a:prstGeom prst="rect">
-            <a:avLst/>
-          </a:prstGeom>
-        </p:spPr>
-        <p:txBody>
-          <a:bodyPr vert="horz" lIns="91440" tIns="45720" rIns="91440" bIns="45720" rtlCol="0" anchor="ctr">
-            <a:normAutofit/>
-          </a:bodyPr>
-          <a:lstStyle>
-            <a:lvl1pPr algn="l" defTabSz="914400" rtl="0" eaLnBrk="1" latinLnBrk="0" hangingPunct="1">
-              <a:lnSpc>
-                <a:spcPct val="90000"/>
-              </a:lnSpc>
-              <a:spcBef>
-                <a:spcPct val="0"/>
-              </a:spcBef>
-              <a:buNone/>
-              <a:defRPr sz="4400" kern="1200">
-                <a:solidFill>
-                  <a:schemeClr val="tx1"/>
-                </a:solidFill>
-                <a:latin typeface="+mj-lt"/>
-                <a:ea typeface="+mj-ea"/>
-                <a:cs typeface="+mj-cs"/>
-              </a:defRPr>
-            </a:lvl1pPr>
-          </a:lstStyle>
-          <a:p>
-            <a:pPr algn="ctr"/>
-            <a:endParaRPr lang="en-US" sz="3200" dirty="0">
-              <a:latin typeface="+mn-lt"/>
-            </a:endParaRPr>
-          </a:p>
-        </p:txBody>
-      </p:sp>
-    </p:spTree>
-    <p:extLst>
-      <p:ext uri="{BB962C8B-B14F-4D97-AF65-F5344CB8AC3E}">
-        <p14:creationId xmlns:p14="http://schemas.microsoft.com/office/powerpoint/2010/main" val="2292626886"/>
-      </p:ext>
-    </p:extLst>
-  </p:cSld>
-  <p:clrMapOvr>
-    <a:masterClrMapping/>
-  </p:clrMapOvr>
-</p:sld>
-</file>
-
-<file path=ppt/slides/slide9.xml><?xml version="1.0" encoding="utf-8"?>
-<p:sld xmlns:a="http://schemas.openxmlformats.org/drawingml/2006/main" xmlns:r="http://schemas.openxmlformats.org/officeDocument/2006/relationships" xmlns:p="http://schemas.openxmlformats.org/presentationml/2006/main">
-  <p:cSld>
-    <p:spTree>
-      <p:nvGrpSpPr>
-        <p:cNvPr id="1" name=""/>
-        <p:cNvGrpSpPr/>
-        <p:nvPr/>
-      </p:nvGrpSpPr>
-      <p:grpSpPr>
-        <a:xfrm>
-          <a:off x="0" y="0"/>
-          <a:ext cx="0" cy="0"/>
-          <a:chOff x="0" y="0"/>
-          <a:chExt cx="0" cy="0"/>
-        </a:xfrm>
-      </p:grpSpPr>
-      <p:sp>
-        <p:nvSpPr>
-          <p:cNvPr id="4" name="Rectangle 3">
-            <a:extLst>
-              <a:ext uri="{FF2B5EF4-FFF2-40B4-BE49-F238E27FC236}">
-                <a16:creationId xmlns:a16="http://schemas.microsoft.com/office/drawing/2014/main" id="{A8D2CAE8-E323-A14E-A62F-188A25405FEA}"/>
-              </a:ext>
-            </a:extLst>
-          </p:cNvPr>
-          <p:cNvSpPr/>
-          <p:nvPr/>
-        </p:nvSpPr>
-        <p:spPr>
-          <a:xfrm>
-            <a:off x="4851400" y="3167390"/>
-            <a:ext cx="2603500" cy="830997"/>
-          </a:xfrm>
-          <a:prstGeom prst="rect">
-            <a:avLst/>
-          </a:prstGeom>
-        </p:spPr>
-        <p:txBody>
-          <a:bodyPr wrap="square">
-            <a:spAutoFit/>
-          </a:bodyPr>
-          <a:lstStyle/>
-          <a:p>
-            <a:r>
-              <a:rPr lang="en-US" sz="4800" dirty="0"/>
-              <a:t>Thanks!</a:t>
-            </a:r>
-          </a:p>
-        </p:txBody>
-      </p:sp>
-    </p:spTree>
-    <p:extLst>
-      <p:ext uri="{BB962C8B-B14F-4D97-AF65-F5344CB8AC3E}">
-        <p14:creationId xmlns:p14="http://schemas.microsoft.com/office/powerpoint/2010/main" val="3216618933"/>
       </p:ext>
     </p:extLst>
   </p:cSld>
